--- a/docs/content/graphing_effectively/graphing_effectively_lecture.pptx
+++ b/docs/content/graphing_effectively/graphing_effectively_lecture.pptx
@@ -39,6 +39,8 @@
     <p:sldId id="287" r:id="rId33"/>
     <p:sldId id="288" r:id="rId34"/>
     <p:sldId id="289" r:id="rId35"/>
+    <p:sldId id="290" r:id="rId36"/>
+    <p:sldId id="291" r:id="rId37"/>
   </p:sldIdLst>
   <p:sldSz cx="9144000" cy="5143500" type="screen16x9"/>
   <p:notesSz cx="6858000" cy="9144000"/>
@@ -3499,7 +3501,7 @@
                 </a:solidFill>
                 <a:latin typeface="Courier"/>
               </a:rPr>
-              <a:t> n_s, </a:t>
+              <a:t> side, </a:t>
             </a:r>
             <a:r>
               <a:rPr>
@@ -3517,7 +3519,7 @@
                 </a:solidFill>
                 <a:latin typeface="Courier"/>
               </a:rPr>
-              <a:t> length_mm, </a:t>
+              <a:t> needle_length_mm, </a:t>
             </a:r>
             <a:r>
               <a:rPr>
@@ -3535,7 +3537,7 @@
                 </a:solidFill>
                 <a:latin typeface="Courier"/>
               </a:rPr>
-              <a:t> n_s)) </a:t>
+              <a:t> side)) </a:t>
             </a:r>
             <a:r>
               <a:rPr>
@@ -3797,7 +3799,7 @@
       </p:sp>
       <p:pic>
         <p:nvPicPr>
-          <p:cNvPr descr="graphing_effectively_lecture_files/figure-pptx/unnamed-chunk-5-1.png" id="0" name="Picture 1"/>
+          <p:cNvPr descr="graphing_effectively_lecture_files/figure-pptx/graphing-effectively-05-1.png" id="0" name="Picture 1"/>
           <p:cNvPicPr>
             <a:picLocks noGrp="1" noChangeAspect="1"/>
           </p:cNvPicPr>
@@ -3860,7 +3862,7 @@
               <a:rPr sz="2000">
                 <a:latin typeface="Courier"/>
               </a:rPr>
-              <a:t>n_s</a:t>
+              <a:t>side</a:t>
             </a:r>
             <a:r>
               <a:rPr sz="2000"/>
@@ -3870,7 +3872,7 @@
               <a:rPr sz="2000">
                 <a:latin typeface="Courier"/>
               </a:rPr>
-              <a:t>length_mm</a:t>
+              <a:t>needle_length_mm</a:t>
             </a:r>
             <a:r>
               <a:rPr sz="2000"/>
@@ -3939,7 +3941,7 @@
               <a:rPr sz="2000">
                 <a:latin typeface="Courier"/>
               </a:rPr>
-              <a:t>n_s</a:t>
+              <a:t>side</a:t>
             </a:r>
             <a:r>
               <a:rPr sz="2000"/>
@@ -4076,7 +4078,7 @@
                 </a:solidFill>
                 <a:latin typeface="Courier"/>
               </a:rPr>
-              <a:t> n_s, </a:t>
+              <a:t> side, </a:t>
             </a:r>
             <a:r>
               <a:rPr>
@@ -4094,7 +4096,7 @@
                 </a:solidFill>
                 <a:latin typeface="Courier"/>
               </a:rPr>
-              <a:t> length_mm, </a:t>
+              <a:t> needle_length_mm, </a:t>
             </a:r>
             <a:r>
               <a:rPr>
@@ -4112,7 +4114,7 @@
                 </a:solidFill>
                 <a:latin typeface="Courier"/>
               </a:rPr>
-              <a:t> n_s)) </a:t>
+              <a:t> side)) </a:t>
             </a:r>
             <a:r>
               <a:rPr>
@@ -4387,7 +4389,7 @@
                 </a:solidFill>
                 <a:latin typeface="Courier"/>
               </a:rPr>
-              <a:t>"Side of tree (shady = n, sunny = s)"</a:t>
+              <a:t>"Side of tree"</a:t>
             </a:r>
             <a:r>
               <a:rPr>
@@ -4525,7 +4527,7 @@
                 </a:solidFill>
                 <a:latin typeface="Courier"/>
               </a:rPr>
-              <a:t>"Data: pine_needles.csv"</a:t>
+              <a:t>"Data: pine_data.csv"</a:t>
             </a:r>
             <a:br/>
             <a:r>
@@ -4688,7 +4690,7 @@
       </p:sp>
       <p:pic>
         <p:nvPicPr>
-          <p:cNvPr descr="graphing_effectively_lecture_files/figure-pptx/unnamed-chunk-6-1.png" id="0" name="Picture 1"/>
+          <p:cNvPr descr="graphing_effectively_lecture_files/figure-pptx/graphing-effectively-06-1.png" id="0" name="Picture 1"/>
           <p:cNvPicPr>
             <a:picLocks noGrp="1" noChangeAspect="1"/>
           </p:cNvPicPr>
@@ -5184,7 +5186,7 @@
                 </a:solidFill>
                 <a:latin typeface="Courier"/>
               </a:rPr>
-              <a:t> n_s, </a:t>
+              <a:t> side, </a:t>
             </a:r>
             <a:r>
               <a:rPr>
@@ -5202,7 +5204,7 @@
                 </a:solidFill>
                 <a:latin typeface="Courier"/>
               </a:rPr>
-              <a:t> length_mm, </a:t>
+              <a:t> needle_length_mm, </a:t>
             </a:r>
             <a:r>
               <a:rPr>
@@ -5220,7 +5222,7 @@
                 </a:solidFill>
                 <a:latin typeface="Courier"/>
               </a:rPr>
-              <a:t> group)) </a:t>
+              <a:t> team)) </a:t>
             </a:r>
             <a:r>
               <a:rPr>
@@ -5329,7 +5331,44 @@
                 </a:solidFill>
                 <a:latin typeface="Courier"/>
               </a:rPr>
-              <a:t>, </a:t>
+              <a:t>)) </a:t>
+            </a:r>
+            <a:r>
+              <a:rPr>
+                <a:solidFill>
+                  <a:srgbClr val="5E5E5E"/>
+                </a:solidFill>
+                <a:latin typeface="Courier"/>
+              </a:rPr>
+              <a:t>+</a:t>
+            </a:r>
+            <a:br/>
+            <a:r>
+              <a:rPr>
+                <a:solidFill>
+                  <a:srgbClr val="003B4F"/>
+                </a:solidFill>
+                <a:latin typeface="Courier"/>
+              </a:rPr>
+              <a:t>  </a:t>
+            </a:r>
+            <a:r>
+              <a:rPr>
+                <a:solidFill>
+                  <a:srgbClr val="4758AB"/>
+                </a:solidFill>
+                <a:latin typeface="Courier"/>
+              </a:rPr>
+              <a:t>labs</a:t>
+            </a:r>
+            <a:r>
+              <a:rPr>
+                <a:solidFill>
+                  <a:srgbClr val="003B4F"/>
+                </a:solidFill>
+                <a:latin typeface="Courier"/>
+              </a:rPr>
+              <a:t>(</a:t>
             </a:r>
             <a:r>
               <a:rPr>
@@ -5338,7 +5377,7 @@
                 </a:solidFill>
                 <a:latin typeface="Courier"/>
               </a:rPr>
-              <a:t>seed =</a:t>
+              <a:t>color =</a:t>
             </a:r>
             <a:r>
               <a:rPr>
@@ -5352,20 +5391,20 @@
             <a:r>
               <a:rPr>
                 <a:solidFill>
-                  <a:srgbClr val="AD0000"/>
-                </a:solidFill>
-                <a:latin typeface="Courier"/>
-              </a:rPr>
-              <a:t>42</a:t>
-            </a:r>
-            <a:r>
-              <a:rPr>
-                <a:solidFill>
-                  <a:srgbClr val="003B4F"/>
-                </a:solidFill>
-                <a:latin typeface="Courier"/>
-              </a:rPr>
-              <a:t>)) </a:t>
+                  <a:srgbClr val="20794D"/>
+                </a:solidFill>
+                <a:latin typeface="Courier"/>
+              </a:rPr>
+              <a:t>"Field team"</a:t>
+            </a:r>
+            <a:r>
+              <a:rPr>
+                <a:solidFill>
+                  <a:srgbClr val="003B4F"/>
+                </a:solidFill>
+                <a:latin typeface="Courier"/>
+              </a:rPr>
+              <a:t>) </a:t>
             </a:r>
             <a:r>
               <a:rPr>
@@ -5374,87 +5413,14 @@
                 </a:solidFill>
                 <a:latin typeface="Courier"/>
               </a:rPr>
-              <a:t>+</a:t>
-            </a:r>
-            <a:br/>
-            <a:r>
-              <a:rPr>
-                <a:solidFill>
-                  <a:srgbClr val="003B4F"/>
-                </a:solidFill>
-                <a:latin typeface="Courier"/>
-              </a:rPr>
-              <a:t>  </a:t>
-            </a:r>
-            <a:r>
-              <a:rPr>
-                <a:solidFill>
-                  <a:srgbClr val="4758AB"/>
-                </a:solidFill>
-                <a:latin typeface="Courier"/>
-              </a:rPr>
-              <a:t>labs</a:t>
-            </a:r>
-            <a:r>
-              <a:rPr>
-                <a:solidFill>
-                  <a:srgbClr val="003B4F"/>
-                </a:solidFill>
-                <a:latin typeface="Courier"/>
-              </a:rPr>
-              <a:t>(</a:t>
-            </a:r>
-            <a:r>
-              <a:rPr>
-                <a:solidFill>
-                  <a:srgbClr val="657422"/>
-                </a:solidFill>
-                <a:latin typeface="Courier"/>
-              </a:rPr>
-              <a:t>color =</a:t>
-            </a:r>
-            <a:r>
-              <a:rPr>
-                <a:solidFill>
-                  <a:srgbClr val="003B4F"/>
-                </a:solidFill>
-                <a:latin typeface="Courier"/>
-              </a:rPr>
-              <a:t> </a:t>
-            </a:r>
-            <a:r>
-              <a:rPr>
-                <a:solidFill>
-                  <a:srgbClr val="20794D"/>
-                </a:solidFill>
-                <a:latin typeface="Courier"/>
-              </a:rPr>
-              <a:t>"Field team"</a:t>
-            </a:r>
-            <a:r>
-              <a:rPr>
-                <a:solidFill>
-                  <a:srgbClr val="003B4F"/>
-                </a:solidFill>
-                <a:latin typeface="Courier"/>
-              </a:rPr>
-              <a:t>) </a:t>
-            </a:r>
-            <a:r>
-              <a:rPr>
-                <a:solidFill>
-                  <a:srgbClr val="5E5E5E"/>
-                </a:solidFill>
-                <a:latin typeface="Courier"/>
-              </a:rPr>
-              <a:t># matches aes(color = group)</a:t>
+              <a:t># matches aes(color = team)</a:t>
             </a:r>
           </a:p>
         </p:txBody>
       </p:sp>
       <p:pic>
         <p:nvPicPr>
-          <p:cNvPr descr="graphing_effectively_lecture_files/figure-pptx/unnamed-chunk-7-1.png" id="0" name="Picture 1"/>
+          <p:cNvPr descr="graphing_effectively_lecture_files/figure-pptx/graphing-effectively-07-1.png" id="0" name="Picture 1"/>
           <p:cNvPicPr>
             <a:picLocks noGrp="1" noChangeAspect="1"/>
           </p:cNvPicPr>
@@ -5766,7 +5732,7 @@
                 </a:solidFill>
                 <a:latin typeface="Courier"/>
               </a:rPr>
-              <a:t> n_s, </a:t>
+              <a:t> side, </a:t>
             </a:r>
             <a:r>
               <a:rPr>
@@ -5784,7 +5750,7 @@
                 </a:solidFill>
                 <a:latin typeface="Courier"/>
               </a:rPr>
-              <a:t> length_mm, </a:t>
+              <a:t> needle_length_mm, </a:t>
             </a:r>
             <a:r>
               <a:rPr>
@@ -5802,7 +5768,7 @@
                 </a:solidFill>
                 <a:latin typeface="Courier"/>
               </a:rPr>
-              <a:t> group)) </a:t>
+              <a:t> team)) </a:t>
             </a:r>
             <a:r>
               <a:rPr>
@@ -5913,42 +5879,6 @@
                 <a:latin typeface="Courier"/>
               </a:rPr>
               <a:t>0.15</a:t>
-            </a:r>
-            <a:r>
-              <a:rPr>
-                <a:solidFill>
-                  <a:srgbClr val="003B4F"/>
-                </a:solidFill>
-                <a:latin typeface="Courier"/>
-              </a:rPr>
-              <a:t>, </a:t>
-            </a:r>
-            <a:r>
-              <a:rPr>
-                <a:solidFill>
-                  <a:srgbClr val="657422"/>
-                </a:solidFill>
-                <a:latin typeface="Courier"/>
-              </a:rPr>
-              <a:t>seed =</a:t>
-            </a:r>
-            <a:r>
-              <a:rPr>
-                <a:solidFill>
-                  <a:srgbClr val="003B4F"/>
-                </a:solidFill>
-                <a:latin typeface="Courier"/>
-              </a:rPr>
-              <a:t> </a:t>
-            </a:r>
-            <a:r>
-              <a:rPr>
-                <a:solidFill>
-                  <a:srgbClr val="AD0000"/>
-                </a:solidFill>
-                <a:latin typeface="Courier"/>
-              </a:rPr>
-              <a:t>42</a:t>
             </a:r>
             <a:r>
               <a:rPr>
@@ -6363,7 +6293,7 @@
       </p:sp>
       <p:pic>
         <p:nvPicPr>
-          <p:cNvPr descr="graphing_effectively_lecture_files/figure-pptx/unnamed-chunk-8-1.png" id="0" name="Picture 1"/>
+          <p:cNvPr descr="graphing_effectively_lecture_files/figure-pptx/graphing-effectively-08-1.png" id="0" name="Picture 1"/>
           <p:cNvPicPr>
             <a:picLocks noGrp="1" noChangeAspect="1"/>
           </p:cNvPicPr>
@@ -6411,7 +6341,7 @@
               <a:rPr>
                 <a:latin typeface="Courier"/>
               </a:rPr>
-              <a:t>color = group</a:t>
+              <a:t>color = team</a:t>
             </a:r>
             <a:r>
               <a:rPr/>
@@ -6510,7 +6440,7 @@
               <a:rPr sz="2000">
                 <a:latin typeface="Courier"/>
               </a:rPr>
-              <a:t>color = group</a:t>
+              <a:t>color = team</a:t>
             </a:r>
             <a:r>
               <a:rPr sz="2000"/>
@@ -6684,17 +6614,17 @@
             </a:r>
             <a:r>
               <a:rPr sz="2000"/>
-              <a:t> We found </a:t>
+              <a:t> In Describing Your Data we found the overall </a:t>
             </a:r>
             <a:r>
               <a:rPr sz="2000">
                 <a:latin typeface="Courier"/>
               </a:rPr>
-              <a:t>mean(length_mm)</a:t>
+              <a:t>mean(needle_length_mm)</a:t>
             </a:r>
             <a:r>
               <a:rPr sz="2000"/>
-              <a:t> ≈ 17.7 in Describing Your Data, with a fairly small gap from the median. What shape do you expect the full distribution to have — symmetric, or skewed?</a:t>
+              <a:t> ≈ 14.67 and the median ≈ 14.55 — nearly identical. What shape do you expect the full distribution to have — symmetric, or skewed?</a:t>
             </a:r>
           </a:p>
         </p:txBody>
@@ -6791,7 +6721,7 @@
                 </a:solidFill>
                 <a:latin typeface="Courier"/>
               </a:rPr>
-              <a:t> length_mm)) </a:t>
+              <a:t> needle_length_mm)) </a:t>
             </a:r>
             <a:r>
               <a:rPr>
@@ -7192,7 +7122,7 @@
       </p:sp>
       <p:pic>
         <p:nvPicPr>
-          <p:cNvPr descr="graphing_effectively_lecture_files/figure-pptx/unnamed-chunk-9-1.png" id="0" name="Picture 1"/>
+          <p:cNvPr descr="graphing_effectively_lecture_files/figure-pptx/graphing-effectively-09-1.png" id="0" name="Picture 1"/>
           <p:cNvPicPr>
             <a:picLocks noGrp="1" noChangeAspect="1"/>
           </p:cNvPicPr>
@@ -7463,7 +7393,7 @@
                 </a:solidFill>
                 <a:latin typeface="Courier"/>
               </a:rPr>
-              <a:t> length_mm, </a:t>
+              <a:t> needle_length_mm, </a:t>
             </a:r>
             <a:r>
               <a:rPr>
@@ -7481,7 +7411,7 @@
                 </a:solidFill>
                 <a:latin typeface="Courier"/>
               </a:rPr>
-              <a:t> n_s)) </a:t>
+              <a:t> side)) </a:t>
             </a:r>
             <a:r>
               <a:rPr>
@@ -7681,7 +7611,7 @@
                 </a:solidFill>
                 <a:latin typeface="Courier"/>
               </a:rPr>
-              <a:t>n_s, </a:t>
+              <a:t>side, </a:t>
             </a:r>
             <a:r>
               <a:rPr>
@@ -8015,7 +7945,7 @@
       </p:sp>
       <p:pic>
         <p:nvPicPr>
-          <p:cNvPr descr="graphing_effectively_lecture_files/figure-pptx/unnamed-chunk-10-1.png" id="0" name="Picture 1"/>
+          <p:cNvPr descr="graphing_effectively_lecture_files/figure-pptx/graphing-effectively-10-1.png" id="0" name="Picture 1"/>
           <p:cNvPicPr>
             <a:picLocks noGrp="1" noChangeAspect="1"/>
           </p:cNvPicPr>
@@ -8208,7 +8138,7 @@
                 </a:solidFill>
                 <a:latin typeface="Courier"/>
               </a:rPr>
-              <a:t> length_mm, </a:t>
+              <a:t> needle_length_mm, </a:t>
             </a:r>
             <a:r>
               <a:rPr>
@@ -8226,7 +8156,7 @@
                 </a:solidFill>
                 <a:latin typeface="Courier"/>
               </a:rPr>
-              <a:t> n_s)) </a:t>
+              <a:t> side)) </a:t>
             </a:r>
             <a:r>
               <a:rPr>
@@ -8601,7 +8531,7 @@
       </p:sp>
       <p:pic>
         <p:nvPicPr>
-          <p:cNvPr descr="graphing_effectively_lecture_files/figure-pptx/unnamed-chunk-11-1.png" id="0" name="Picture 1"/>
+          <p:cNvPr descr="graphing_effectively_lecture_files/figure-pptx/graphing-effectively-11-1.png" id="0" name="Picture 1"/>
           <p:cNvPicPr>
             <a:picLocks noGrp="1" noChangeAspect="1"/>
           </p:cNvPicPr>
@@ -9166,7 +9096,7 @@
                 </a:solidFill>
                 <a:latin typeface="Courier"/>
               </a:rPr>
-              <a:t> n_s, </a:t>
+              <a:t> side, </a:t>
             </a:r>
             <a:r>
               <a:rPr>
@@ -9184,7 +9114,7 @@
                 </a:solidFill>
                 <a:latin typeface="Courier"/>
               </a:rPr>
-              <a:t> length_mm, </a:t>
+              <a:t> needle_length_mm, </a:t>
             </a:r>
             <a:r>
               <a:rPr>
@@ -9202,7 +9132,7 @@
                 </a:solidFill>
                 <a:latin typeface="Courier"/>
               </a:rPr>
-              <a:t> n_s)) </a:t>
+              <a:t> side)) </a:t>
             </a:r>
             <a:r>
               <a:rPr>
@@ -9313,42 +9243,6 @@
                 <a:latin typeface="Courier"/>
               </a:rPr>
               <a:t>0.15</a:t>
-            </a:r>
-            <a:r>
-              <a:rPr>
-                <a:solidFill>
-                  <a:srgbClr val="003B4F"/>
-                </a:solidFill>
-                <a:latin typeface="Courier"/>
-              </a:rPr>
-              <a:t>, </a:t>
-            </a:r>
-            <a:r>
-              <a:rPr>
-                <a:solidFill>
-                  <a:srgbClr val="657422"/>
-                </a:solidFill>
-                <a:latin typeface="Courier"/>
-              </a:rPr>
-              <a:t>seed =</a:t>
-            </a:r>
-            <a:r>
-              <a:rPr>
-                <a:solidFill>
-                  <a:srgbClr val="003B4F"/>
-                </a:solidFill>
-                <a:latin typeface="Courier"/>
-              </a:rPr>
-              <a:t> </a:t>
-            </a:r>
-            <a:r>
-              <a:rPr>
-                <a:solidFill>
-                  <a:srgbClr val="AD0000"/>
-                </a:solidFill>
-                <a:latin typeface="Courier"/>
-              </a:rPr>
-              <a:t>42</a:t>
             </a:r>
             <a:r>
               <a:rPr>
@@ -10121,7 +10015,7 @@
       </p:sp>
       <p:pic>
         <p:nvPicPr>
-          <p:cNvPr descr="graphing_effectively_lecture_files/figure-pptx/unnamed-chunk-12-1.png" id="0" name="Picture 1"/>
+          <p:cNvPr descr="graphing_effectively_lecture_files/figure-pptx/graphing-effectively-12-1.png" id="0" name="Picture 1"/>
           <p:cNvPicPr>
             <a:picLocks noGrp="1" noChangeAspect="1"/>
           </p:cNvPicPr>
@@ -10367,7 +10261,7 @@
             </a:pPr>
             <a:r>
               <a:rPr sz="2000" b="1"/>
-              <a:t>Note</a:t>
+              <a:t>Warning</a:t>
             </a:r>
           </a:p>
           <a:p>
@@ -10376,7 +10270,7 @@
             </a:pPr>
             <a:r>
               <a:rPr sz="2000" b="1"/>
-              <a:t>✅ Key idea</a:t>
+              <a:t>⚠️ Convenient, but read the fine print</a:t>
             </a:r>
           </a:p>
           <a:p>
@@ -10385,7 +10279,23 @@
             </a:pPr>
             <a:r>
               <a:rPr sz="2000"/>
-              <a:t>This is the exact same mean and SE you calculated by hand in Describing Your Data — now you can see them.</a:t>
+              <a:t>“Straight from the raw data” means it used </a:t>
+            </a:r>
+            <a:r>
+              <a:rPr sz="2000" b="1"/>
+              <a:t>all 64 needles</a:t>
+            </a:r>
+            <a:r>
+              <a:rPr sz="2000"/>
+              <a:t>. Those are the </a:t>
+            </a:r>
+            <a:r>
+              <a:rPr sz="2000" i="1"/>
+              <a:t>naive</a:t>
+            </a:r>
+            <a:r>
+              <a:rPr sz="2000"/>
+              <a:t> error bars from Describing Your Data — the ones that treat 8 needles from one tree as 8 independent facts.</a:t>
             </a:r>
           </a:p>
         </p:txBody>
@@ -10437,7 +10347,53 @@
             </a:pPr>
             <a:r>
               <a:rPr/>
-              <a:t>Part 5 · Faceting — One Panel Per Group</a:t>
+              <a:t>The error bar is a claim — make it an honest one</a:t>
+            </a:r>
+          </a:p>
+        </p:txBody>
+      </p:sp>
+      <p:sp>
+        <p:nvSpPr>
+          <p:cNvPr id="3" name="Content Placeholder 2"/>
+          <p:cNvSpPr>
+            <a:spLocks noGrp="1"/>
+          </p:cNvSpPr>
+          <p:nvPr>
+            <p:ph idx="1"/>
+          </p:nvPr>
+        </p:nvSpPr>
+        <p:spPr/>
+        <p:txBody>
+          <a:bodyPr/>
+          <a:lstStyle/>
+          <a:p>
+            <a:pPr lvl="0" indent="0" marL="1270000">
+              <a:buNone/>
+            </a:pPr>
+            <a:r>
+              <a:rPr sz="2000" b="1"/>
+              <a:t>Note</a:t>
+            </a:r>
+          </a:p>
+          <a:p>
+            <a:pPr lvl="0" indent="0" marL="1270000">
+              <a:buNone/>
+            </a:pPr>
+            <a:r>
+              <a:rPr sz="2000" b="1"/>
+              <a:t>🔮 Predict first:</a:t>
+            </a:r>
+            <a:r>
+              <a:rPr sz="2000"/>
+              <a:t> We are about to draw the same two means, but with error bars built from the </a:t>
+            </a:r>
+            <a:r>
+              <a:rPr sz="2000" b="1"/>
+              <a:t>4 tree means</a:t>
+            </a:r>
+            <a:r>
+              <a:rPr sz="2000"/>
+              <a:t> instead of the 64 needles. Will the dots move? Will the bars?</a:t>
             </a:r>
           </a:p>
         </p:txBody>
@@ -10466,36 +10422,6 @@
       </p:grpSpPr>
       <p:sp>
         <p:nvSpPr>
-          <p:cNvPr id="2" name="Title 1"/>
-          <p:cNvSpPr>
-            <a:spLocks noGrp="1"/>
-          </p:cNvSpPr>
-          <p:nvPr>
-            <p:ph type="title"/>
-          </p:nvPr>
-        </p:nvSpPr>
-        <p:spPr>
-          <a:xfrm>
-            <a:off x="139485" y="78119"/>
-            <a:ext cx="8229600" cy="607682"/>
-          </a:xfrm>
-        </p:spPr>
-        <p:txBody>
-          <a:bodyPr/>
-          <a:lstStyle/>
-          <a:p>
-            <a:pPr lvl="0" indent="0" marL="0">
-              <a:buNone/>
-            </a:pPr>
-            <a:r>
-              <a:rPr/>
-              <a:t>Faceting — One Panel Per Group</a:t>
-            </a:r>
-          </a:p>
-        </p:txBody>
-      </p:sp>
-      <p:sp>
-        <p:nvSpPr>
           <p:cNvPr id="3" name="Text Placeholder 2"/>
           <p:cNvSpPr>
             <a:spLocks noGrp="1"/>
@@ -10519,7 +10445,26 @@
                 </a:solidFill>
                 <a:latin typeface="Courier"/>
               </a:rPr>
-              <a:t>pine_facet_plot &lt;- </a:t>
+              <a:t>team_means_df &lt;- pine_df </a:t>
+            </a:r>
+            <a:r>
+              <a:rPr>
+                <a:solidFill>
+                  <a:srgbClr val="5E5E5E"/>
+                </a:solidFill>
+                <a:latin typeface="Courier"/>
+              </a:rPr>
+              <a:t>|&gt;</a:t>
+            </a:r>
+            <a:br/>
+            <a:r>
+              <a:rPr>
+                <a:solidFill>
+                  <a:srgbClr val="003B4F"/>
+                </a:solidFill>
+                <a:latin typeface="Courier"/>
+              </a:rPr>
+              <a:t>  </a:t>
             </a:r>
             <a:r>
               <a:rPr>
@@ -10528,16 +10473,35 @@
                 </a:solidFill>
                 <a:latin typeface="Courier"/>
               </a:rPr>
-              <a:t>ggplot</a:t>
-            </a:r>
-            <a:r>
-              <a:rPr>
-                <a:solidFill>
-                  <a:srgbClr val="003B4F"/>
-                </a:solidFill>
-                <a:latin typeface="Courier"/>
-              </a:rPr>
-              <a:t>(pine_df, </a:t>
+              <a:t>group_by</a:t>
+            </a:r>
+            <a:r>
+              <a:rPr>
+                <a:solidFill>
+                  <a:srgbClr val="003B4F"/>
+                </a:solidFill>
+                <a:latin typeface="Courier"/>
+              </a:rPr>
+              <a:t>(team, side) </a:t>
+            </a:r>
+            <a:r>
+              <a:rPr>
+                <a:solidFill>
+                  <a:srgbClr val="5E5E5E"/>
+                </a:solidFill>
+                <a:latin typeface="Courier"/>
+              </a:rPr>
+              <a:t>|&gt;</a:t>
+            </a:r>
+            <a:br/>
+            <a:r>
+              <a:rPr>
+                <a:solidFill>
+                  <a:srgbClr val="003B4F"/>
+                </a:solidFill>
+                <a:latin typeface="Courier"/>
+              </a:rPr>
+              <a:t>  </a:t>
             </a:r>
             <a:r>
               <a:rPr>
@@ -10546,7 +10510,7 @@
                 </a:solidFill>
                 <a:latin typeface="Courier"/>
               </a:rPr>
-              <a:t>aes</a:t>
+              <a:t>summarize</a:t>
             </a:r>
             <a:r>
               <a:rPr>
@@ -10564,16 +10528,34 @@
                 </a:solidFill>
                 <a:latin typeface="Courier"/>
               </a:rPr>
-              <a:t>x =</a:t>
-            </a:r>
-            <a:r>
-              <a:rPr>
-                <a:solidFill>
-                  <a:srgbClr val="003B4F"/>
-                </a:solidFill>
-                <a:latin typeface="Courier"/>
-              </a:rPr>
-              <a:t> n_s, </a:t>
+              <a:t>team_mean_mm =</a:t>
+            </a:r>
+            <a:r>
+              <a:rPr>
+                <a:solidFill>
+                  <a:srgbClr val="003B4F"/>
+                </a:solidFill>
+                <a:latin typeface="Courier"/>
+              </a:rPr>
+              <a:t> </a:t>
+            </a:r>
+            <a:r>
+              <a:rPr>
+                <a:solidFill>
+                  <a:srgbClr val="4758AB"/>
+                </a:solidFill>
+                <a:latin typeface="Courier"/>
+              </a:rPr>
+              <a:t>mean</a:t>
+            </a:r>
+            <a:r>
+              <a:rPr>
+                <a:solidFill>
+                  <a:srgbClr val="003B4F"/>
+                </a:solidFill>
+                <a:latin typeface="Courier"/>
+              </a:rPr>
+              <a:t>(needle_length_mm), </a:t>
             </a:r>
             <a:r>
               <a:rPr>
@@ -10582,80 +10564,7 @@
                 </a:solidFill>
                 <a:latin typeface="Courier"/>
               </a:rPr>
-              <a:t>y =</a:t>
-            </a:r>
-            <a:r>
-              <a:rPr>
-                <a:solidFill>
-                  <a:srgbClr val="003B4F"/>
-                </a:solidFill>
-                <a:latin typeface="Courier"/>
-              </a:rPr>
-              <a:t> length_mm, </a:t>
-            </a:r>
-            <a:r>
-              <a:rPr>
-                <a:solidFill>
-                  <a:srgbClr val="657422"/>
-                </a:solidFill>
-                <a:latin typeface="Courier"/>
-              </a:rPr>
-              <a:t>fill =</a:t>
-            </a:r>
-            <a:r>
-              <a:rPr>
-                <a:solidFill>
-                  <a:srgbClr val="003B4F"/>
-                </a:solidFill>
-                <a:latin typeface="Courier"/>
-              </a:rPr>
-              <a:t> n_s)) </a:t>
-            </a:r>
-            <a:r>
-              <a:rPr>
-                <a:solidFill>
-                  <a:srgbClr val="5E5E5E"/>
-                </a:solidFill>
-                <a:latin typeface="Courier"/>
-              </a:rPr>
-              <a:t>+</a:t>
-            </a:r>
-            <a:br/>
-            <a:r>
-              <a:rPr>
-                <a:solidFill>
-                  <a:srgbClr val="003B4F"/>
-                </a:solidFill>
-                <a:latin typeface="Courier"/>
-              </a:rPr>
-              <a:t>  </a:t>
-            </a:r>
-            <a:r>
-              <a:rPr>
-                <a:solidFill>
-                  <a:srgbClr val="4758AB"/>
-                </a:solidFill>
-                <a:latin typeface="Courier"/>
-              </a:rPr>
-              <a:t>geom_boxplot</a:t>
-            </a:r>
-            <a:r>
-              <a:rPr>
-                <a:solidFill>
-                  <a:srgbClr val="003B4F"/>
-                </a:solidFill>
-                <a:latin typeface="Courier"/>
-              </a:rPr>
-              <a:t>(</a:t>
-            </a:r>
-            <a:r>
-              <a:rPr>
-                <a:solidFill>
-                  <a:srgbClr val="657422"/>
-                </a:solidFill>
-                <a:latin typeface="Courier"/>
-              </a:rPr>
-              <a:t>alpha =</a:t>
+              <a:t>.groups =</a:t>
             </a:r>
             <a:r>
               <a:rPr>
@@ -10669,424 +10578,11 @@
             <a:r>
               <a:rPr>
                 <a:solidFill>
-                  <a:srgbClr val="AD0000"/>
-                </a:solidFill>
-                <a:latin typeface="Courier"/>
-              </a:rPr>
-              <a:t>0.6</a:t>
-            </a:r>
-            <a:r>
-              <a:rPr>
-                <a:solidFill>
-                  <a:srgbClr val="003B4F"/>
-                </a:solidFill>
-                <a:latin typeface="Courier"/>
-              </a:rPr>
-              <a:t>, </a:t>
-            </a:r>
-            <a:r>
-              <a:rPr>
-                <a:solidFill>
-                  <a:srgbClr val="657422"/>
-                </a:solidFill>
-                <a:latin typeface="Courier"/>
-              </a:rPr>
-              <a:t>outlier.shape =</a:t>
-            </a:r>
-            <a:r>
-              <a:rPr>
-                <a:solidFill>
-                  <a:srgbClr val="003B4F"/>
-                </a:solidFill>
-                <a:latin typeface="Courier"/>
-              </a:rPr>
-              <a:t> </a:t>
-            </a:r>
-            <a:r>
-              <a:rPr>
-                <a:solidFill>
-                  <a:srgbClr val="8F5902"/>
-                </a:solidFill>
-                <a:latin typeface="Courier"/>
-              </a:rPr>
-              <a:t>NA</a:t>
-            </a:r>
-            <a:r>
-              <a:rPr>
-                <a:solidFill>
-                  <a:srgbClr val="003B4F"/>
-                </a:solidFill>
-                <a:latin typeface="Courier"/>
-              </a:rPr>
-              <a:t>) </a:t>
-            </a:r>
-            <a:r>
-              <a:rPr>
-                <a:solidFill>
-                  <a:srgbClr val="5E5E5E"/>
-                </a:solidFill>
-                <a:latin typeface="Courier"/>
-              </a:rPr>
-              <a:t>+</a:t>
-            </a:r>
-            <a:br/>
-            <a:r>
-              <a:rPr>
-                <a:solidFill>
-                  <a:srgbClr val="003B4F"/>
-                </a:solidFill>
-                <a:latin typeface="Courier"/>
-              </a:rPr>
-              <a:t>  </a:t>
-            </a:r>
-            <a:r>
-              <a:rPr>
-                <a:solidFill>
-                  <a:srgbClr val="4758AB"/>
-                </a:solidFill>
-                <a:latin typeface="Courier"/>
-              </a:rPr>
-              <a:t>facet_wrap</a:t>
-            </a:r>
-            <a:r>
-              <a:rPr>
-                <a:solidFill>
-                  <a:srgbClr val="003B4F"/>
-                </a:solidFill>
-                <a:latin typeface="Courier"/>
-              </a:rPr>
-              <a:t>(</a:t>
-            </a:r>
-            <a:r>
-              <a:rPr>
-                <a:solidFill>
-                  <a:srgbClr val="5E5E5E"/>
-                </a:solidFill>
-                <a:latin typeface="Courier"/>
-              </a:rPr>
-              <a:t>~</a:t>
-            </a:r>
-            <a:r>
-              <a:rPr>
-                <a:solidFill>
-                  <a:srgbClr val="003B4F"/>
-                </a:solidFill>
-                <a:latin typeface="Courier"/>
-              </a:rPr>
-              <a:t>group) </a:t>
-            </a:r>
-            <a:r>
-              <a:rPr>
-                <a:solidFill>
-                  <a:srgbClr val="5E5E5E"/>
-                </a:solidFill>
-                <a:latin typeface="Courier"/>
-              </a:rPr>
-              <a:t>+</a:t>
-            </a:r>
-            <a:br/>
-            <a:r>
-              <a:rPr>
-                <a:solidFill>
-                  <a:srgbClr val="003B4F"/>
-                </a:solidFill>
-                <a:latin typeface="Courier"/>
-              </a:rPr>
-              <a:t>  </a:t>
-            </a:r>
-            <a:r>
-              <a:rPr>
-                <a:solidFill>
-                  <a:srgbClr val="4758AB"/>
-                </a:solidFill>
-                <a:latin typeface="Courier"/>
-              </a:rPr>
-              <a:t>labs</a:t>
-            </a:r>
-            <a:r>
-              <a:rPr>
-                <a:solidFill>
-                  <a:srgbClr val="003B4F"/>
-                </a:solidFill>
-                <a:latin typeface="Courier"/>
-              </a:rPr>
-              <a:t>(</a:t>
-            </a:r>
-            <a:br/>
-            <a:r>
-              <a:rPr>
-                <a:solidFill>
-                  <a:srgbClr val="003B4F"/>
-                </a:solidFill>
-                <a:latin typeface="Courier"/>
-              </a:rPr>
-              <a:t>    </a:t>
-            </a:r>
-            <a:r>
-              <a:rPr>
-                <a:solidFill>
-                  <a:srgbClr val="657422"/>
-                </a:solidFill>
-                <a:latin typeface="Courier"/>
-              </a:rPr>
-              <a:t>title =</a:t>
-            </a:r>
-            <a:r>
-              <a:rPr>
-                <a:solidFill>
-                  <a:srgbClr val="003B4F"/>
-                </a:solidFill>
-                <a:latin typeface="Courier"/>
-              </a:rPr>
-              <a:t> </a:t>
-            </a:r>
-            <a:r>
-              <a:rPr>
-                <a:solidFill>
                   <a:srgbClr val="20794D"/>
                 </a:solidFill>
                 <a:latin typeface="Courier"/>
               </a:rPr>
-              <a:t>"Needle Length by Side, Faceted by Team"</a:t>
-            </a:r>
-            <a:r>
-              <a:rPr>
-                <a:solidFill>
-                  <a:srgbClr val="003B4F"/>
-                </a:solidFill>
-                <a:latin typeface="Courier"/>
-              </a:rPr>
-              <a:t>,</a:t>
-            </a:r>
-            <a:br/>
-            <a:r>
-              <a:rPr>
-                <a:solidFill>
-                  <a:srgbClr val="003B4F"/>
-                </a:solidFill>
-                <a:latin typeface="Courier"/>
-              </a:rPr>
-              <a:t>    </a:t>
-            </a:r>
-            <a:r>
-              <a:rPr>
-                <a:solidFill>
-                  <a:srgbClr val="657422"/>
-                </a:solidFill>
-                <a:latin typeface="Courier"/>
-              </a:rPr>
-              <a:t>x =</a:t>
-            </a:r>
-            <a:r>
-              <a:rPr>
-                <a:solidFill>
-                  <a:srgbClr val="003B4F"/>
-                </a:solidFill>
-                <a:latin typeface="Courier"/>
-              </a:rPr>
-              <a:t> </a:t>
-            </a:r>
-            <a:r>
-              <a:rPr>
-                <a:solidFill>
-                  <a:srgbClr val="20794D"/>
-                </a:solidFill>
-                <a:latin typeface="Courier"/>
-              </a:rPr>
-              <a:t>"Side of tree"</a:t>
-            </a:r>
-            <a:r>
-              <a:rPr>
-                <a:solidFill>
-                  <a:srgbClr val="003B4F"/>
-                </a:solidFill>
-                <a:latin typeface="Courier"/>
-              </a:rPr>
-              <a:t>,</a:t>
-            </a:r>
-            <a:br/>
-            <a:r>
-              <a:rPr>
-                <a:solidFill>
-                  <a:srgbClr val="003B4F"/>
-                </a:solidFill>
-                <a:latin typeface="Courier"/>
-              </a:rPr>
-              <a:t>    </a:t>
-            </a:r>
-            <a:r>
-              <a:rPr>
-                <a:solidFill>
-                  <a:srgbClr val="657422"/>
-                </a:solidFill>
-                <a:latin typeface="Courier"/>
-              </a:rPr>
-              <a:t>y =</a:t>
-            </a:r>
-            <a:r>
-              <a:rPr>
-                <a:solidFill>
-                  <a:srgbClr val="003B4F"/>
-                </a:solidFill>
-                <a:latin typeface="Courier"/>
-              </a:rPr>
-              <a:t> </a:t>
-            </a:r>
-            <a:r>
-              <a:rPr>
-                <a:solidFill>
-                  <a:srgbClr val="20794D"/>
-                </a:solidFill>
-                <a:latin typeface="Courier"/>
-              </a:rPr>
-              <a:t>"Needle length (mm)"</a:t>
-            </a:r>
-            <a:br/>
-            <a:r>
-              <a:rPr>
-                <a:solidFill>
-                  <a:srgbClr val="003B4F"/>
-                </a:solidFill>
-                <a:latin typeface="Courier"/>
-              </a:rPr>
-              <a:t>  ) </a:t>
-            </a:r>
-            <a:r>
-              <a:rPr>
-                <a:solidFill>
-                  <a:srgbClr val="5E5E5E"/>
-                </a:solidFill>
-                <a:latin typeface="Courier"/>
-              </a:rPr>
-              <a:t>+</a:t>
-            </a:r>
-            <a:br/>
-            <a:r>
-              <a:rPr>
-                <a:solidFill>
-                  <a:srgbClr val="003B4F"/>
-                </a:solidFill>
-                <a:latin typeface="Courier"/>
-              </a:rPr>
-              <a:t>  </a:t>
-            </a:r>
-            <a:r>
-              <a:rPr>
-                <a:solidFill>
-                  <a:srgbClr val="4758AB"/>
-                </a:solidFill>
-                <a:latin typeface="Courier"/>
-              </a:rPr>
-              <a:t>theme_minimal</a:t>
-            </a:r>
-            <a:r>
-              <a:rPr>
-                <a:solidFill>
-                  <a:srgbClr val="003B4F"/>
-                </a:solidFill>
-                <a:latin typeface="Courier"/>
-              </a:rPr>
-              <a:t>(</a:t>
-            </a:r>
-            <a:r>
-              <a:rPr>
-                <a:solidFill>
-                  <a:srgbClr val="657422"/>
-                </a:solidFill>
-                <a:latin typeface="Courier"/>
-              </a:rPr>
-              <a:t>base_size =</a:t>
-            </a:r>
-            <a:r>
-              <a:rPr>
-                <a:solidFill>
-                  <a:srgbClr val="003B4F"/>
-                </a:solidFill>
-                <a:latin typeface="Courier"/>
-              </a:rPr>
-              <a:t> </a:t>
-            </a:r>
-            <a:r>
-              <a:rPr>
-                <a:solidFill>
-                  <a:srgbClr val="AD0000"/>
-                </a:solidFill>
-                <a:latin typeface="Courier"/>
-              </a:rPr>
-              <a:t>7</a:t>
-            </a:r>
-            <a:r>
-              <a:rPr>
-                <a:solidFill>
-                  <a:srgbClr val="003B4F"/>
-                </a:solidFill>
-                <a:latin typeface="Courier"/>
-              </a:rPr>
-              <a:t>) </a:t>
-            </a:r>
-            <a:r>
-              <a:rPr>
-                <a:solidFill>
-                  <a:srgbClr val="5E5E5E"/>
-                </a:solidFill>
-                <a:latin typeface="Courier"/>
-              </a:rPr>
-              <a:t>+</a:t>
-            </a:r>
-            <a:br/>
-            <a:r>
-              <a:rPr>
-                <a:solidFill>
-                  <a:srgbClr val="003B4F"/>
-                </a:solidFill>
-                <a:latin typeface="Courier"/>
-              </a:rPr>
-              <a:t>  </a:t>
-            </a:r>
-            <a:r>
-              <a:rPr>
-                <a:solidFill>
-                  <a:srgbClr val="4758AB"/>
-                </a:solidFill>
-                <a:latin typeface="Courier"/>
-              </a:rPr>
-              <a:t>theme</a:t>
-            </a:r>
-            <a:r>
-              <a:rPr>
-                <a:solidFill>
-                  <a:srgbClr val="003B4F"/>
-                </a:solidFill>
-                <a:latin typeface="Courier"/>
-              </a:rPr>
-              <a:t>(</a:t>
-            </a:r>
-            <a:r>
-              <a:rPr>
-                <a:solidFill>
-                  <a:srgbClr val="657422"/>
-                </a:solidFill>
-                <a:latin typeface="Courier"/>
-              </a:rPr>
-              <a:t>legend.position =</a:t>
-            </a:r>
-            <a:r>
-              <a:rPr>
-                <a:solidFill>
-                  <a:srgbClr val="003B4F"/>
-                </a:solidFill>
-                <a:latin typeface="Courier"/>
-              </a:rPr>
-              <a:t> </a:t>
-            </a:r>
-            <a:r>
-              <a:rPr>
-                <a:solidFill>
-                  <a:srgbClr val="20794D"/>
-                </a:solidFill>
-                <a:latin typeface="Courier"/>
-              </a:rPr>
-              <a:t>"none"</a:t>
+              <a:t>"drop"</a:t>
             </a:r>
             <a:r>
               <a:rPr>
@@ -11102,18 +10598,891 @@
             <a:r>
               <a:rPr>
                 <a:solidFill>
-                  <a:srgbClr val="003B4F"/>
-                </a:solidFill>
-                <a:latin typeface="Courier"/>
-              </a:rPr>
-              <a:t>pine_facet_plot</a:t>
+                  <a:srgbClr val="4758AB"/>
+                </a:solidFill>
+                <a:latin typeface="Courier"/>
+              </a:rPr>
+              <a:t>ggplot</a:t>
+            </a:r>
+            <a:r>
+              <a:rPr>
+                <a:solidFill>
+                  <a:srgbClr val="003B4F"/>
+                </a:solidFill>
+                <a:latin typeface="Courier"/>
+              </a:rPr>
+              <a:t>(team_means_df, </a:t>
+            </a:r>
+            <a:r>
+              <a:rPr>
+                <a:solidFill>
+                  <a:srgbClr val="4758AB"/>
+                </a:solidFill>
+                <a:latin typeface="Courier"/>
+              </a:rPr>
+              <a:t>aes</a:t>
+            </a:r>
+            <a:r>
+              <a:rPr>
+                <a:solidFill>
+                  <a:srgbClr val="003B4F"/>
+                </a:solidFill>
+                <a:latin typeface="Courier"/>
+              </a:rPr>
+              <a:t>(</a:t>
+            </a:r>
+            <a:r>
+              <a:rPr>
+                <a:solidFill>
+                  <a:srgbClr val="657422"/>
+                </a:solidFill>
+                <a:latin typeface="Courier"/>
+              </a:rPr>
+              <a:t>x =</a:t>
+            </a:r>
+            <a:r>
+              <a:rPr>
+                <a:solidFill>
+                  <a:srgbClr val="003B4F"/>
+                </a:solidFill>
+                <a:latin typeface="Courier"/>
+              </a:rPr>
+              <a:t> side, </a:t>
+            </a:r>
+            <a:r>
+              <a:rPr>
+                <a:solidFill>
+                  <a:srgbClr val="657422"/>
+                </a:solidFill>
+                <a:latin typeface="Courier"/>
+              </a:rPr>
+              <a:t>y =</a:t>
+            </a:r>
+            <a:r>
+              <a:rPr>
+                <a:solidFill>
+                  <a:srgbClr val="003B4F"/>
+                </a:solidFill>
+                <a:latin typeface="Courier"/>
+              </a:rPr>
+              <a:t> team_mean_mm, </a:t>
+            </a:r>
+            <a:r>
+              <a:rPr>
+                <a:solidFill>
+                  <a:srgbClr val="657422"/>
+                </a:solidFill>
+                <a:latin typeface="Courier"/>
+              </a:rPr>
+              <a:t>color =</a:t>
+            </a:r>
+            <a:r>
+              <a:rPr>
+                <a:solidFill>
+                  <a:srgbClr val="003B4F"/>
+                </a:solidFill>
+                <a:latin typeface="Courier"/>
+              </a:rPr>
+              <a:t> side)) </a:t>
+            </a:r>
+            <a:r>
+              <a:rPr>
+                <a:solidFill>
+                  <a:srgbClr val="5E5E5E"/>
+                </a:solidFill>
+                <a:latin typeface="Courier"/>
+              </a:rPr>
+              <a:t>+</a:t>
+            </a:r>
+            <a:br/>
+            <a:r>
+              <a:rPr>
+                <a:solidFill>
+                  <a:srgbClr val="003B4F"/>
+                </a:solidFill>
+                <a:latin typeface="Courier"/>
+              </a:rPr>
+              <a:t>  </a:t>
+            </a:r>
+            <a:r>
+              <a:rPr>
+                <a:solidFill>
+                  <a:srgbClr val="4758AB"/>
+                </a:solidFill>
+                <a:latin typeface="Courier"/>
+              </a:rPr>
+              <a:t>geom_point</a:t>
+            </a:r>
+            <a:r>
+              <a:rPr>
+                <a:solidFill>
+                  <a:srgbClr val="003B4F"/>
+                </a:solidFill>
+                <a:latin typeface="Courier"/>
+              </a:rPr>
+              <a:t>(</a:t>
+            </a:r>
+            <a:r>
+              <a:rPr>
+                <a:solidFill>
+                  <a:srgbClr val="657422"/>
+                </a:solidFill>
+                <a:latin typeface="Courier"/>
+              </a:rPr>
+              <a:t>size =</a:t>
+            </a:r>
+            <a:r>
+              <a:rPr>
+                <a:solidFill>
+                  <a:srgbClr val="003B4F"/>
+                </a:solidFill>
+                <a:latin typeface="Courier"/>
+              </a:rPr>
+              <a:t> </a:t>
+            </a:r>
+            <a:r>
+              <a:rPr>
+                <a:solidFill>
+                  <a:srgbClr val="AD0000"/>
+                </a:solidFill>
+                <a:latin typeface="Courier"/>
+              </a:rPr>
+              <a:t>2</a:t>
+            </a:r>
+            <a:r>
+              <a:rPr>
+                <a:solidFill>
+                  <a:srgbClr val="003B4F"/>
+                </a:solidFill>
+                <a:latin typeface="Courier"/>
+              </a:rPr>
+              <a:t>, </a:t>
+            </a:r>
+            <a:r>
+              <a:rPr>
+                <a:solidFill>
+                  <a:srgbClr val="657422"/>
+                </a:solidFill>
+                <a:latin typeface="Courier"/>
+              </a:rPr>
+              <a:t>alpha =</a:t>
+            </a:r>
+            <a:r>
+              <a:rPr>
+                <a:solidFill>
+                  <a:srgbClr val="003B4F"/>
+                </a:solidFill>
+                <a:latin typeface="Courier"/>
+              </a:rPr>
+              <a:t> </a:t>
+            </a:r>
+            <a:r>
+              <a:rPr>
+                <a:solidFill>
+                  <a:srgbClr val="AD0000"/>
+                </a:solidFill>
+                <a:latin typeface="Courier"/>
+              </a:rPr>
+              <a:t>0.6</a:t>
+            </a:r>
+            <a:r>
+              <a:rPr>
+                <a:solidFill>
+                  <a:srgbClr val="003B4F"/>
+                </a:solidFill>
+                <a:latin typeface="Courier"/>
+              </a:rPr>
+              <a:t>,</a:t>
+            </a:r>
+            <a:br/>
+            <a:r>
+              <a:rPr>
+                <a:solidFill>
+                  <a:srgbClr val="003B4F"/>
+                </a:solidFill>
+                <a:latin typeface="Courier"/>
+              </a:rPr>
+              <a:t>             </a:t>
+            </a:r>
+            <a:r>
+              <a:rPr>
+                <a:solidFill>
+                  <a:srgbClr val="657422"/>
+                </a:solidFill>
+                <a:latin typeface="Courier"/>
+              </a:rPr>
+              <a:t>position =</a:t>
+            </a:r>
+            <a:r>
+              <a:rPr>
+                <a:solidFill>
+                  <a:srgbClr val="003B4F"/>
+                </a:solidFill>
+                <a:latin typeface="Courier"/>
+              </a:rPr>
+              <a:t> </a:t>
+            </a:r>
+            <a:r>
+              <a:rPr>
+                <a:solidFill>
+                  <a:srgbClr val="4758AB"/>
+                </a:solidFill>
+                <a:latin typeface="Courier"/>
+              </a:rPr>
+              <a:t>position_jitter</a:t>
+            </a:r>
+            <a:r>
+              <a:rPr>
+                <a:solidFill>
+                  <a:srgbClr val="003B4F"/>
+                </a:solidFill>
+                <a:latin typeface="Courier"/>
+              </a:rPr>
+              <a:t>(</a:t>
+            </a:r>
+            <a:r>
+              <a:rPr>
+                <a:solidFill>
+                  <a:srgbClr val="657422"/>
+                </a:solidFill>
+                <a:latin typeface="Courier"/>
+              </a:rPr>
+              <a:t>width =</a:t>
+            </a:r>
+            <a:r>
+              <a:rPr>
+                <a:solidFill>
+                  <a:srgbClr val="003B4F"/>
+                </a:solidFill>
+                <a:latin typeface="Courier"/>
+              </a:rPr>
+              <a:t> </a:t>
+            </a:r>
+            <a:r>
+              <a:rPr>
+                <a:solidFill>
+                  <a:srgbClr val="AD0000"/>
+                </a:solidFill>
+                <a:latin typeface="Courier"/>
+              </a:rPr>
+              <a:t>0.08</a:t>
+            </a:r>
+            <a:r>
+              <a:rPr>
+                <a:solidFill>
+                  <a:srgbClr val="003B4F"/>
+                </a:solidFill>
+                <a:latin typeface="Courier"/>
+              </a:rPr>
+              <a:t>)) </a:t>
+            </a:r>
+            <a:r>
+              <a:rPr>
+                <a:solidFill>
+                  <a:srgbClr val="5E5E5E"/>
+                </a:solidFill>
+                <a:latin typeface="Courier"/>
+              </a:rPr>
+              <a:t>+</a:t>
+            </a:r>
+            <a:br/>
+            <a:r>
+              <a:rPr>
+                <a:solidFill>
+                  <a:srgbClr val="003B4F"/>
+                </a:solidFill>
+                <a:latin typeface="Courier"/>
+              </a:rPr>
+              <a:t>  </a:t>
+            </a:r>
+            <a:r>
+              <a:rPr>
+                <a:solidFill>
+                  <a:srgbClr val="4758AB"/>
+                </a:solidFill>
+                <a:latin typeface="Courier"/>
+              </a:rPr>
+              <a:t>stat_summary</a:t>
+            </a:r>
+            <a:r>
+              <a:rPr>
+                <a:solidFill>
+                  <a:srgbClr val="003B4F"/>
+                </a:solidFill>
+                <a:latin typeface="Courier"/>
+              </a:rPr>
+              <a:t>(</a:t>
+            </a:r>
+            <a:r>
+              <a:rPr>
+                <a:solidFill>
+                  <a:srgbClr val="657422"/>
+                </a:solidFill>
+                <a:latin typeface="Courier"/>
+              </a:rPr>
+              <a:t>fun =</a:t>
+            </a:r>
+            <a:r>
+              <a:rPr>
+                <a:solidFill>
+                  <a:srgbClr val="003B4F"/>
+                </a:solidFill>
+                <a:latin typeface="Courier"/>
+              </a:rPr>
+              <a:t> mean, </a:t>
+            </a:r>
+            <a:r>
+              <a:rPr>
+                <a:solidFill>
+                  <a:srgbClr val="657422"/>
+                </a:solidFill>
+                <a:latin typeface="Courier"/>
+              </a:rPr>
+              <a:t>geom =</a:t>
+            </a:r>
+            <a:r>
+              <a:rPr>
+                <a:solidFill>
+                  <a:srgbClr val="003B4F"/>
+                </a:solidFill>
+                <a:latin typeface="Courier"/>
+              </a:rPr>
+              <a:t> </a:t>
+            </a:r>
+            <a:r>
+              <a:rPr>
+                <a:solidFill>
+                  <a:srgbClr val="20794D"/>
+                </a:solidFill>
+                <a:latin typeface="Courier"/>
+              </a:rPr>
+              <a:t>"point"</a:t>
+            </a:r>
+            <a:r>
+              <a:rPr>
+                <a:solidFill>
+                  <a:srgbClr val="003B4F"/>
+                </a:solidFill>
+                <a:latin typeface="Courier"/>
+              </a:rPr>
+              <a:t>, </a:t>
+            </a:r>
+            <a:r>
+              <a:rPr>
+                <a:solidFill>
+                  <a:srgbClr val="657422"/>
+                </a:solidFill>
+                <a:latin typeface="Courier"/>
+              </a:rPr>
+              <a:t>size =</a:t>
+            </a:r>
+            <a:r>
+              <a:rPr>
+                <a:solidFill>
+                  <a:srgbClr val="003B4F"/>
+                </a:solidFill>
+                <a:latin typeface="Courier"/>
+              </a:rPr>
+              <a:t> </a:t>
+            </a:r>
+            <a:r>
+              <a:rPr>
+                <a:solidFill>
+                  <a:srgbClr val="AD0000"/>
+                </a:solidFill>
+                <a:latin typeface="Courier"/>
+              </a:rPr>
+              <a:t>4</a:t>
+            </a:r>
+            <a:r>
+              <a:rPr>
+                <a:solidFill>
+                  <a:srgbClr val="003B4F"/>
+                </a:solidFill>
+                <a:latin typeface="Courier"/>
+              </a:rPr>
+              <a:t>) </a:t>
+            </a:r>
+            <a:r>
+              <a:rPr>
+                <a:solidFill>
+                  <a:srgbClr val="5E5E5E"/>
+                </a:solidFill>
+                <a:latin typeface="Courier"/>
+              </a:rPr>
+              <a:t>+</a:t>
+            </a:r>
+            <a:br/>
+            <a:r>
+              <a:rPr>
+                <a:solidFill>
+                  <a:srgbClr val="003B4F"/>
+                </a:solidFill>
+                <a:latin typeface="Courier"/>
+              </a:rPr>
+              <a:t>  </a:t>
+            </a:r>
+            <a:r>
+              <a:rPr>
+                <a:solidFill>
+                  <a:srgbClr val="4758AB"/>
+                </a:solidFill>
+                <a:latin typeface="Courier"/>
+              </a:rPr>
+              <a:t>stat_summary</a:t>
+            </a:r>
+            <a:r>
+              <a:rPr>
+                <a:solidFill>
+                  <a:srgbClr val="003B4F"/>
+                </a:solidFill>
+                <a:latin typeface="Courier"/>
+              </a:rPr>
+              <a:t>(</a:t>
+            </a:r>
+            <a:r>
+              <a:rPr>
+                <a:solidFill>
+                  <a:srgbClr val="657422"/>
+                </a:solidFill>
+                <a:latin typeface="Courier"/>
+              </a:rPr>
+              <a:t>fun.data =</a:t>
+            </a:r>
+            <a:r>
+              <a:rPr>
+                <a:solidFill>
+                  <a:srgbClr val="003B4F"/>
+                </a:solidFill>
+                <a:latin typeface="Courier"/>
+              </a:rPr>
+              <a:t> mean_se, </a:t>
+            </a:r>
+            <a:r>
+              <a:rPr>
+                <a:solidFill>
+                  <a:srgbClr val="657422"/>
+                </a:solidFill>
+                <a:latin typeface="Courier"/>
+              </a:rPr>
+              <a:t>geom =</a:t>
+            </a:r>
+            <a:r>
+              <a:rPr>
+                <a:solidFill>
+                  <a:srgbClr val="003B4F"/>
+                </a:solidFill>
+                <a:latin typeface="Courier"/>
+              </a:rPr>
+              <a:t> </a:t>
+            </a:r>
+            <a:r>
+              <a:rPr>
+                <a:solidFill>
+                  <a:srgbClr val="20794D"/>
+                </a:solidFill>
+                <a:latin typeface="Courier"/>
+              </a:rPr>
+              <a:t>"errorbar"</a:t>
+            </a:r>
+            <a:r>
+              <a:rPr>
+                <a:solidFill>
+                  <a:srgbClr val="003B4F"/>
+                </a:solidFill>
+                <a:latin typeface="Courier"/>
+              </a:rPr>
+              <a:t>,</a:t>
+            </a:r>
+            <a:br/>
+            <a:r>
+              <a:rPr>
+                <a:solidFill>
+                  <a:srgbClr val="003B4F"/>
+                </a:solidFill>
+                <a:latin typeface="Courier"/>
+              </a:rPr>
+              <a:t>               </a:t>
+            </a:r>
+            <a:r>
+              <a:rPr>
+                <a:solidFill>
+                  <a:srgbClr val="657422"/>
+                </a:solidFill>
+                <a:latin typeface="Courier"/>
+              </a:rPr>
+              <a:t>width =</a:t>
+            </a:r>
+            <a:r>
+              <a:rPr>
+                <a:solidFill>
+                  <a:srgbClr val="003B4F"/>
+                </a:solidFill>
+                <a:latin typeface="Courier"/>
+              </a:rPr>
+              <a:t> </a:t>
+            </a:r>
+            <a:r>
+              <a:rPr>
+                <a:solidFill>
+                  <a:srgbClr val="AD0000"/>
+                </a:solidFill>
+                <a:latin typeface="Courier"/>
+              </a:rPr>
+              <a:t>0.15</a:t>
+            </a:r>
+            <a:r>
+              <a:rPr>
+                <a:solidFill>
+                  <a:srgbClr val="003B4F"/>
+                </a:solidFill>
+                <a:latin typeface="Courier"/>
+              </a:rPr>
+              <a:t>, </a:t>
+            </a:r>
+            <a:r>
+              <a:rPr>
+                <a:solidFill>
+                  <a:srgbClr val="657422"/>
+                </a:solidFill>
+                <a:latin typeface="Courier"/>
+              </a:rPr>
+              <a:t>linewidth =</a:t>
+            </a:r>
+            <a:r>
+              <a:rPr>
+                <a:solidFill>
+                  <a:srgbClr val="003B4F"/>
+                </a:solidFill>
+                <a:latin typeface="Courier"/>
+              </a:rPr>
+              <a:t> </a:t>
+            </a:r>
+            <a:r>
+              <a:rPr>
+                <a:solidFill>
+                  <a:srgbClr val="AD0000"/>
+                </a:solidFill>
+                <a:latin typeface="Courier"/>
+              </a:rPr>
+              <a:t>0.9</a:t>
+            </a:r>
+            <a:r>
+              <a:rPr>
+                <a:solidFill>
+                  <a:srgbClr val="003B4F"/>
+                </a:solidFill>
+                <a:latin typeface="Courier"/>
+              </a:rPr>
+              <a:t>) </a:t>
+            </a:r>
+            <a:r>
+              <a:rPr>
+                <a:solidFill>
+                  <a:srgbClr val="5E5E5E"/>
+                </a:solidFill>
+                <a:latin typeface="Courier"/>
+              </a:rPr>
+              <a:t>+</a:t>
+            </a:r>
+            <a:br/>
+            <a:r>
+              <a:rPr>
+                <a:solidFill>
+                  <a:srgbClr val="003B4F"/>
+                </a:solidFill>
+                <a:latin typeface="Courier"/>
+              </a:rPr>
+              <a:t>  </a:t>
+            </a:r>
+            <a:r>
+              <a:rPr>
+                <a:solidFill>
+                  <a:srgbClr val="4758AB"/>
+                </a:solidFill>
+                <a:latin typeface="Courier"/>
+              </a:rPr>
+              <a:t>labs</a:t>
+            </a:r>
+            <a:r>
+              <a:rPr>
+                <a:solidFill>
+                  <a:srgbClr val="003B4F"/>
+                </a:solidFill>
+                <a:latin typeface="Courier"/>
+              </a:rPr>
+              <a:t>(</a:t>
+            </a:r>
+            <a:r>
+              <a:rPr>
+                <a:solidFill>
+                  <a:srgbClr val="657422"/>
+                </a:solidFill>
+                <a:latin typeface="Courier"/>
+              </a:rPr>
+              <a:t>title =</a:t>
+            </a:r>
+            <a:r>
+              <a:rPr>
+                <a:solidFill>
+                  <a:srgbClr val="003B4F"/>
+                </a:solidFill>
+                <a:latin typeface="Courier"/>
+              </a:rPr>
+              <a:t> </a:t>
+            </a:r>
+            <a:r>
+              <a:rPr>
+                <a:solidFill>
+                  <a:srgbClr val="20794D"/>
+                </a:solidFill>
+                <a:latin typeface="Courier"/>
+              </a:rPr>
+              <a:t>"Mean ± SE, computed from 4 trees"</a:t>
+            </a:r>
+            <a:r>
+              <a:rPr>
+                <a:solidFill>
+                  <a:srgbClr val="003B4F"/>
+                </a:solidFill>
+                <a:latin typeface="Courier"/>
+              </a:rPr>
+              <a:t>,</a:t>
+            </a:r>
+            <a:br/>
+            <a:r>
+              <a:rPr>
+                <a:solidFill>
+                  <a:srgbClr val="003B4F"/>
+                </a:solidFill>
+                <a:latin typeface="Courier"/>
+              </a:rPr>
+              <a:t>       </a:t>
+            </a:r>
+            <a:r>
+              <a:rPr>
+                <a:solidFill>
+                  <a:srgbClr val="657422"/>
+                </a:solidFill>
+                <a:latin typeface="Courier"/>
+              </a:rPr>
+              <a:t>x =</a:t>
+            </a:r>
+            <a:r>
+              <a:rPr>
+                <a:solidFill>
+                  <a:srgbClr val="003B4F"/>
+                </a:solidFill>
+                <a:latin typeface="Courier"/>
+              </a:rPr>
+              <a:t> </a:t>
+            </a:r>
+            <a:r>
+              <a:rPr>
+                <a:solidFill>
+                  <a:srgbClr val="20794D"/>
+                </a:solidFill>
+                <a:latin typeface="Courier"/>
+              </a:rPr>
+              <a:t>"Side of tree"</a:t>
+            </a:r>
+            <a:r>
+              <a:rPr>
+                <a:solidFill>
+                  <a:srgbClr val="003B4F"/>
+                </a:solidFill>
+                <a:latin typeface="Courier"/>
+              </a:rPr>
+              <a:t>, </a:t>
+            </a:r>
+            <a:r>
+              <a:rPr>
+                <a:solidFill>
+                  <a:srgbClr val="657422"/>
+                </a:solidFill>
+                <a:latin typeface="Courier"/>
+              </a:rPr>
+              <a:t>y =</a:t>
+            </a:r>
+            <a:r>
+              <a:rPr>
+                <a:solidFill>
+                  <a:srgbClr val="003B4F"/>
+                </a:solidFill>
+                <a:latin typeface="Courier"/>
+              </a:rPr>
+              <a:t> </a:t>
+            </a:r>
+            <a:r>
+              <a:rPr>
+                <a:solidFill>
+                  <a:srgbClr val="20794D"/>
+                </a:solidFill>
+                <a:latin typeface="Courier"/>
+              </a:rPr>
+              <a:t>"Mean needle length (mm)"</a:t>
+            </a:r>
+            <a:r>
+              <a:rPr>
+                <a:solidFill>
+                  <a:srgbClr val="003B4F"/>
+                </a:solidFill>
+                <a:latin typeface="Courier"/>
+              </a:rPr>
+              <a:t>) </a:t>
+            </a:r>
+            <a:r>
+              <a:rPr>
+                <a:solidFill>
+                  <a:srgbClr val="5E5E5E"/>
+                </a:solidFill>
+                <a:latin typeface="Courier"/>
+              </a:rPr>
+              <a:t>+</a:t>
+            </a:r>
+            <a:br/>
+            <a:r>
+              <a:rPr>
+                <a:solidFill>
+                  <a:srgbClr val="003B4F"/>
+                </a:solidFill>
+                <a:latin typeface="Courier"/>
+              </a:rPr>
+              <a:t>  </a:t>
+            </a:r>
+            <a:r>
+              <a:rPr>
+                <a:solidFill>
+                  <a:srgbClr val="4758AB"/>
+                </a:solidFill>
+                <a:latin typeface="Courier"/>
+              </a:rPr>
+              <a:t>theme_minimal</a:t>
+            </a:r>
+            <a:r>
+              <a:rPr>
+                <a:solidFill>
+                  <a:srgbClr val="003B4F"/>
+                </a:solidFill>
+                <a:latin typeface="Courier"/>
+              </a:rPr>
+              <a:t>(</a:t>
+            </a:r>
+            <a:r>
+              <a:rPr>
+                <a:solidFill>
+                  <a:srgbClr val="657422"/>
+                </a:solidFill>
+                <a:latin typeface="Courier"/>
+              </a:rPr>
+              <a:t>base_size =</a:t>
+            </a:r>
+            <a:r>
+              <a:rPr>
+                <a:solidFill>
+                  <a:srgbClr val="003B4F"/>
+                </a:solidFill>
+                <a:latin typeface="Courier"/>
+              </a:rPr>
+              <a:t> </a:t>
+            </a:r>
+            <a:r>
+              <a:rPr>
+                <a:solidFill>
+                  <a:srgbClr val="AD0000"/>
+                </a:solidFill>
+                <a:latin typeface="Courier"/>
+              </a:rPr>
+              <a:t>9</a:t>
+            </a:r>
+            <a:r>
+              <a:rPr>
+                <a:solidFill>
+                  <a:srgbClr val="003B4F"/>
+                </a:solidFill>
+                <a:latin typeface="Courier"/>
+              </a:rPr>
+              <a:t>) </a:t>
+            </a:r>
+            <a:r>
+              <a:rPr>
+                <a:solidFill>
+                  <a:srgbClr val="5E5E5E"/>
+                </a:solidFill>
+                <a:latin typeface="Courier"/>
+              </a:rPr>
+              <a:t>+</a:t>
+            </a:r>
+            <a:br/>
+            <a:r>
+              <a:rPr>
+                <a:solidFill>
+                  <a:srgbClr val="003B4F"/>
+                </a:solidFill>
+                <a:latin typeface="Courier"/>
+              </a:rPr>
+              <a:t>  </a:t>
+            </a:r>
+            <a:r>
+              <a:rPr>
+                <a:solidFill>
+                  <a:srgbClr val="4758AB"/>
+                </a:solidFill>
+                <a:latin typeface="Courier"/>
+              </a:rPr>
+              <a:t>theme</a:t>
+            </a:r>
+            <a:r>
+              <a:rPr>
+                <a:solidFill>
+                  <a:srgbClr val="003B4F"/>
+                </a:solidFill>
+                <a:latin typeface="Courier"/>
+              </a:rPr>
+              <a:t>(</a:t>
+            </a:r>
+            <a:r>
+              <a:rPr>
+                <a:solidFill>
+                  <a:srgbClr val="657422"/>
+                </a:solidFill>
+                <a:latin typeface="Courier"/>
+              </a:rPr>
+              <a:t>legend.position =</a:t>
+            </a:r>
+            <a:r>
+              <a:rPr>
+                <a:solidFill>
+                  <a:srgbClr val="003B4F"/>
+                </a:solidFill>
+                <a:latin typeface="Courier"/>
+              </a:rPr>
+              <a:t> </a:t>
+            </a:r>
+            <a:r>
+              <a:rPr>
+                <a:solidFill>
+                  <a:srgbClr val="20794D"/>
+                </a:solidFill>
+                <a:latin typeface="Courier"/>
+              </a:rPr>
+              <a:t>"none"</a:t>
+            </a:r>
+            <a:r>
+              <a:rPr>
+                <a:solidFill>
+                  <a:srgbClr val="003B4F"/>
+                </a:solidFill>
+                <a:latin typeface="Courier"/>
+              </a:rPr>
+              <a:t>)</a:t>
             </a:r>
           </a:p>
         </p:txBody>
       </p:sp>
       <p:pic>
         <p:nvPicPr>
-          <p:cNvPr descr="graphing_effectively_lecture_files/figure-pptx/unnamed-chunk-13-1.png" id="0" name="Picture 1"/>
+          <p:cNvPr descr="graphing_effectively_lecture_files/figure-pptx/graphing-effectively-13-1.png" id="0" name="Picture 1"/>
           <p:cNvPicPr>
             <a:picLocks noGrp="1" noChangeAspect="1"/>
           </p:cNvPicPr>
@@ -11127,8 +11496,8 @@
         </p:blipFill>
         <p:spPr bwMode="auto">
           <a:xfrm>
-            <a:off x="431800" y="1270000"/>
-            <a:ext cx="3810000" cy="3302000"/>
+            <a:off x="304800" y="1270000"/>
+            <a:ext cx="4064000" cy="3302000"/>
           </a:xfrm>
           <a:prstGeom prst="rect">
             <a:avLst/>
@@ -11156,34 +11525,55 @@
           <a:bodyPr/>
           <a:lstStyle/>
           <a:p>
-            <a:pPr lvl="0"/>
-            <a:r>
-              <a:rPr>
-                <a:latin typeface="Courier"/>
-              </a:rPr>
-              <a:t>facet_wrap(~group)</a:t>
-            </a:r>
-            <a:r>
-              <a:rPr/>
-              <a:t> gives each field team its </a:t>
-            </a:r>
-            <a:r>
-              <a:rPr b="1"/>
-              <a:t>own small panel</a:t>
-            </a:r>
-          </a:p>
-          <a:p>
-            <a:pPr lvl="0"/>
-            <a:r>
-              <a:rPr/>
-              <a:t>Same x/y scale across panels — easy to compare</a:t>
-            </a:r>
-          </a:p>
-          <a:p>
-            <a:pPr lvl="0"/>
-            <a:r>
-              <a:rPr/>
-              <a:t>Useful the moment “does every group show the same pattern?” is the real question</a:t>
+            <a:pPr lvl="0" indent="0" marL="1270000">
+              <a:buNone/>
+            </a:pPr>
+            <a:r>
+              <a:rPr sz="2000" b="1"/>
+              <a:t>Important</a:t>
+            </a:r>
+          </a:p>
+          <a:p>
+            <a:pPr lvl="0" indent="0" marL="1270000">
+              <a:buNone/>
+            </a:pPr>
+            <a:r>
+              <a:rPr sz="2000" b="1"/>
+              <a:t>Same dots. Longer bars.</a:t>
+            </a:r>
+          </a:p>
+          <a:p>
+            <a:pPr lvl="0" indent="0" marL="1270000">
+              <a:buNone/>
+            </a:pPr>
+            <a:r>
+              <a:rPr sz="2000"/>
+              <a:t>The means are identical (14.12 and 15.21). The SEs went from 0.49/0.46 to </a:t>
+            </a:r>
+            <a:r>
+              <a:rPr sz="2000" b="1"/>
+              <a:t>1.01/0.79</a:t>
+            </a:r>
+            <a:r>
+              <a:rPr sz="2000"/>
+              <a:t> — roughly double.</a:t>
+            </a:r>
+          </a:p>
+          <a:p>
+            <a:pPr lvl="0" indent="0" marL="1270000">
+              <a:buNone/>
+            </a:pPr>
+            <a:r>
+              <a:rPr sz="2000"/>
+              <a:t>Each small point here is </a:t>
+            </a:r>
+            <a:r>
+              <a:rPr sz="2000" b="1"/>
+              <a:t>one tree</a:t>
+            </a:r>
+            <a:r>
+              <a:rPr sz="2000"/>
+              <a:t>, not one needle. That is the plot our design actually supports.</a:t>
             </a:r>
           </a:p>
           <a:p>
@@ -11201,7 +11591,7 @@
             </a:pPr>
             <a:r>
               <a:rPr sz="2000" b="1"/>
-              <a:t>🖐 Notice</a:t>
+              <a:t>🖐 The habit</a:t>
             </a:r>
           </a:p>
           <a:p>
@@ -11210,15 +11600,17 @@
             </a:pPr>
             <a:r>
               <a:rPr sz="2000"/>
-              <a:t>A faceted plot answers a different question than a single colored plot: not just “is there an overall pattern,” but “does the pattern hold for </a:t>
-            </a:r>
-            <a:r>
-              <a:rPr sz="2000" i="1"/>
-              <a:t>everyone</a:t>
+              <a:t>Before you draw an error bar, ask what one point in it represents. </a:t>
+            </a:r>
+            <a:r>
+              <a:rPr sz="2000">
+                <a:latin typeface="Courier"/>
+              </a:rPr>
+              <a:t>stat_summary()</a:t>
             </a:r>
             <a:r>
               <a:rPr sz="2000"/>
-              <a:t>?”</a:t>
+              <a:t> will happily compute an SE over anything you hand it — including rows that aren’t independent.</a:t>
             </a:r>
           </a:p>
         </p:txBody>
@@ -11270,7 +11662,7 @@
             </a:pPr>
             <a:r>
               <a:rPr/>
-              <a:t>Part 6 · A Quick Theme Tour</a:t>
+              <a:t>Part 5 · Faceting — One Panel Per Group</a:t>
             </a:r>
           </a:p>
         </p:txBody>
@@ -11322,7 +11714,7 @@
             </a:pPr>
             <a:r>
               <a:rPr/>
-              <a:t>A Quick Theme Tour</a:t>
+              <a:t>Faceting — One Panel Per Group</a:t>
             </a:r>
           </a:p>
         </p:txBody>
@@ -11352,7 +11744,97 @@
                 </a:solidFill>
                 <a:latin typeface="Courier"/>
               </a:rPr>
-              <a:t>pine_jitter_plot </a:t>
+              <a:t>pine_facet_plot &lt;- </a:t>
+            </a:r>
+            <a:r>
+              <a:rPr>
+                <a:solidFill>
+                  <a:srgbClr val="4758AB"/>
+                </a:solidFill>
+                <a:latin typeface="Courier"/>
+              </a:rPr>
+              <a:t>ggplot</a:t>
+            </a:r>
+            <a:r>
+              <a:rPr>
+                <a:solidFill>
+                  <a:srgbClr val="003B4F"/>
+                </a:solidFill>
+                <a:latin typeface="Courier"/>
+              </a:rPr>
+              <a:t>(pine_df, </a:t>
+            </a:r>
+            <a:r>
+              <a:rPr>
+                <a:solidFill>
+                  <a:srgbClr val="4758AB"/>
+                </a:solidFill>
+                <a:latin typeface="Courier"/>
+              </a:rPr>
+              <a:t>aes</a:t>
+            </a:r>
+            <a:r>
+              <a:rPr>
+                <a:solidFill>
+                  <a:srgbClr val="003B4F"/>
+                </a:solidFill>
+                <a:latin typeface="Courier"/>
+              </a:rPr>
+              <a:t>(</a:t>
+            </a:r>
+            <a:r>
+              <a:rPr>
+                <a:solidFill>
+                  <a:srgbClr val="657422"/>
+                </a:solidFill>
+                <a:latin typeface="Courier"/>
+              </a:rPr>
+              <a:t>x =</a:t>
+            </a:r>
+            <a:r>
+              <a:rPr>
+                <a:solidFill>
+                  <a:srgbClr val="003B4F"/>
+                </a:solidFill>
+                <a:latin typeface="Courier"/>
+              </a:rPr>
+              <a:t> side, </a:t>
+            </a:r>
+            <a:r>
+              <a:rPr>
+                <a:solidFill>
+                  <a:srgbClr val="657422"/>
+                </a:solidFill>
+                <a:latin typeface="Courier"/>
+              </a:rPr>
+              <a:t>y =</a:t>
+            </a:r>
+            <a:r>
+              <a:rPr>
+                <a:solidFill>
+                  <a:srgbClr val="003B4F"/>
+                </a:solidFill>
+                <a:latin typeface="Courier"/>
+              </a:rPr>
+              <a:t> needle_length_mm, </a:t>
+            </a:r>
+            <a:r>
+              <a:rPr>
+                <a:solidFill>
+                  <a:srgbClr val="657422"/>
+                </a:solidFill>
+                <a:latin typeface="Courier"/>
+              </a:rPr>
+              <a:t>fill =</a:t>
+            </a:r>
+            <a:r>
+              <a:rPr>
+                <a:solidFill>
+                  <a:srgbClr val="003B4F"/>
+                </a:solidFill>
+                <a:latin typeface="Courier"/>
+              </a:rPr>
+              <a:t> side)) </a:t>
             </a:r>
             <a:r>
               <a:rPr>
@@ -11363,6 +11845,43 @@
               </a:rPr>
               <a:t>+</a:t>
             </a:r>
+            <a:br/>
+            <a:r>
+              <a:rPr>
+                <a:solidFill>
+                  <a:srgbClr val="003B4F"/>
+                </a:solidFill>
+                <a:latin typeface="Courier"/>
+              </a:rPr>
+              <a:t>  </a:t>
+            </a:r>
+            <a:r>
+              <a:rPr>
+                <a:solidFill>
+                  <a:srgbClr val="4758AB"/>
+                </a:solidFill>
+                <a:latin typeface="Courier"/>
+              </a:rPr>
+              <a:t>geom_boxplot</a:t>
+            </a:r>
+            <a:r>
+              <a:rPr>
+                <a:solidFill>
+                  <a:srgbClr val="003B4F"/>
+                </a:solidFill>
+                <a:latin typeface="Courier"/>
+              </a:rPr>
+              <a:t>(</a:t>
+            </a:r>
+            <a:r>
+              <a:rPr>
+                <a:solidFill>
+                  <a:srgbClr val="657422"/>
+                </a:solidFill>
+                <a:latin typeface="Courier"/>
+              </a:rPr>
+              <a:t>alpha =</a:t>
+            </a:r>
             <a:r>
               <a:rPr>
                 <a:solidFill>
@@ -11375,11 +11894,84 @@
             <a:r>
               <a:rPr>
                 <a:solidFill>
+                  <a:srgbClr val="AD0000"/>
+                </a:solidFill>
+                <a:latin typeface="Courier"/>
+              </a:rPr>
+              <a:t>0.6</a:t>
+            </a:r>
+            <a:r>
+              <a:rPr>
+                <a:solidFill>
+                  <a:srgbClr val="003B4F"/>
+                </a:solidFill>
+                <a:latin typeface="Courier"/>
+              </a:rPr>
+              <a:t>, </a:t>
+            </a:r>
+            <a:r>
+              <a:rPr>
+                <a:solidFill>
+                  <a:srgbClr val="657422"/>
+                </a:solidFill>
+                <a:latin typeface="Courier"/>
+              </a:rPr>
+              <a:t>outlier.shape =</a:t>
+            </a:r>
+            <a:r>
+              <a:rPr>
+                <a:solidFill>
+                  <a:srgbClr val="003B4F"/>
+                </a:solidFill>
+                <a:latin typeface="Courier"/>
+              </a:rPr>
+              <a:t> </a:t>
+            </a:r>
+            <a:r>
+              <a:rPr>
+                <a:solidFill>
+                  <a:srgbClr val="8F5902"/>
+                </a:solidFill>
+                <a:latin typeface="Courier"/>
+              </a:rPr>
+              <a:t>NA</a:t>
+            </a:r>
+            <a:r>
+              <a:rPr>
+                <a:solidFill>
+                  <a:srgbClr val="003B4F"/>
+                </a:solidFill>
+                <a:latin typeface="Courier"/>
+              </a:rPr>
+              <a:t>) </a:t>
+            </a:r>
+            <a:r>
+              <a:rPr>
+                <a:solidFill>
+                  <a:srgbClr val="5E5E5E"/>
+                </a:solidFill>
+                <a:latin typeface="Courier"/>
+              </a:rPr>
+              <a:t>+</a:t>
+            </a:r>
+            <a:br/>
+            <a:r>
+              <a:rPr>
+                <a:solidFill>
+                  <a:srgbClr val="003B4F"/>
+                </a:solidFill>
+                <a:latin typeface="Courier"/>
+              </a:rPr>
+              <a:t>  </a:t>
+            </a:r>
+            <a:r>
+              <a:rPr>
+                <a:solidFill>
                   <a:srgbClr val="4758AB"/>
                 </a:solidFill>
                 <a:latin typeface="Courier"/>
               </a:rPr>
-              <a:t>theme_bw</a:t>
+              <a:t>facet_wrap</a:t>
             </a:r>
             <a:r>
               <a:rPr>
@@ -11393,10 +11985,241 @@
             <a:r>
               <a:rPr>
                 <a:solidFill>
+                  <a:srgbClr val="5E5E5E"/>
+                </a:solidFill>
+                <a:latin typeface="Courier"/>
+              </a:rPr>
+              <a:t>~</a:t>
+            </a:r>
+            <a:r>
+              <a:rPr>
+                <a:solidFill>
+                  <a:srgbClr val="003B4F"/>
+                </a:solidFill>
+                <a:latin typeface="Courier"/>
+              </a:rPr>
+              <a:t>team) </a:t>
+            </a:r>
+            <a:r>
+              <a:rPr>
+                <a:solidFill>
+                  <a:srgbClr val="5E5E5E"/>
+                </a:solidFill>
+                <a:latin typeface="Courier"/>
+              </a:rPr>
+              <a:t>+</a:t>
+            </a:r>
+            <a:br/>
+            <a:r>
+              <a:rPr>
+                <a:solidFill>
+                  <a:srgbClr val="003B4F"/>
+                </a:solidFill>
+                <a:latin typeface="Courier"/>
+              </a:rPr>
+              <a:t>  </a:t>
+            </a:r>
+            <a:r>
+              <a:rPr>
+                <a:solidFill>
+                  <a:srgbClr val="4758AB"/>
+                </a:solidFill>
+                <a:latin typeface="Courier"/>
+              </a:rPr>
+              <a:t>labs</a:t>
+            </a:r>
+            <a:r>
+              <a:rPr>
+                <a:solidFill>
+                  <a:srgbClr val="003B4F"/>
+                </a:solidFill>
+                <a:latin typeface="Courier"/>
+              </a:rPr>
+              <a:t>(</a:t>
+            </a:r>
+            <a:br/>
+            <a:r>
+              <a:rPr>
+                <a:solidFill>
+                  <a:srgbClr val="003B4F"/>
+                </a:solidFill>
+                <a:latin typeface="Courier"/>
+              </a:rPr>
+              <a:t>    </a:t>
+            </a:r>
+            <a:r>
+              <a:rPr>
+                <a:solidFill>
                   <a:srgbClr val="657422"/>
                 </a:solidFill>
                 <a:latin typeface="Courier"/>
               </a:rPr>
+              <a:t>title =</a:t>
+            </a:r>
+            <a:r>
+              <a:rPr>
+                <a:solidFill>
+                  <a:srgbClr val="003B4F"/>
+                </a:solidFill>
+                <a:latin typeface="Courier"/>
+              </a:rPr>
+              <a:t> </a:t>
+            </a:r>
+            <a:r>
+              <a:rPr>
+                <a:solidFill>
+                  <a:srgbClr val="20794D"/>
+                </a:solidFill>
+                <a:latin typeface="Courier"/>
+              </a:rPr>
+              <a:t>"Needle Length by Side, Faceted by Team"</a:t>
+            </a:r>
+            <a:r>
+              <a:rPr>
+                <a:solidFill>
+                  <a:srgbClr val="003B4F"/>
+                </a:solidFill>
+                <a:latin typeface="Courier"/>
+              </a:rPr>
+              <a:t>,</a:t>
+            </a:r>
+            <a:br/>
+            <a:r>
+              <a:rPr>
+                <a:solidFill>
+                  <a:srgbClr val="003B4F"/>
+                </a:solidFill>
+                <a:latin typeface="Courier"/>
+              </a:rPr>
+              <a:t>    </a:t>
+            </a:r>
+            <a:r>
+              <a:rPr>
+                <a:solidFill>
+                  <a:srgbClr val="657422"/>
+                </a:solidFill>
+                <a:latin typeface="Courier"/>
+              </a:rPr>
+              <a:t>x =</a:t>
+            </a:r>
+            <a:r>
+              <a:rPr>
+                <a:solidFill>
+                  <a:srgbClr val="003B4F"/>
+                </a:solidFill>
+                <a:latin typeface="Courier"/>
+              </a:rPr>
+              <a:t> </a:t>
+            </a:r>
+            <a:r>
+              <a:rPr>
+                <a:solidFill>
+                  <a:srgbClr val="20794D"/>
+                </a:solidFill>
+                <a:latin typeface="Courier"/>
+              </a:rPr>
+              <a:t>"Side of tree"</a:t>
+            </a:r>
+            <a:r>
+              <a:rPr>
+                <a:solidFill>
+                  <a:srgbClr val="003B4F"/>
+                </a:solidFill>
+                <a:latin typeface="Courier"/>
+              </a:rPr>
+              <a:t>,</a:t>
+            </a:r>
+            <a:br/>
+            <a:r>
+              <a:rPr>
+                <a:solidFill>
+                  <a:srgbClr val="003B4F"/>
+                </a:solidFill>
+                <a:latin typeface="Courier"/>
+              </a:rPr>
+              <a:t>    </a:t>
+            </a:r>
+            <a:r>
+              <a:rPr>
+                <a:solidFill>
+                  <a:srgbClr val="657422"/>
+                </a:solidFill>
+                <a:latin typeface="Courier"/>
+              </a:rPr>
+              <a:t>y =</a:t>
+            </a:r>
+            <a:r>
+              <a:rPr>
+                <a:solidFill>
+                  <a:srgbClr val="003B4F"/>
+                </a:solidFill>
+                <a:latin typeface="Courier"/>
+              </a:rPr>
+              <a:t> </a:t>
+            </a:r>
+            <a:r>
+              <a:rPr>
+                <a:solidFill>
+                  <a:srgbClr val="20794D"/>
+                </a:solidFill>
+                <a:latin typeface="Courier"/>
+              </a:rPr>
+              <a:t>"Needle length (mm)"</a:t>
+            </a:r>
+            <a:br/>
+            <a:r>
+              <a:rPr>
+                <a:solidFill>
+                  <a:srgbClr val="003B4F"/>
+                </a:solidFill>
+                <a:latin typeface="Courier"/>
+              </a:rPr>
+              <a:t>  ) </a:t>
+            </a:r>
+            <a:r>
+              <a:rPr>
+                <a:solidFill>
+                  <a:srgbClr val="5E5E5E"/>
+                </a:solidFill>
+                <a:latin typeface="Courier"/>
+              </a:rPr>
+              <a:t>+</a:t>
+            </a:r>
+            <a:br/>
+            <a:r>
+              <a:rPr>
+                <a:solidFill>
+                  <a:srgbClr val="003B4F"/>
+                </a:solidFill>
+                <a:latin typeface="Courier"/>
+              </a:rPr>
+              <a:t>  </a:t>
+            </a:r>
+            <a:r>
+              <a:rPr>
+                <a:solidFill>
+                  <a:srgbClr val="4758AB"/>
+                </a:solidFill>
+                <a:latin typeface="Courier"/>
+              </a:rPr>
+              <a:t>theme_minimal</a:t>
+            </a:r>
+            <a:r>
+              <a:rPr>
+                <a:solidFill>
+                  <a:srgbClr val="003B4F"/>
+                </a:solidFill>
+                <a:latin typeface="Courier"/>
+              </a:rPr>
+              <a:t>(</a:t>
+            </a:r>
+            <a:r>
+              <a:rPr>
+                <a:solidFill>
+                  <a:srgbClr val="657422"/>
+                </a:solidFill>
+                <a:latin typeface="Courier"/>
+              </a:rPr>
               <a:t>base_size =</a:t>
             </a:r>
             <a:r>
@@ -11415,7 +12238,80 @@
                 </a:solidFill>
                 <a:latin typeface="Courier"/>
               </a:rPr>
-              <a:t>9</a:t>
+              <a:t>7</a:t>
+            </a:r>
+            <a:r>
+              <a:rPr>
+                <a:solidFill>
+                  <a:srgbClr val="003B4F"/>
+                </a:solidFill>
+                <a:latin typeface="Courier"/>
+              </a:rPr>
+              <a:t>) </a:t>
+            </a:r>
+            <a:r>
+              <a:rPr>
+                <a:solidFill>
+                  <a:srgbClr val="5E5E5E"/>
+                </a:solidFill>
+                <a:latin typeface="Courier"/>
+              </a:rPr>
+              <a:t>+</a:t>
+            </a:r>
+            <a:br/>
+            <a:r>
+              <a:rPr>
+                <a:solidFill>
+                  <a:srgbClr val="003B4F"/>
+                </a:solidFill>
+                <a:latin typeface="Courier"/>
+              </a:rPr>
+              <a:t>  </a:t>
+            </a:r>
+            <a:r>
+              <a:rPr>
+                <a:solidFill>
+                  <a:srgbClr val="4758AB"/>
+                </a:solidFill>
+                <a:latin typeface="Courier"/>
+              </a:rPr>
+              <a:t>theme</a:t>
+            </a:r>
+            <a:r>
+              <a:rPr>
+                <a:solidFill>
+                  <a:srgbClr val="003B4F"/>
+                </a:solidFill>
+                <a:latin typeface="Courier"/>
+              </a:rPr>
+              <a:t>(</a:t>
+            </a:r>
+            <a:r>
+              <a:rPr>
+                <a:solidFill>
+                  <a:srgbClr val="657422"/>
+                </a:solidFill>
+                <a:latin typeface="Courier"/>
+              </a:rPr>
+              <a:t>legend.position =</a:t>
+            </a:r>
+            <a:r>
+              <a:rPr>
+                <a:solidFill>
+                  <a:srgbClr val="003B4F"/>
+                </a:solidFill>
+                <a:latin typeface="Courier"/>
+              </a:rPr>
+              <a:t> </a:t>
+            </a:r>
+            <a:r>
+              <a:rPr>
+                <a:solidFill>
+                  <a:srgbClr val="20794D"/>
+                </a:solidFill>
+                <a:latin typeface="Courier"/>
+              </a:rPr>
+              <a:t>"none"</a:t>
             </a:r>
             <a:r>
               <a:rPr>
@@ -11425,13 +12321,24 @@
                 <a:latin typeface="Courier"/>
               </a:rPr>
               <a:t>)</a:t>
+            </a:r>
+            <a:br/>
+            <a:br/>
+            <a:r>
+              <a:rPr>
+                <a:solidFill>
+                  <a:srgbClr val="003B4F"/>
+                </a:solidFill>
+                <a:latin typeface="Courier"/>
+              </a:rPr>
+              <a:t>pine_facet_plot</a:t>
             </a:r>
           </a:p>
         </p:txBody>
       </p:sp>
       <p:pic>
         <p:nvPicPr>
-          <p:cNvPr descr="graphing_effectively_lecture_files/figure-pptx/unnamed-chunk-14-1.png" id="0" name="Picture 1"/>
+          <p:cNvPr descr="graphing_effectively_lecture_files/figure-pptx/graphing-effectively-14-1.png" id="0" name="Picture 1"/>
           <p:cNvPicPr>
             <a:picLocks noGrp="1" noChangeAspect="1"/>
           </p:cNvPicPr>
@@ -11439,138 +12346,6 @@
         </p:nvPicPr>
         <p:blipFill>
           <a:blip r:embed="rId2"/>
-          <a:stretch>
-            <a:fillRect/>
-          </a:stretch>
-        </p:blipFill>
-        <p:spPr bwMode="auto">
-          <a:xfrm>
-            <a:off x="431800" y="1270000"/>
-            <a:ext cx="3810000" cy="3302000"/>
-          </a:xfrm>
-          <a:prstGeom prst="rect">
-            <a:avLst/>
-          </a:prstGeom>
-          <a:noFill/>
-          <a:ln w="9525">
-            <a:noFill/>
-            <a:headEnd/>
-            <a:tailEnd/>
-          </a:ln>
-        </p:spPr>
-      </p:pic>
-      <p:sp>
-        <p:nvSpPr>
-          <p:cNvPr id="4" name="Content Placeholder 3"/>
-          <p:cNvSpPr>
-            <a:spLocks noGrp="1"/>
-          </p:cNvSpPr>
-          <p:nvPr>
-            <p:ph idx="2" sz="half"/>
-          </p:nvPr>
-        </p:nvSpPr>
-        <p:spPr/>
-        <p:txBody>
-          <a:bodyPr/>
-          <a:lstStyle/>
-          <a:p>
-            <a:pPr lvl="0" indent="0">
-              <a:buNone/>
-            </a:pPr>
-            <a:r>
-              <a:rPr>
-                <a:solidFill>
-                  <a:srgbClr val="003B4F"/>
-                </a:solidFill>
-                <a:latin typeface="Courier"/>
-              </a:rPr>
-              <a:t>pine_jitter_plot </a:t>
-            </a:r>
-            <a:r>
-              <a:rPr>
-                <a:solidFill>
-                  <a:srgbClr val="5E5E5E"/>
-                </a:solidFill>
-                <a:latin typeface="Courier"/>
-              </a:rPr>
-              <a:t>+</a:t>
-            </a:r>
-            <a:r>
-              <a:rPr>
-                <a:solidFill>
-                  <a:srgbClr val="003B4F"/>
-                </a:solidFill>
-                <a:latin typeface="Courier"/>
-              </a:rPr>
-              <a:t> </a:t>
-            </a:r>
-            <a:r>
-              <a:rPr>
-                <a:solidFill>
-                  <a:srgbClr val="4758AB"/>
-                </a:solidFill>
-                <a:latin typeface="Courier"/>
-              </a:rPr>
-              <a:t>theme_classic</a:t>
-            </a:r>
-            <a:r>
-              <a:rPr>
-                <a:solidFill>
-                  <a:srgbClr val="003B4F"/>
-                </a:solidFill>
-                <a:latin typeface="Courier"/>
-              </a:rPr>
-              <a:t>(</a:t>
-            </a:r>
-            <a:r>
-              <a:rPr>
-                <a:solidFill>
-                  <a:srgbClr val="657422"/>
-                </a:solidFill>
-                <a:latin typeface="Courier"/>
-              </a:rPr>
-              <a:t>base_size =</a:t>
-            </a:r>
-            <a:r>
-              <a:rPr>
-                <a:solidFill>
-                  <a:srgbClr val="003B4F"/>
-                </a:solidFill>
-                <a:latin typeface="Courier"/>
-              </a:rPr>
-              <a:t> </a:t>
-            </a:r>
-            <a:r>
-              <a:rPr>
-                <a:solidFill>
-                  <a:srgbClr val="AD0000"/>
-                </a:solidFill>
-                <a:latin typeface="Courier"/>
-              </a:rPr>
-              <a:t>9</a:t>
-            </a:r>
-            <a:r>
-              <a:rPr>
-                <a:solidFill>
-                  <a:srgbClr val="003B4F"/>
-                </a:solidFill>
-                <a:latin typeface="Courier"/>
-              </a:rPr>
-              <a:t>)</a:t>
-            </a:r>
-          </a:p>
-        </p:txBody>
-      </p:sp>
-      <p:pic>
-        <p:nvPicPr>
-          <p:cNvPr descr="graphing_effectively_lecture_files/figure-pptx/unnamed-chunk-15-1.png" id="0" name="Picture 1"/>
-          <p:cNvPicPr>
-            <a:picLocks noGrp="1" noChangeAspect="1"/>
-          </p:cNvPicPr>
-          <p:nvPr/>
-        </p:nvPicPr>
-        <p:blipFill>
-          <a:blip r:embed="rId3"/>
           <a:stretch>
             <a:fillRect/>
           </a:stretch>
@@ -11611,37 +12386,29 @@
               <a:rPr>
                 <a:latin typeface="Courier"/>
               </a:rPr>
-              <a:t>theme_minimal()</a:t>
+              <a:t>facet_wrap(~team)</a:t>
             </a:r>
             <a:r>
               <a:rPr/>
-              <a:t> — light, few gridlines (what we’ve used so far)</a:t>
+              <a:t> gives each field team its </a:t>
+            </a:r>
+            <a:r>
+              <a:rPr b="1"/>
+              <a:t>own small panel</a:t>
             </a:r>
           </a:p>
           <a:p>
             <a:pPr lvl="0"/>
             <a:r>
-              <a:rPr>
-                <a:latin typeface="Courier"/>
-              </a:rPr>
-              <a:t>theme_bw()</a:t>
-            </a:r>
-            <a:r>
               <a:rPr/>
-              <a:t> — white background, black-and-white frame</a:t>
+              <a:t>Same x/y scale across panels — easy to compare</a:t>
             </a:r>
           </a:p>
           <a:p>
             <a:pPr lvl="0"/>
             <a:r>
-              <a:rPr>
-                <a:latin typeface="Courier"/>
-              </a:rPr>
-              <a:t>theme_classic()</a:t>
-            </a:r>
-            <a:r>
               <a:rPr/>
-              <a:t> — just x/y axis lines, no gridlines at all</a:t>
+              <a:t>Useful the moment “does every group show the same pattern?” is the real question</a:t>
             </a:r>
           </a:p>
           <a:p>
@@ -11650,7 +12417,7 @@
             </a:pPr>
             <a:r>
               <a:rPr sz="2000" b="1"/>
-              <a:t>Note</a:t>
+              <a:t>Tip</a:t>
             </a:r>
           </a:p>
           <a:p>
@@ -11659,7 +12426,7 @@
             </a:pPr>
             <a:r>
               <a:rPr sz="2000" b="1"/>
-              <a:t>✅ Key idea</a:t>
+              <a:t>🖐 Notice</a:t>
             </a:r>
           </a:p>
           <a:p>
@@ -11668,15 +12435,15 @@
             </a:pPr>
             <a:r>
               <a:rPr sz="2000"/>
-              <a:t>A theme changes </a:t>
+              <a:t>A faceted plot answers a different question than a single colored plot: not just “is there an overall pattern,” but “does the pattern hold for </a:t>
             </a:r>
             <a:r>
               <a:rPr sz="2000" i="1"/>
-              <a:t>appearance</a:t>
+              <a:t>everyone</a:t>
             </a:r>
             <a:r>
               <a:rPr sz="2000"/>
-              <a:t> only — never the data or the statistics underneath. Pick one and use it consistently across a report.</a:t>
+              <a:t>?”</a:t>
             </a:r>
           </a:p>
         </p:txBody>
@@ -11728,7 +12495,7 @@
             </a:pPr>
             <a:r>
               <a:rPr/>
-              <a:t>Part 7 · Saving a Real Figure</a:t>
+              <a:t>Part 6 · A Quick Theme Tour</a:t>
             </a:r>
           </a:p>
         </p:txBody>
@@ -11767,12 +12534,9 @@
         </p:nvSpPr>
         <p:spPr>
           <a:xfrm>
-            <a:off x="0" y="0"/>
-            <a:ext cx="9144000" cy="602780"/>
+            <a:off x="139485" y="78119"/>
+            <a:ext cx="8229600" cy="607682"/>
           </a:xfrm>
-          <a:solidFill>
-            <a:srgbClr val="70121D"/>
-          </a:solidFill>
         </p:spPr>
         <p:txBody>
           <a:bodyPr/>
@@ -11783,19 +12547,19 @@
             </a:pPr>
             <a:r>
               <a:rPr/>
-              <a:t>Saving a Real Figure</a:t>
+              <a:t>A Quick Theme Tour</a:t>
             </a:r>
           </a:p>
         </p:txBody>
       </p:sp>
       <p:sp>
         <p:nvSpPr>
-          <p:cNvPr id="3" name="Content Placeholder 2"/>
+          <p:cNvPr id="3" name="Text Placeholder 2"/>
           <p:cNvSpPr>
             <a:spLocks noGrp="1"/>
           </p:cNvSpPr>
           <p:nvPr>
-            <p:ph idx="1" sz="half"/>
+            <p:ph idx="1" type="body"/>
           </p:nvPr>
         </p:nvSpPr>
         <p:spPr/>
@@ -11809,11 +12573,38 @@
             <a:r>
               <a:rPr>
                 <a:solidFill>
+                  <a:srgbClr val="003B4F"/>
+                </a:solidFill>
+                <a:latin typeface="Courier"/>
+              </a:rPr>
+              <a:t>pine_jitter_plot </a:t>
+            </a:r>
+            <a:r>
+              <a:rPr>
+                <a:solidFill>
+                  <a:srgbClr val="5E5E5E"/>
+                </a:solidFill>
+                <a:latin typeface="Courier"/>
+              </a:rPr>
+              <a:t>+</a:t>
+            </a:r>
+            <a:r>
+              <a:rPr>
+                <a:solidFill>
+                  <a:srgbClr val="003B4F"/>
+                </a:solidFill>
+                <a:latin typeface="Courier"/>
+              </a:rPr>
+              <a:t> </a:t>
+            </a:r>
+            <a:r>
+              <a:rPr>
+                <a:solidFill>
                   <a:srgbClr val="4758AB"/>
                 </a:solidFill>
                 <a:latin typeface="Courier"/>
               </a:rPr>
-              <a:t>ggsave</a:t>
+              <a:t>theme_bw</a:t>
             </a:r>
             <a:r>
               <a:rPr>
@@ -11824,44 +12615,6 @@
               </a:rPr>
               <a:t>(</a:t>
             </a:r>
-            <a:br/>
-            <a:r>
-              <a:rPr>
-                <a:solidFill>
-                  <a:srgbClr val="003B4F"/>
-                </a:solidFill>
-                <a:latin typeface="Courier"/>
-              </a:rPr>
-              <a:t>  </a:t>
-            </a:r>
-            <a:r>
-              <a:rPr>
-                <a:solidFill>
-                  <a:srgbClr val="20794D"/>
-                </a:solidFill>
-                <a:latin typeface="Courier"/>
-              </a:rPr>
-              <a:t>"figures/pine_needle_boxplot.png"</a:t>
-            </a:r>
-            <a:r>
-              <a:rPr>
-                <a:solidFill>
-                  <a:srgbClr val="003B4F"/>
-                </a:solidFill>
-                <a:latin typeface="Courier"/>
-              </a:rPr>
-              <a:t>,</a:t>
-            </a:r>
-            <a:br/>
-            <a:r>
-              <a:rPr>
-                <a:solidFill>
-                  <a:srgbClr val="003B4F"/>
-                </a:solidFill>
-                <a:latin typeface="Courier"/>
-              </a:rPr>
-              <a:t>  </a:t>
-            </a:r>
             <a:r>
               <a:rPr>
                 <a:solidFill>
@@ -11869,35 +12622,7 @@
                 </a:solidFill>
                 <a:latin typeface="Courier"/>
               </a:rPr>
-              <a:t>plot =</a:t>
-            </a:r>
-            <a:r>
-              <a:rPr>
-                <a:solidFill>
-                  <a:srgbClr val="003B4F"/>
-                </a:solidFill>
-                <a:latin typeface="Courier"/>
-              </a:rPr>
-              <a:t> pine_jitter_plot,</a:t>
-            </a:r>
-            <a:br/>
-            <a:r>
-              <a:rPr>
-                <a:solidFill>
-                  <a:srgbClr val="003B4F"/>
-                </a:solidFill>
-                <a:latin typeface="Courier"/>
-              </a:rPr>
-              <a:t>  </a:t>
-            </a:r>
-            <a:r>
-              <a:rPr>
-                <a:solidFill>
-                  <a:srgbClr val="657422"/>
-                </a:solidFill>
-                <a:latin typeface="Courier"/>
-              </a:rPr>
-              <a:t>width =</a:t>
+              <a:t>base_size =</a:t>
             </a:r>
             <a:r>
               <a:rPr>
@@ -11915,147 +12640,8 @@
                 </a:solidFill>
                 <a:latin typeface="Courier"/>
               </a:rPr>
-              <a:t>3</a:t>
-            </a:r>
-            <a:r>
-              <a:rPr>
-                <a:solidFill>
-                  <a:srgbClr val="003B4F"/>
-                </a:solidFill>
-                <a:latin typeface="Courier"/>
-              </a:rPr>
-              <a:t>,</a:t>
-            </a:r>
-            <a:br/>
-            <a:r>
-              <a:rPr>
-                <a:solidFill>
-                  <a:srgbClr val="003B4F"/>
-                </a:solidFill>
-                <a:latin typeface="Courier"/>
-              </a:rPr>
-              <a:t>  </a:t>
-            </a:r>
-            <a:r>
-              <a:rPr>
-                <a:solidFill>
-                  <a:srgbClr val="657422"/>
-                </a:solidFill>
-                <a:latin typeface="Courier"/>
-              </a:rPr>
-              <a:t>height =</a:t>
-            </a:r>
-            <a:r>
-              <a:rPr>
-                <a:solidFill>
-                  <a:srgbClr val="003B4F"/>
-                </a:solidFill>
-                <a:latin typeface="Courier"/>
-              </a:rPr>
-              <a:t> </a:t>
-            </a:r>
-            <a:r>
-              <a:rPr>
-                <a:solidFill>
-                  <a:srgbClr val="AD0000"/>
-                </a:solidFill>
-                <a:latin typeface="Courier"/>
-              </a:rPr>
-              <a:t>3</a:t>
-            </a:r>
-            <a:r>
-              <a:rPr>
-                <a:solidFill>
-                  <a:srgbClr val="003B4F"/>
-                </a:solidFill>
-                <a:latin typeface="Courier"/>
-              </a:rPr>
-              <a:t>,</a:t>
-            </a:r>
-            <a:br/>
-            <a:r>
-              <a:rPr>
-                <a:solidFill>
-                  <a:srgbClr val="003B4F"/>
-                </a:solidFill>
-                <a:latin typeface="Courier"/>
-              </a:rPr>
-              <a:t>  </a:t>
-            </a:r>
-            <a:r>
-              <a:rPr>
-                <a:solidFill>
-                  <a:srgbClr val="657422"/>
-                </a:solidFill>
-                <a:latin typeface="Courier"/>
-              </a:rPr>
-              <a:t>units =</a:t>
-            </a:r>
-            <a:r>
-              <a:rPr>
-                <a:solidFill>
-                  <a:srgbClr val="003B4F"/>
-                </a:solidFill>
-                <a:latin typeface="Courier"/>
-              </a:rPr>
-              <a:t> </a:t>
-            </a:r>
-            <a:r>
-              <a:rPr>
-                <a:solidFill>
-                  <a:srgbClr val="20794D"/>
-                </a:solidFill>
-                <a:latin typeface="Courier"/>
-              </a:rPr>
-              <a:t>"in"</a:t>
-            </a:r>
-            <a:r>
-              <a:rPr>
-                <a:solidFill>
-                  <a:srgbClr val="003B4F"/>
-                </a:solidFill>
-                <a:latin typeface="Courier"/>
-              </a:rPr>
-              <a:t>,</a:t>
-            </a:r>
-            <a:br/>
-            <a:r>
-              <a:rPr>
-                <a:solidFill>
-                  <a:srgbClr val="003B4F"/>
-                </a:solidFill>
-                <a:latin typeface="Courier"/>
-              </a:rPr>
-              <a:t>  </a:t>
-            </a:r>
-            <a:r>
-              <a:rPr>
-                <a:solidFill>
-                  <a:srgbClr val="657422"/>
-                </a:solidFill>
-                <a:latin typeface="Courier"/>
-              </a:rPr>
-              <a:t>dpi =</a:t>
-            </a:r>
-            <a:r>
-              <a:rPr>
-                <a:solidFill>
-                  <a:srgbClr val="003B4F"/>
-                </a:solidFill>
-                <a:latin typeface="Courier"/>
-              </a:rPr>
-              <a:t> </a:t>
-            </a:r>
-            <a:r>
-              <a:rPr>
-                <a:solidFill>
-                  <a:srgbClr val="AD0000"/>
-                </a:solidFill>
-                <a:latin typeface="Courier"/>
-              </a:rPr>
-              <a:t>300</a:t>
-            </a:r>
-            <a:br/>
+              <a:t>9</a:t>
+            </a:r>
             <a:r>
               <a:rPr>
                 <a:solidFill>
@@ -12064,79 +12650,40 @@
                 <a:latin typeface="Courier"/>
               </a:rPr>
               <a:t>)</a:t>
-            </a:r>
-          </a:p>
-          <a:p>
-            <a:pPr lvl="0" indent="0" marL="1270000">
-              <a:buNone/>
-            </a:pPr>
-            <a:r>
-              <a:rPr sz="2000" b="1"/>
-              <a:t>Warning</a:t>
-            </a:r>
-          </a:p>
-          <a:p>
-            <a:pPr lvl="0" indent="0" marL="1270000">
-              <a:buNone/>
-            </a:pPr>
-            <a:r>
-              <a:rPr sz="2000" b="1"/>
-              <a:t>⚠️ Watch out!</a:t>
-            </a:r>
-          </a:p>
-          <a:p>
-            <a:pPr lvl="0" indent="0" marL="1270000">
-              <a:buNone/>
-            </a:pPr>
-            <a:r>
-              <a:rPr sz="2000">
-                <a:latin typeface="Courier"/>
-              </a:rPr>
-              <a:t>ggsave()</a:t>
-            </a:r>
-            <a:r>
-              <a:rPr sz="2000"/>
-              <a:t> wants the </a:t>
-            </a:r>
-            <a:r>
-              <a:rPr sz="2000" b="1"/>
-              <a:t>filename first</a:t>
-            </a:r>
-            <a:r>
-              <a:rPr sz="2000"/>
-              <a:t>, then </a:t>
-            </a:r>
-            <a:r>
-              <a:rPr sz="2000">
-                <a:latin typeface="Courier"/>
-              </a:rPr>
-              <a:t>plot =</a:t>
-            </a:r>
-            <a:r>
-              <a:rPr sz="2000"/>
-              <a:t>. If you skip </a:t>
-            </a:r>
-            <a:r>
-              <a:rPr sz="2000">
-                <a:latin typeface="Courier"/>
-              </a:rPr>
-              <a:t>plot =</a:t>
-            </a:r>
-            <a:r>
-              <a:rPr sz="2000"/>
-              <a:t>, it saves whatever plot was drawn </a:t>
-            </a:r>
-            <a:r>
-              <a:rPr sz="2000" i="1"/>
-              <a:t>last</a:t>
-            </a:r>
-            <a:r>
-              <a:rPr sz="2000"/>
-              <a:t> — not necessarily the one you meant.</a:t>
             </a:r>
           </a:p>
         </p:txBody>
       </p:sp>
+      <p:pic>
+        <p:nvPicPr>
+          <p:cNvPr descr="graphing_effectively_lecture_files/figure-pptx/graphing-effectively-15-1.png" id="0" name="Picture 1"/>
+          <p:cNvPicPr>
+            <a:picLocks noGrp="1" noChangeAspect="1"/>
+          </p:cNvPicPr>
+          <p:nvPr/>
+        </p:nvPicPr>
+        <p:blipFill>
+          <a:blip r:embed="rId2"/>
+          <a:stretch>
+            <a:fillRect/>
+          </a:stretch>
+        </p:blipFill>
+        <p:spPr bwMode="auto">
+          <a:xfrm>
+            <a:off x="431800" y="1270000"/>
+            <a:ext cx="3810000" cy="3302000"/>
+          </a:xfrm>
+          <a:prstGeom prst="rect">
+            <a:avLst/>
+          </a:prstGeom>
+          <a:noFill/>
+          <a:ln w="9525">
+            <a:noFill/>
+            <a:headEnd/>
+            <a:tailEnd/>
+          </a:ln>
+        </p:spPr>
+      </p:pic>
       <p:sp>
         <p:nvSpPr>
           <p:cNvPr id="4" name="Content Placeholder 3"/>
@@ -12152,6 +12699,177 @@
           <a:bodyPr/>
           <a:lstStyle/>
           <a:p>
+            <a:pPr lvl="0" indent="0">
+              <a:buNone/>
+            </a:pPr>
+            <a:r>
+              <a:rPr>
+                <a:solidFill>
+                  <a:srgbClr val="003B4F"/>
+                </a:solidFill>
+                <a:latin typeface="Courier"/>
+              </a:rPr>
+              <a:t>pine_jitter_plot </a:t>
+            </a:r>
+            <a:r>
+              <a:rPr>
+                <a:solidFill>
+                  <a:srgbClr val="5E5E5E"/>
+                </a:solidFill>
+                <a:latin typeface="Courier"/>
+              </a:rPr>
+              <a:t>+</a:t>
+            </a:r>
+            <a:r>
+              <a:rPr>
+                <a:solidFill>
+                  <a:srgbClr val="003B4F"/>
+                </a:solidFill>
+                <a:latin typeface="Courier"/>
+              </a:rPr>
+              <a:t> </a:t>
+            </a:r>
+            <a:r>
+              <a:rPr>
+                <a:solidFill>
+                  <a:srgbClr val="4758AB"/>
+                </a:solidFill>
+                <a:latin typeface="Courier"/>
+              </a:rPr>
+              <a:t>theme_classic</a:t>
+            </a:r>
+            <a:r>
+              <a:rPr>
+                <a:solidFill>
+                  <a:srgbClr val="003B4F"/>
+                </a:solidFill>
+                <a:latin typeface="Courier"/>
+              </a:rPr>
+              <a:t>(</a:t>
+            </a:r>
+            <a:r>
+              <a:rPr>
+                <a:solidFill>
+                  <a:srgbClr val="657422"/>
+                </a:solidFill>
+                <a:latin typeface="Courier"/>
+              </a:rPr>
+              <a:t>base_size =</a:t>
+            </a:r>
+            <a:r>
+              <a:rPr>
+                <a:solidFill>
+                  <a:srgbClr val="003B4F"/>
+                </a:solidFill>
+                <a:latin typeface="Courier"/>
+              </a:rPr>
+              <a:t> </a:t>
+            </a:r>
+            <a:r>
+              <a:rPr>
+                <a:solidFill>
+                  <a:srgbClr val="AD0000"/>
+                </a:solidFill>
+                <a:latin typeface="Courier"/>
+              </a:rPr>
+              <a:t>9</a:t>
+            </a:r>
+            <a:r>
+              <a:rPr>
+                <a:solidFill>
+                  <a:srgbClr val="003B4F"/>
+                </a:solidFill>
+                <a:latin typeface="Courier"/>
+              </a:rPr>
+              <a:t>)</a:t>
+            </a:r>
+          </a:p>
+        </p:txBody>
+      </p:sp>
+      <p:pic>
+        <p:nvPicPr>
+          <p:cNvPr descr="graphing_effectively_lecture_files/figure-pptx/graphing-effectively-16-1.png" id="0" name="Picture 1"/>
+          <p:cNvPicPr>
+            <a:picLocks noGrp="1" noChangeAspect="1"/>
+          </p:cNvPicPr>
+          <p:nvPr/>
+        </p:nvPicPr>
+        <p:blipFill>
+          <a:blip r:embed="rId3"/>
+          <a:stretch>
+            <a:fillRect/>
+          </a:stretch>
+        </p:blipFill>
+        <p:spPr bwMode="auto">
+          <a:xfrm>
+            <a:off x="431800" y="1270000"/>
+            <a:ext cx="3810000" cy="3302000"/>
+          </a:xfrm>
+          <a:prstGeom prst="rect">
+            <a:avLst/>
+          </a:prstGeom>
+          <a:noFill/>
+          <a:ln w="9525">
+            <a:noFill/>
+            <a:headEnd/>
+            <a:tailEnd/>
+          </a:ln>
+        </p:spPr>
+      </p:pic>
+      <p:sp>
+        <p:nvSpPr>
+          <p:cNvPr id="5" name="Text Placeholder 4"/>
+          <p:cNvSpPr>
+            <a:spLocks noGrp="1"/>
+          </p:cNvSpPr>
+          <p:nvPr>
+            <p:ph idx="3" sz="quarter" type="body"/>
+          </p:nvPr>
+        </p:nvSpPr>
+        <p:spPr/>
+        <p:txBody>
+          <a:bodyPr/>
+          <a:lstStyle/>
+          <a:p>
+            <a:pPr lvl="0"/>
+            <a:r>
+              <a:rPr>
+                <a:latin typeface="Courier"/>
+              </a:rPr>
+              <a:t>theme_minimal()</a:t>
+            </a:r>
+            <a:r>
+              <a:rPr/>
+              <a:t> — light, few gridlines (what we’ve used so far)</a:t>
+            </a:r>
+          </a:p>
+          <a:p>
+            <a:pPr lvl="0"/>
+            <a:r>
+              <a:rPr>
+                <a:latin typeface="Courier"/>
+              </a:rPr>
+              <a:t>theme_bw()</a:t>
+            </a:r>
+            <a:r>
+              <a:rPr/>
+              <a:t> — white background, black-and-white frame</a:t>
+            </a:r>
+          </a:p>
+          <a:p>
+            <a:pPr lvl="0"/>
+            <a:r>
+              <a:rPr>
+                <a:latin typeface="Courier"/>
+              </a:rPr>
+              <a:t>theme_classic()</a:t>
+            </a:r>
+            <a:r>
+              <a:rPr/>
+              <a:t> — just x/y axis lines, no gridlines at all</a:t>
+            </a:r>
+          </a:p>
+          <a:p>
             <a:pPr lvl="0" indent="0" marL="1270000">
               <a:buNone/>
             </a:pPr>
@@ -12175,57 +12893,15 @@
             </a:pPr>
             <a:r>
               <a:rPr sz="2000"/>
-              <a:t>Always set </a:t>
-            </a:r>
-            <a:r>
-              <a:rPr sz="2000">
-                <a:latin typeface="Courier"/>
-              </a:rPr>
-              <a:t>width</a:t>
+              <a:t>A theme changes </a:t>
+            </a:r>
+            <a:r>
+              <a:rPr sz="2000" i="1"/>
+              <a:t>appearance</a:t>
             </a:r>
             <a:r>
               <a:rPr sz="2000"/>
-              <a:t>, </a:t>
-            </a:r>
-            <a:r>
-              <a:rPr sz="2000">
-                <a:latin typeface="Courier"/>
-              </a:rPr>
-              <a:t>height</a:t>
-            </a:r>
-            <a:r>
-              <a:rPr sz="2000"/>
-              <a:t>, </a:t>
-            </a:r>
-            <a:r>
-              <a:rPr sz="2000">
-                <a:latin typeface="Courier"/>
-              </a:rPr>
-              <a:t>units</a:t>
-            </a:r>
-            <a:r>
-              <a:rPr sz="2000"/>
-              <a:t>, and </a:t>
-            </a:r>
-            <a:r>
-              <a:rPr sz="2000">
-                <a:latin typeface="Courier"/>
-              </a:rPr>
-              <a:t>dpi</a:t>
-            </a:r>
-            <a:r>
-              <a:rPr sz="2000"/>
-              <a:t> explicitly. Letting </a:t>
-            </a:r>
-            <a:r>
-              <a:rPr sz="2000">
-                <a:latin typeface="Courier"/>
-              </a:rPr>
-              <a:t>ggsave()</a:t>
-            </a:r>
-            <a:r>
-              <a:rPr sz="2000"/>
-              <a:t> guess gives you a plot sized for your screen, not for a report or a poster.</a:t>
+              <a:t> only — never the data or the statistics underneath. Pick one and use it consistently across a report.</a:t>
             </a:r>
           </a:p>
         </p:txBody>
@@ -12277,13 +12953,7 @@
             </a:pPr>
             <a:r>
               <a:rPr/>
-              <a:t>Part 8 · Custom Colors and Legends — </a:t>
-            </a:r>
-            <a:r>
-              <a:rPr>
-                <a:latin typeface="Courier"/>
-              </a:rPr>
-              <a:t>scale_color_manual()</a:t>
+              <a:t>Part 7 · Saving a Real Figure</a:t>
             </a:r>
           </a:p>
         </p:txBody>
@@ -12323,8 +12993,11 @@
         <p:spPr>
           <a:xfrm>
             <a:off x="0" y="0"/>
-            <a:ext cx="9144000" cy="582780"/>
+            <a:ext cx="9144000" cy="602780"/>
           </a:xfrm>
+          <a:solidFill>
+            <a:srgbClr val="70121D"/>
+          </a:solidFill>
         </p:spPr>
         <p:txBody>
           <a:bodyPr/>
@@ -12334,14 +13007,8 @@
               <a:buNone/>
             </a:pPr>
             <a:r>
-              <a:rPr>
-                <a:latin typeface="Courier"/>
-              </a:rPr>
-              <a:t>scale_color_manual()</a:t>
-            </a:r>
-            <a:r>
               <a:rPr/>
-              <a:t> — Choosing Your Own Colors</a:t>
+              <a:t>Saving a Real Figure</a:t>
             </a:r>
           </a:p>
         </p:txBody>
@@ -12353,7 +13020,7 @@
             <a:spLocks noGrp="1"/>
           </p:cNvSpPr>
           <p:nvPr>
-            <p:ph idx="1"/>
+            <p:ph idx="1" sz="half"/>
           </p:nvPr>
         </p:nvSpPr>
         <p:spPr/>
@@ -12361,12 +13028,276 @@
           <a:bodyPr/>
           <a:lstStyle/>
           <a:p>
+            <a:pPr lvl="0" indent="0">
+              <a:buNone/>
+            </a:pPr>
+            <a:r>
+              <a:rPr>
+                <a:solidFill>
+                  <a:srgbClr val="4758AB"/>
+                </a:solidFill>
+                <a:latin typeface="Courier"/>
+              </a:rPr>
+              <a:t>ggsave</a:t>
+            </a:r>
+            <a:r>
+              <a:rPr>
+                <a:solidFill>
+                  <a:srgbClr val="003B4F"/>
+                </a:solidFill>
+                <a:latin typeface="Courier"/>
+              </a:rPr>
+              <a:t>(</a:t>
+            </a:r>
+            <a:br/>
+            <a:r>
+              <a:rPr>
+                <a:solidFill>
+                  <a:srgbClr val="003B4F"/>
+                </a:solidFill>
+                <a:latin typeface="Courier"/>
+              </a:rPr>
+              <a:t>  </a:t>
+            </a:r>
+            <a:r>
+              <a:rPr>
+                <a:solidFill>
+                  <a:srgbClr val="20794D"/>
+                </a:solidFill>
+                <a:latin typeface="Courier"/>
+              </a:rPr>
+              <a:t>"figures/pine_needle_boxplot.png"</a:t>
+            </a:r>
+            <a:r>
+              <a:rPr>
+                <a:solidFill>
+                  <a:srgbClr val="003B4F"/>
+                </a:solidFill>
+                <a:latin typeface="Courier"/>
+              </a:rPr>
+              <a:t>,</a:t>
+            </a:r>
+            <a:br/>
+            <a:r>
+              <a:rPr>
+                <a:solidFill>
+                  <a:srgbClr val="003B4F"/>
+                </a:solidFill>
+                <a:latin typeface="Courier"/>
+              </a:rPr>
+              <a:t>  </a:t>
+            </a:r>
+            <a:r>
+              <a:rPr>
+                <a:solidFill>
+                  <a:srgbClr val="657422"/>
+                </a:solidFill>
+                <a:latin typeface="Courier"/>
+              </a:rPr>
+              <a:t>plot =</a:t>
+            </a:r>
+            <a:r>
+              <a:rPr>
+                <a:solidFill>
+                  <a:srgbClr val="003B4F"/>
+                </a:solidFill>
+                <a:latin typeface="Courier"/>
+              </a:rPr>
+              <a:t> pine_jitter_plot,</a:t>
+            </a:r>
+            <a:br/>
+            <a:r>
+              <a:rPr>
+                <a:solidFill>
+                  <a:srgbClr val="003B4F"/>
+                </a:solidFill>
+                <a:latin typeface="Courier"/>
+              </a:rPr>
+              <a:t>  </a:t>
+            </a:r>
+            <a:r>
+              <a:rPr>
+                <a:solidFill>
+                  <a:srgbClr val="657422"/>
+                </a:solidFill>
+                <a:latin typeface="Courier"/>
+              </a:rPr>
+              <a:t>width =</a:t>
+            </a:r>
+            <a:r>
+              <a:rPr>
+                <a:solidFill>
+                  <a:srgbClr val="003B4F"/>
+                </a:solidFill>
+                <a:latin typeface="Courier"/>
+              </a:rPr>
+              <a:t> </a:t>
+            </a:r>
+            <a:r>
+              <a:rPr>
+                <a:solidFill>
+                  <a:srgbClr val="AD0000"/>
+                </a:solidFill>
+                <a:latin typeface="Courier"/>
+              </a:rPr>
+              <a:t>3</a:t>
+            </a:r>
+            <a:r>
+              <a:rPr>
+                <a:solidFill>
+                  <a:srgbClr val="003B4F"/>
+                </a:solidFill>
+                <a:latin typeface="Courier"/>
+              </a:rPr>
+              <a:t>,</a:t>
+            </a:r>
+            <a:br/>
+            <a:r>
+              <a:rPr>
+                <a:solidFill>
+                  <a:srgbClr val="003B4F"/>
+                </a:solidFill>
+                <a:latin typeface="Courier"/>
+              </a:rPr>
+              <a:t>  </a:t>
+            </a:r>
+            <a:r>
+              <a:rPr>
+                <a:solidFill>
+                  <a:srgbClr val="657422"/>
+                </a:solidFill>
+                <a:latin typeface="Courier"/>
+              </a:rPr>
+              <a:t>height =</a:t>
+            </a:r>
+            <a:r>
+              <a:rPr>
+                <a:solidFill>
+                  <a:srgbClr val="003B4F"/>
+                </a:solidFill>
+                <a:latin typeface="Courier"/>
+              </a:rPr>
+              <a:t> </a:t>
+            </a:r>
+            <a:r>
+              <a:rPr>
+                <a:solidFill>
+                  <a:srgbClr val="AD0000"/>
+                </a:solidFill>
+                <a:latin typeface="Courier"/>
+              </a:rPr>
+              <a:t>3</a:t>
+            </a:r>
+            <a:r>
+              <a:rPr>
+                <a:solidFill>
+                  <a:srgbClr val="003B4F"/>
+                </a:solidFill>
+                <a:latin typeface="Courier"/>
+              </a:rPr>
+              <a:t>,</a:t>
+            </a:r>
+            <a:br/>
+            <a:r>
+              <a:rPr>
+                <a:solidFill>
+                  <a:srgbClr val="003B4F"/>
+                </a:solidFill>
+                <a:latin typeface="Courier"/>
+              </a:rPr>
+              <a:t>  </a:t>
+            </a:r>
+            <a:r>
+              <a:rPr>
+                <a:solidFill>
+                  <a:srgbClr val="657422"/>
+                </a:solidFill>
+                <a:latin typeface="Courier"/>
+              </a:rPr>
+              <a:t>units =</a:t>
+            </a:r>
+            <a:r>
+              <a:rPr>
+                <a:solidFill>
+                  <a:srgbClr val="003B4F"/>
+                </a:solidFill>
+                <a:latin typeface="Courier"/>
+              </a:rPr>
+              <a:t> </a:t>
+            </a:r>
+            <a:r>
+              <a:rPr>
+                <a:solidFill>
+                  <a:srgbClr val="20794D"/>
+                </a:solidFill>
+                <a:latin typeface="Courier"/>
+              </a:rPr>
+              <a:t>"in"</a:t>
+            </a:r>
+            <a:r>
+              <a:rPr>
+                <a:solidFill>
+                  <a:srgbClr val="003B4F"/>
+                </a:solidFill>
+                <a:latin typeface="Courier"/>
+              </a:rPr>
+              <a:t>,</a:t>
+            </a:r>
+            <a:br/>
+            <a:r>
+              <a:rPr>
+                <a:solidFill>
+                  <a:srgbClr val="003B4F"/>
+                </a:solidFill>
+                <a:latin typeface="Courier"/>
+              </a:rPr>
+              <a:t>  </a:t>
+            </a:r>
+            <a:r>
+              <a:rPr>
+                <a:solidFill>
+                  <a:srgbClr val="657422"/>
+                </a:solidFill>
+                <a:latin typeface="Courier"/>
+              </a:rPr>
+              <a:t>dpi =</a:t>
+            </a:r>
+            <a:r>
+              <a:rPr>
+                <a:solidFill>
+                  <a:srgbClr val="003B4F"/>
+                </a:solidFill>
+                <a:latin typeface="Courier"/>
+              </a:rPr>
+              <a:t> </a:t>
+            </a:r>
+            <a:r>
+              <a:rPr>
+                <a:solidFill>
+                  <a:srgbClr val="AD0000"/>
+                </a:solidFill>
+                <a:latin typeface="Courier"/>
+              </a:rPr>
+              <a:t>300</a:t>
+            </a:r>
+            <a:br/>
+            <a:r>
+              <a:rPr>
+                <a:solidFill>
+                  <a:srgbClr val="003B4F"/>
+                </a:solidFill>
+                <a:latin typeface="Courier"/>
+              </a:rPr>
+              <a:t>)</a:t>
+            </a:r>
+          </a:p>
+          <a:p>
             <a:pPr lvl="0" indent="0" marL="1270000">
               <a:buNone/>
             </a:pPr>
             <a:r>
               <a:rPr sz="2000" b="1"/>
-              <a:t>Tip</a:t>
+              <a:t>Warning</a:t>
             </a:r>
           </a:p>
           <a:p>
@@ -12375,21 +13306,151 @@
             </a:pPr>
             <a:r>
               <a:rPr sz="2000" b="1"/>
-              <a:t>🚀 Advanced / extra work</a:t>
+              <a:t>⚠️ Watch out!</a:t>
+            </a:r>
+          </a:p>
+          <a:p>
+            <a:pPr lvl="0" indent="0" marL="1270000">
+              <a:buNone/>
+            </a:pPr>
+            <a:r>
+              <a:rPr sz="2000">
+                <a:latin typeface="Courier"/>
+              </a:rPr>
+              <a:t>ggsave()</a:t>
             </a:r>
             <a:r>
               <a:rPr sz="2000"/>
-              <a:t> — </a:t>
+              <a:t> wants the </a:t>
+            </a:r>
+            <a:r>
+              <a:rPr sz="2000" b="1"/>
+              <a:t>filename first</a:t>
+            </a:r>
+            <a:r>
+              <a:rPr sz="2000"/>
+              <a:t>, then </a:t>
             </a:r>
             <a:r>
               <a:rPr sz="2000">
                 <a:latin typeface="Courier"/>
               </a:rPr>
-              <a:t>ggplot</a:t>
+              <a:t>plot =</a:t>
             </a:r>
             <a:r>
               <a:rPr sz="2000"/>
-              <a:t>’s default colors are fine for exploring data, but a real figure often needs specific colors (journal style, colorblind-safe palettes, matching a poster). This is how you take control.</a:t>
+              <a:t>. If you skip </a:t>
+            </a:r>
+            <a:r>
+              <a:rPr sz="2000">
+                <a:latin typeface="Courier"/>
+              </a:rPr>
+              <a:t>plot =</a:t>
+            </a:r>
+            <a:r>
+              <a:rPr sz="2000"/>
+              <a:t>, it saves whatever plot was drawn </a:t>
+            </a:r>
+            <a:r>
+              <a:rPr sz="2000" i="1"/>
+              <a:t>last</a:t>
+            </a:r>
+            <a:r>
+              <a:rPr sz="2000"/>
+              <a:t> — not necessarily the one you meant.</a:t>
+            </a:r>
+          </a:p>
+        </p:txBody>
+      </p:sp>
+      <p:sp>
+        <p:nvSpPr>
+          <p:cNvPr id="4" name="Content Placeholder 3"/>
+          <p:cNvSpPr>
+            <a:spLocks noGrp="1"/>
+          </p:cNvSpPr>
+          <p:nvPr>
+            <p:ph idx="2" sz="half"/>
+          </p:nvPr>
+        </p:nvSpPr>
+        <p:spPr/>
+        <p:txBody>
+          <a:bodyPr/>
+          <a:lstStyle/>
+          <a:p>
+            <a:pPr lvl="0" indent="0" marL="1270000">
+              <a:buNone/>
+            </a:pPr>
+            <a:r>
+              <a:rPr sz="2000" b="1"/>
+              <a:t>Note</a:t>
+            </a:r>
+          </a:p>
+          <a:p>
+            <a:pPr lvl="0" indent="0" marL="1270000">
+              <a:buNone/>
+            </a:pPr>
+            <a:r>
+              <a:rPr sz="2000" b="1"/>
+              <a:t>✅ Key idea</a:t>
+            </a:r>
+          </a:p>
+          <a:p>
+            <a:pPr lvl="0" indent="0" marL="1270000">
+              <a:buNone/>
+            </a:pPr>
+            <a:r>
+              <a:rPr sz="2000"/>
+              <a:t>Always set </a:t>
+            </a:r>
+            <a:r>
+              <a:rPr sz="2000">
+                <a:latin typeface="Courier"/>
+              </a:rPr>
+              <a:t>width</a:t>
+            </a:r>
+            <a:r>
+              <a:rPr sz="2000"/>
+              <a:t>, </a:t>
+            </a:r>
+            <a:r>
+              <a:rPr sz="2000">
+                <a:latin typeface="Courier"/>
+              </a:rPr>
+              <a:t>height</a:t>
+            </a:r>
+            <a:r>
+              <a:rPr sz="2000"/>
+              <a:t>, </a:t>
+            </a:r>
+            <a:r>
+              <a:rPr sz="2000">
+                <a:latin typeface="Courier"/>
+              </a:rPr>
+              <a:t>units</a:t>
+            </a:r>
+            <a:r>
+              <a:rPr sz="2000"/>
+              <a:t>, and </a:t>
+            </a:r>
+            <a:r>
+              <a:rPr sz="2000">
+                <a:latin typeface="Courier"/>
+              </a:rPr>
+              <a:t>dpi</a:t>
+            </a:r>
+            <a:r>
+              <a:rPr sz="2000"/>
+              <a:t> explicitly. Letting </a:t>
+            </a:r>
+            <a:r>
+              <a:rPr sz="2000">
+                <a:latin typeface="Courier"/>
+              </a:rPr>
+              <a:t>ggsave()</a:t>
+            </a:r>
+            <a:r>
+              <a:rPr sz="2000"/>
+              <a:t> guess gives you a plot sized for your screen, not for a report or a poster.</a:t>
             </a:r>
           </a:p>
         </p:txBody>
@@ -12480,6 +13541,170 @@
       </p:grpSpPr>
       <p:sp>
         <p:nvSpPr>
+          <p:cNvPr id="2" name="Title 1"/>
+          <p:cNvSpPr>
+            <a:spLocks noGrp="1"/>
+          </p:cNvSpPr>
+          <p:nvPr>
+            <p:ph type="title"/>
+          </p:nvPr>
+        </p:nvSpPr>
+        <p:spPr>
+          <a:xfrm>
+            <a:off x="0" y="0"/>
+            <a:ext cx="9144000" cy="582780"/>
+          </a:xfrm>
+        </p:spPr>
+        <p:txBody>
+          <a:bodyPr/>
+          <a:lstStyle/>
+          <a:p>
+            <a:pPr lvl="0" indent="0" marL="0">
+              <a:buNone/>
+            </a:pPr>
+            <a:r>
+              <a:rPr/>
+              <a:t>Part 8 · Custom Colors and Legends — </a:t>
+            </a:r>
+            <a:r>
+              <a:rPr>
+                <a:latin typeface="Courier"/>
+              </a:rPr>
+              <a:t>scale_color_manual()</a:t>
+            </a:r>
+          </a:p>
+        </p:txBody>
+      </p:sp>
+    </p:spTree>
+  </p:cSld>
+</p:sld>
+</file>
+
+<file path=ppt/slides/slide31.xml><?xml version="1.0" encoding="utf-8"?>
+<p:sld xmlns:a="http://schemas.openxmlformats.org/drawingml/2006/main" xmlns:r="http://schemas.openxmlformats.org/officeDocument/2006/relationships" xmlns:p="http://schemas.openxmlformats.org/presentationml/2006/main">
+  <p:cSld>
+    <p:spTree>
+      <p:nvGrpSpPr>
+        <p:cNvPr id="1" name=""/>
+        <p:cNvGrpSpPr/>
+        <p:nvPr/>
+      </p:nvGrpSpPr>
+      <p:grpSpPr>
+        <a:xfrm>
+          <a:off x="0" y="0"/>
+          <a:ext cx="0" cy="0"/>
+          <a:chOff x="0" y="0"/>
+          <a:chExt cx="0" cy="0"/>
+        </a:xfrm>
+      </p:grpSpPr>
+      <p:sp>
+        <p:nvSpPr>
+          <p:cNvPr id="2" name="Title 1"/>
+          <p:cNvSpPr>
+            <a:spLocks noGrp="1"/>
+          </p:cNvSpPr>
+          <p:nvPr>
+            <p:ph type="title"/>
+          </p:nvPr>
+        </p:nvSpPr>
+        <p:spPr>
+          <a:xfrm>
+            <a:off x="0" y="0"/>
+            <a:ext cx="9144000" cy="582780"/>
+          </a:xfrm>
+        </p:spPr>
+        <p:txBody>
+          <a:bodyPr/>
+          <a:lstStyle/>
+          <a:p>
+            <a:pPr lvl="0" indent="0" marL="0">
+              <a:buNone/>
+            </a:pPr>
+            <a:r>
+              <a:rPr>
+                <a:latin typeface="Courier"/>
+              </a:rPr>
+              <a:t>scale_color_manual()</a:t>
+            </a:r>
+            <a:r>
+              <a:rPr/>
+              <a:t> — Choosing Your Own Colors</a:t>
+            </a:r>
+          </a:p>
+        </p:txBody>
+      </p:sp>
+      <p:sp>
+        <p:nvSpPr>
+          <p:cNvPr id="3" name="Content Placeholder 2"/>
+          <p:cNvSpPr>
+            <a:spLocks noGrp="1"/>
+          </p:cNvSpPr>
+          <p:nvPr>
+            <p:ph idx="1"/>
+          </p:nvPr>
+        </p:nvSpPr>
+        <p:spPr/>
+        <p:txBody>
+          <a:bodyPr/>
+          <a:lstStyle/>
+          <a:p>
+            <a:pPr lvl="0" indent="0" marL="1270000">
+              <a:buNone/>
+            </a:pPr>
+            <a:r>
+              <a:rPr sz="2000" b="1"/>
+              <a:t>Tip</a:t>
+            </a:r>
+          </a:p>
+          <a:p>
+            <a:pPr lvl="0" indent="0" marL="1270000">
+              <a:buNone/>
+            </a:pPr>
+            <a:r>
+              <a:rPr sz="2000" b="1"/>
+              <a:t>🚀 Advanced / extra work</a:t>
+            </a:r>
+            <a:r>
+              <a:rPr sz="2000"/>
+              <a:t> — </a:t>
+            </a:r>
+            <a:r>
+              <a:rPr sz="2000">
+                <a:latin typeface="Courier"/>
+              </a:rPr>
+              <a:t>ggplot</a:t>
+            </a:r>
+            <a:r>
+              <a:rPr sz="2000"/>
+              <a:t>’s default colors are fine for exploring data, but a real figure often needs specific colors (journal style, colorblind-safe palettes, matching a poster). This is how you take control.</a:t>
+            </a:r>
+          </a:p>
+        </p:txBody>
+      </p:sp>
+    </p:spTree>
+  </p:cSld>
+</p:sld>
+</file>
+
+<file path=ppt/slides/slide32.xml><?xml version="1.0" encoding="utf-8"?>
+<p:sld xmlns:a="http://schemas.openxmlformats.org/drawingml/2006/main" xmlns:r="http://schemas.openxmlformats.org/officeDocument/2006/relationships" xmlns:p="http://schemas.openxmlformats.org/presentationml/2006/main">
+  <p:cSld>
+    <p:spTree>
+      <p:nvGrpSpPr>
+        <p:cNvPr id="1" name=""/>
+        <p:cNvGrpSpPr/>
+        <p:nvPr/>
+      </p:nvGrpSpPr>
+      <p:grpSpPr>
+        <a:xfrm>
+          <a:off x="0" y="0"/>
+          <a:ext cx="0" cy="0"/>
+          <a:chOff x="0" y="0"/>
+          <a:chExt cx="0" cy="0"/>
+        </a:xfrm>
+      </p:grpSpPr>
+      <p:sp>
+        <p:nvSpPr>
           <p:cNvPr id="3" name="Text Placeholder 2"/>
           <p:cNvSpPr>
             <a:spLocks noGrp="1"/>
@@ -12548,7 +13773,7 @@
                 </a:solidFill>
                 <a:latin typeface="Courier"/>
               </a:rPr>
-              <a:t> n_s, </a:t>
+              <a:t> side, </a:t>
             </a:r>
             <a:r>
               <a:rPr>
@@ -12566,7 +13791,7 @@
                 </a:solidFill>
                 <a:latin typeface="Courier"/>
               </a:rPr>
-              <a:t> length_mm, </a:t>
+              <a:t> needle_length_mm, </a:t>
             </a:r>
             <a:r>
               <a:rPr>
@@ -12584,7 +13809,7 @@
                 </a:solidFill>
                 <a:latin typeface="Courier"/>
               </a:rPr>
-              <a:t> n_s)) </a:t>
+              <a:t> side)) </a:t>
             </a:r>
             <a:r>
               <a:rPr>
@@ -12703,6 +13928,144 @@
                 </a:solidFill>
                 <a:latin typeface="Courier"/>
               </a:rPr>
+              <a:t>),</a:t>
+            </a:r>
+            <a:br/>
+            <a:r>
+              <a:rPr>
+                <a:solidFill>
+                  <a:srgbClr val="003B4F"/>
+                </a:solidFill>
+                <a:latin typeface="Courier"/>
+              </a:rPr>
+              <a:t>    </a:t>
+            </a:r>
+            <a:r>
+              <a:rPr>
+                <a:solidFill>
+                  <a:srgbClr val="657422"/>
+                </a:solidFill>
+                <a:latin typeface="Courier"/>
+              </a:rPr>
+              <a:t>size =</a:t>
+            </a:r>
+            <a:r>
+              <a:rPr>
+                <a:solidFill>
+                  <a:srgbClr val="003B4F"/>
+                </a:solidFill>
+                <a:latin typeface="Courier"/>
+              </a:rPr>
+              <a:t> </a:t>
+            </a:r>
+            <a:r>
+              <a:rPr>
+                <a:solidFill>
+                  <a:srgbClr val="AD0000"/>
+                </a:solidFill>
+                <a:latin typeface="Courier"/>
+              </a:rPr>
+              <a:t>2.5</a:t>
+            </a:r>
+            <a:br/>
+            <a:r>
+              <a:rPr>
+                <a:solidFill>
+                  <a:srgbClr val="003B4F"/>
+                </a:solidFill>
+                <a:latin typeface="Courier"/>
+              </a:rPr>
+              <a:t>  ) </a:t>
+            </a:r>
+            <a:r>
+              <a:rPr>
+                <a:solidFill>
+                  <a:srgbClr val="5E5E5E"/>
+                </a:solidFill>
+                <a:latin typeface="Courier"/>
+              </a:rPr>
+              <a:t>+</a:t>
+            </a:r>
+            <a:br/>
+            <a:r>
+              <a:rPr>
+                <a:solidFill>
+                  <a:srgbClr val="003B4F"/>
+                </a:solidFill>
+                <a:latin typeface="Courier"/>
+              </a:rPr>
+              <a:t>  </a:t>
+            </a:r>
+            <a:r>
+              <a:rPr>
+                <a:solidFill>
+                  <a:srgbClr val="4758AB"/>
+                </a:solidFill>
+                <a:latin typeface="Courier"/>
+              </a:rPr>
+              <a:t>stat_summary</a:t>
+            </a:r>
+            <a:r>
+              <a:rPr>
+                <a:solidFill>
+                  <a:srgbClr val="003B4F"/>
+                </a:solidFill>
+                <a:latin typeface="Courier"/>
+              </a:rPr>
+              <a:t>(</a:t>
+            </a:r>
+            <a:r>
+              <a:rPr>
+                <a:solidFill>
+                  <a:srgbClr val="657422"/>
+                </a:solidFill>
+                <a:latin typeface="Courier"/>
+              </a:rPr>
+              <a:t>fun =</a:t>
+            </a:r>
+            <a:r>
+              <a:rPr>
+                <a:solidFill>
+                  <a:srgbClr val="003B4F"/>
+                </a:solidFill>
+                <a:latin typeface="Courier"/>
+              </a:rPr>
+              <a:t> mean, </a:t>
+            </a:r>
+            <a:r>
+              <a:rPr>
+                <a:solidFill>
+                  <a:srgbClr val="657422"/>
+                </a:solidFill>
+                <a:latin typeface="Courier"/>
+              </a:rPr>
+              <a:t>geom =</a:t>
+            </a:r>
+            <a:r>
+              <a:rPr>
+                <a:solidFill>
+                  <a:srgbClr val="003B4F"/>
+                </a:solidFill>
+                <a:latin typeface="Courier"/>
+              </a:rPr>
+              <a:t> </a:t>
+            </a:r>
+            <a:r>
+              <a:rPr>
+                <a:solidFill>
+                  <a:srgbClr val="20794D"/>
+                </a:solidFill>
+                <a:latin typeface="Courier"/>
+              </a:rPr>
+              <a:t>"point"</a:t>
+            </a:r>
+            <a:r>
+              <a:rPr>
+                <a:solidFill>
+                  <a:srgbClr val="003B4F"/>
+                </a:solidFill>
+                <a:latin typeface="Courier"/>
+              </a:rPr>
               <a:t>, </a:t>
             </a:r>
             <a:r>
@@ -12712,7 +14075,7 @@
                 </a:solidFill>
                 <a:latin typeface="Courier"/>
               </a:rPr>
-              <a:t>seed =</a:t>
+              <a:t>size =</a:t>
             </a:r>
             <a:r>
               <a:rPr>
@@ -12730,7 +14093,244 @@
                 </a:solidFill>
                 <a:latin typeface="Courier"/>
               </a:rPr>
-              <a:t>42</a:t>
+              <a:t>4</a:t>
+            </a:r>
+            <a:r>
+              <a:rPr>
+                <a:solidFill>
+                  <a:srgbClr val="003B4F"/>
+                </a:solidFill>
+                <a:latin typeface="Courier"/>
+              </a:rPr>
+              <a:t>, </a:t>
+            </a:r>
+            <a:r>
+              <a:rPr>
+                <a:solidFill>
+                  <a:srgbClr val="657422"/>
+                </a:solidFill>
+                <a:latin typeface="Courier"/>
+              </a:rPr>
+              <a:t>color =</a:t>
+            </a:r>
+            <a:r>
+              <a:rPr>
+                <a:solidFill>
+                  <a:srgbClr val="003B4F"/>
+                </a:solidFill>
+                <a:latin typeface="Courier"/>
+              </a:rPr>
+              <a:t> </a:t>
+            </a:r>
+            <a:r>
+              <a:rPr>
+                <a:solidFill>
+                  <a:srgbClr val="20794D"/>
+                </a:solidFill>
+                <a:latin typeface="Courier"/>
+              </a:rPr>
+              <a:t>"black"</a:t>
+            </a:r>
+            <a:r>
+              <a:rPr>
+                <a:solidFill>
+                  <a:srgbClr val="003B4F"/>
+                </a:solidFill>
+                <a:latin typeface="Courier"/>
+              </a:rPr>
+              <a:t>) </a:t>
+            </a:r>
+            <a:r>
+              <a:rPr>
+                <a:solidFill>
+                  <a:srgbClr val="5E5E5E"/>
+                </a:solidFill>
+                <a:latin typeface="Courier"/>
+              </a:rPr>
+              <a:t>+</a:t>
+            </a:r>
+            <a:br/>
+            <a:r>
+              <a:rPr>
+                <a:solidFill>
+                  <a:srgbClr val="003B4F"/>
+                </a:solidFill>
+                <a:latin typeface="Courier"/>
+              </a:rPr>
+              <a:t>  </a:t>
+            </a:r>
+            <a:r>
+              <a:rPr>
+                <a:solidFill>
+                  <a:srgbClr val="4758AB"/>
+                </a:solidFill>
+                <a:latin typeface="Courier"/>
+              </a:rPr>
+              <a:t>scale_color_manual</a:t>
+            </a:r>
+            <a:r>
+              <a:rPr>
+                <a:solidFill>
+                  <a:srgbClr val="003B4F"/>
+                </a:solidFill>
+                <a:latin typeface="Courier"/>
+              </a:rPr>
+              <a:t>(</a:t>
+            </a:r>
+            <a:br/>
+            <a:r>
+              <a:rPr>
+                <a:solidFill>
+                  <a:srgbClr val="003B4F"/>
+                </a:solidFill>
+                <a:latin typeface="Courier"/>
+              </a:rPr>
+              <a:t>    </a:t>
+            </a:r>
+            <a:r>
+              <a:rPr>
+                <a:solidFill>
+                  <a:srgbClr val="657422"/>
+                </a:solidFill>
+                <a:latin typeface="Courier"/>
+              </a:rPr>
+              <a:t>name =</a:t>
+            </a:r>
+            <a:r>
+              <a:rPr>
+                <a:solidFill>
+                  <a:srgbClr val="003B4F"/>
+                </a:solidFill>
+                <a:latin typeface="Courier"/>
+              </a:rPr>
+              <a:t> </a:t>
+            </a:r>
+            <a:r>
+              <a:rPr>
+                <a:solidFill>
+                  <a:srgbClr val="20794D"/>
+                </a:solidFill>
+                <a:latin typeface="Courier"/>
+              </a:rPr>
+              <a:t>"Side of tree"</a:t>
+            </a:r>
+            <a:r>
+              <a:rPr>
+                <a:solidFill>
+                  <a:srgbClr val="003B4F"/>
+                </a:solidFill>
+                <a:latin typeface="Courier"/>
+              </a:rPr>
+              <a:t>,</a:t>
+            </a:r>
+            <a:br/>
+            <a:r>
+              <a:rPr>
+                <a:solidFill>
+                  <a:srgbClr val="003B4F"/>
+                </a:solidFill>
+                <a:latin typeface="Courier"/>
+              </a:rPr>
+              <a:t>    </a:t>
+            </a:r>
+            <a:r>
+              <a:rPr>
+                <a:solidFill>
+                  <a:srgbClr val="657422"/>
+                </a:solidFill>
+                <a:latin typeface="Courier"/>
+              </a:rPr>
+              <a:t>labels =</a:t>
+            </a:r>
+            <a:r>
+              <a:rPr>
+                <a:solidFill>
+                  <a:srgbClr val="003B4F"/>
+                </a:solidFill>
+                <a:latin typeface="Courier"/>
+              </a:rPr>
+              <a:t> </a:t>
+            </a:r>
+            <a:r>
+              <a:rPr>
+                <a:solidFill>
+                  <a:srgbClr val="4758AB"/>
+                </a:solidFill>
+                <a:latin typeface="Courier"/>
+              </a:rPr>
+              <a:t>c</a:t>
+            </a:r>
+            <a:r>
+              <a:rPr>
+                <a:solidFill>
+                  <a:srgbClr val="003B4F"/>
+                </a:solidFill>
+                <a:latin typeface="Courier"/>
+              </a:rPr>
+              <a:t>(</a:t>
+            </a:r>
+            <a:r>
+              <a:rPr>
+                <a:solidFill>
+                  <a:srgbClr val="657422"/>
+                </a:solidFill>
+                <a:latin typeface="Courier"/>
+              </a:rPr>
+              <a:t>shady =</a:t>
+            </a:r>
+            <a:r>
+              <a:rPr>
+                <a:solidFill>
+                  <a:srgbClr val="003B4F"/>
+                </a:solidFill>
+                <a:latin typeface="Courier"/>
+              </a:rPr>
+              <a:t> </a:t>
+            </a:r>
+            <a:r>
+              <a:rPr>
+                <a:solidFill>
+                  <a:srgbClr val="20794D"/>
+                </a:solidFill>
+                <a:latin typeface="Courier"/>
+              </a:rPr>
+              <a:t>"Shady side"</a:t>
+            </a:r>
+            <a:r>
+              <a:rPr>
+                <a:solidFill>
+                  <a:srgbClr val="003B4F"/>
+                </a:solidFill>
+                <a:latin typeface="Courier"/>
+              </a:rPr>
+              <a:t>, </a:t>
+            </a:r>
+            <a:r>
+              <a:rPr>
+                <a:solidFill>
+                  <a:srgbClr val="657422"/>
+                </a:solidFill>
+                <a:latin typeface="Courier"/>
+              </a:rPr>
+              <a:t>sunny =</a:t>
+            </a:r>
+            <a:r>
+              <a:rPr>
+                <a:solidFill>
+                  <a:srgbClr val="003B4F"/>
+                </a:solidFill>
+                <a:latin typeface="Courier"/>
+              </a:rPr>
+              <a:t> </a:t>
+            </a:r>
+            <a:r>
+              <a:rPr>
+                <a:solidFill>
+                  <a:srgbClr val="20794D"/>
+                </a:solidFill>
+                <a:latin typeface="Courier"/>
+              </a:rPr>
+              <a:t>"Sunny side"</a:t>
             </a:r>
             <a:r>
               <a:rPr>
@@ -12758,7 +14358,7 @@
                 </a:solidFill>
                 <a:latin typeface="Courier"/>
               </a:rPr>
-              <a:t>size =</a:t>
+              <a:t>values =</a:t>
             </a:r>
             <a:r>
               <a:rPr>
@@ -12772,49 +14372,11 @@
             <a:r>
               <a:rPr>
                 <a:solidFill>
-                  <a:srgbClr val="AD0000"/>
-                </a:solidFill>
-                <a:latin typeface="Courier"/>
-              </a:rPr>
-              <a:t>2.5</a:t>
-            </a:r>
-            <a:br/>
-            <a:r>
-              <a:rPr>
-                <a:solidFill>
-                  <a:srgbClr val="003B4F"/>
-                </a:solidFill>
-                <a:latin typeface="Courier"/>
-              </a:rPr>
-              <a:t>  ) </a:t>
-            </a:r>
-            <a:r>
-              <a:rPr>
-                <a:solidFill>
-                  <a:srgbClr val="5E5E5E"/>
-                </a:solidFill>
-                <a:latin typeface="Courier"/>
-              </a:rPr>
-              <a:t>+</a:t>
-            </a:r>
-            <a:br/>
-            <a:r>
-              <a:rPr>
-                <a:solidFill>
-                  <a:srgbClr val="003B4F"/>
-                </a:solidFill>
-                <a:latin typeface="Courier"/>
-              </a:rPr>
-              <a:t>  </a:t>
-            </a:r>
-            <a:r>
-              <a:rPr>
-                <a:solidFill>
                   <a:srgbClr val="4758AB"/>
                 </a:solidFill>
                 <a:latin typeface="Courier"/>
               </a:rPr>
-              <a:t>stat_summary</a:t>
+              <a:t>c</a:t>
             </a:r>
             <a:r>
               <a:rPr>
@@ -12832,16 +14394,34 @@
                 </a:solidFill>
                 <a:latin typeface="Courier"/>
               </a:rPr>
-              <a:t>fun =</a:t>
-            </a:r>
-            <a:r>
-              <a:rPr>
-                <a:solidFill>
-                  <a:srgbClr val="003B4F"/>
-                </a:solidFill>
-                <a:latin typeface="Courier"/>
-              </a:rPr>
-              <a:t> mean, </a:t>
+              <a:t>shady =</a:t>
+            </a:r>
+            <a:r>
+              <a:rPr>
+                <a:solidFill>
+                  <a:srgbClr val="003B4F"/>
+                </a:solidFill>
+                <a:latin typeface="Courier"/>
+              </a:rPr>
+              <a:t> </a:t>
+            </a:r>
+            <a:r>
+              <a:rPr>
+                <a:solidFill>
+                  <a:srgbClr val="20794D"/>
+                </a:solidFill>
+                <a:latin typeface="Courier"/>
+              </a:rPr>
+              <a:t>"#2c7fb8"</a:t>
+            </a:r>
+            <a:r>
+              <a:rPr>
+                <a:solidFill>
+                  <a:srgbClr val="003B4F"/>
+                </a:solidFill>
+                <a:latin typeface="Courier"/>
+              </a:rPr>
+              <a:t>, </a:t>
             </a:r>
             <a:r>
               <a:rPr>
@@ -12850,398 +14430,7 @@
                 </a:solidFill>
                 <a:latin typeface="Courier"/>
               </a:rPr>
-              <a:t>geom =</a:t>
-            </a:r>
-            <a:r>
-              <a:rPr>
-                <a:solidFill>
-                  <a:srgbClr val="003B4F"/>
-                </a:solidFill>
-                <a:latin typeface="Courier"/>
-              </a:rPr>
-              <a:t> </a:t>
-            </a:r>
-            <a:r>
-              <a:rPr>
-                <a:solidFill>
-                  <a:srgbClr val="20794D"/>
-                </a:solidFill>
-                <a:latin typeface="Courier"/>
-              </a:rPr>
-              <a:t>"point"</a:t>
-            </a:r>
-            <a:r>
-              <a:rPr>
-                <a:solidFill>
-                  <a:srgbClr val="003B4F"/>
-                </a:solidFill>
-                <a:latin typeface="Courier"/>
-              </a:rPr>
-              <a:t>, </a:t>
-            </a:r>
-            <a:r>
-              <a:rPr>
-                <a:solidFill>
-                  <a:srgbClr val="657422"/>
-                </a:solidFill>
-                <a:latin typeface="Courier"/>
-              </a:rPr>
-              <a:t>size =</a:t>
-            </a:r>
-            <a:r>
-              <a:rPr>
-                <a:solidFill>
-                  <a:srgbClr val="003B4F"/>
-                </a:solidFill>
-                <a:latin typeface="Courier"/>
-              </a:rPr>
-              <a:t> </a:t>
-            </a:r>
-            <a:r>
-              <a:rPr>
-                <a:solidFill>
-                  <a:srgbClr val="AD0000"/>
-                </a:solidFill>
-                <a:latin typeface="Courier"/>
-              </a:rPr>
-              <a:t>4</a:t>
-            </a:r>
-            <a:r>
-              <a:rPr>
-                <a:solidFill>
-                  <a:srgbClr val="003B4F"/>
-                </a:solidFill>
-                <a:latin typeface="Courier"/>
-              </a:rPr>
-              <a:t>, </a:t>
-            </a:r>
-            <a:r>
-              <a:rPr>
-                <a:solidFill>
-                  <a:srgbClr val="657422"/>
-                </a:solidFill>
-                <a:latin typeface="Courier"/>
-              </a:rPr>
-              <a:t>color =</a:t>
-            </a:r>
-            <a:r>
-              <a:rPr>
-                <a:solidFill>
-                  <a:srgbClr val="003B4F"/>
-                </a:solidFill>
-                <a:latin typeface="Courier"/>
-              </a:rPr>
-              <a:t> </a:t>
-            </a:r>
-            <a:r>
-              <a:rPr>
-                <a:solidFill>
-                  <a:srgbClr val="20794D"/>
-                </a:solidFill>
-                <a:latin typeface="Courier"/>
-              </a:rPr>
-              <a:t>"black"</a:t>
-            </a:r>
-            <a:r>
-              <a:rPr>
-                <a:solidFill>
-                  <a:srgbClr val="003B4F"/>
-                </a:solidFill>
-                <a:latin typeface="Courier"/>
-              </a:rPr>
-              <a:t>) </a:t>
-            </a:r>
-            <a:r>
-              <a:rPr>
-                <a:solidFill>
-                  <a:srgbClr val="5E5E5E"/>
-                </a:solidFill>
-                <a:latin typeface="Courier"/>
-              </a:rPr>
-              <a:t>+</a:t>
-            </a:r>
-            <a:br/>
-            <a:r>
-              <a:rPr>
-                <a:solidFill>
-                  <a:srgbClr val="003B4F"/>
-                </a:solidFill>
-                <a:latin typeface="Courier"/>
-              </a:rPr>
-              <a:t>  </a:t>
-            </a:r>
-            <a:r>
-              <a:rPr>
-                <a:solidFill>
-                  <a:srgbClr val="4758AB"/>
-                </a:solidFill>
-                <a:latin typeface="Courier"/>
-              </a:rPr>
-              <a:t>scale_color_manual</a:t>
-            </a:r>
-            <a:r>
-              <a:rPr>
-                <a:solidFill>
-                  <a:srgbClr val="003B4F"/>
-                </a:solidFill>
-                <a:latin typeface="Courier"/>
-              </a:rPr>
-              <a:t>(</a:t>
-            </a:r>
-            <a:br/>
-            <a:r>
-              <a:rPr>
-                <a:solidFill>
-                  <a:srgbClr val="003B4F"/>
-                </a:solidFill>
-                <a:latin typeface="Courier"/>
-              </a:rPr>
-              <a:t>    </a:t>
-            </a:r>
-            <a:r>
-              <a:rPr>
-                <a:solidFill>
-                  <a:srgbClr val="657422"/>
-                </a:solidFill>
-                <a:latin typeface="Courier"/>
-              </a:rPr>
-              <a:t>name =</a:t>
-            </a:r>
-            <a:r>
-              <a:rPr>
-                <a:solidFill>
-                  <a:srgbClr val="003B4F"/>
-                </a:solidFill>
-                <a:latin typeface="Courier"/>
-              </a:rPr>
-              <a:t> </a:t>
-            </a:r>
-            <a:r>
-              <a:rPr>
-                <a:solidFill>
-                  <a:srgbClr val="20794D"/>
-                </a:solidFill>
-                <a:latin typeface="Courier"/>
-              </a:rPr>
-              <a:t>"Side of tree"</a:t>
-            </a:r>
-            <a:r>
-              <a:rPr>
-                <a:solidFill>
-                  <a:srgbClr val="003B4F"/>
-                </a:solidFill>
-                <a:latin typeface="Courier"/>
-              </a:rPr>
-              <a:t>,</a:t>
-            </a:r>
-            <a:br/>
-            <a:r>
-              <a:rPr>
-                <a:solidFill>
-                  <a:srgbClr val="003B4F"/>
-                </a:solidFill>
-                <a:latin typeface="Courier"/>
-              </a:rPr>
-              <a:t>    </a:t>
-            </a:r>
-            <a:r>
-              <a:rPr>
-                <a:solidFill>
-                  <a:srgbClr val="657422"/>
-                </a:solidFill>
-                <a:latin typeface="Courier"/>
-              </a:rPr>
-              <a:t>labels =</a:t>
-            </a:r>
-            <a:r>
-              <a:rPr>
-                <a:solidFill>
-                  <a:srgbClr val="003B4F"/>
-                </a:solidFill>
-                <a:latin typeface="Courier"/>
-              </a:rPr>
-              <a:t> </a:t>
-            </a:r>
-            <a:r>
-              <a:rPr>
-                <a:solidFill>
-                  <a:srgbClr val="4758AB"/>
-                </a:solidFill>
-                <a:latin typeface="Courier"/>
-              </a:rPr>
-              <a:t>c</a:t>
-            </a:r>
-            <a:r>
-              <a:rPr>
-                <a:solidFill>
-                  <a:srgbClr val="003B4F"/>
-                </a:solidFill>
-                <a:latin typeface="Courier"/>
-              </a:rPr>
-              <a:t>(</a:t>
-            </a:r>
-            <a:r>
-              <a:rPr>
-                <a:solidFill>
-                  <a:srgbClr val="657422"/>
-                </a:solidFill>
-                <a:latin typeface="Courier"/>
-              </a:rPr>
-              <a:t>n =</a:t>
-            </a:r>
-            <a:r>
-              <a:rPr>
-                <a:solidFill>
-                  <a:srgbClr val="003B4F"/>
-                </a:solidFill>
-                <a:latin typeface="Courier"/>
-              </a:rPr>
-              <a:t> </a:t>
-            </a:r>
-            <a:r>
-              <a:rPr>
-                <a:solidFill>
-                  <a:srgbClr val="20794D"/>
-                </a:solidFill>
-                <a:latin typeface="Courier"/>
-              </a:rPr>
-              <a:t>"Shady (sheltered)"</a:t>
-            </a:r>
-            <a:r>
-              <a:rPr>
-                <a:solidFill>
-                  <a:srgbClr val="003B4F"/>
-                </a:solidFill>
-                <a:latin typeface="Courier"/>
-              </a:rPr>
-              <a:t>, </a:t>
-            </a:r>
-            <a:r>
-              <a:rPr>
-                <a:solidFill>
-                  <a:srgbClr val="657422"/>
-                </a:solidFill>
-                <a:latin typeface="Courier"/>
-              </a:rPr>
-              <a:t>s =</a:t>
-            </a:r>
-            <a:r>
-              <a:rPr>
-                <a:solidFill>
-                  <a:srgbClr val="003B4F"/>
-                </a:solidFill>
-                <a:latin typeface="Courier"/>
-              </a:rPr>
-              <a:t> </a:t>
-            </a:r>
-            <a:r>
-              <a:rPr>
-                <a:solidFill>
-                  <a:srgbClr val="20794D"/>
-                </a:solidFill>
-                <a:latin typeface="Courier"/>
-              </a:rPr>
-              <a:t>"Sunny"</a:t>
-            </a:r>
-            <a:r>
-              <a:rPr>
-                <a:solidFill>
-                  <a:srgbClr val="003B4F"/>
-                </a:solidFill>
-                <a:latin typeface="Courier"/>
-              </a:rPr>
-              <a:t>),</a:t>
-            </a:r>
-            <a:br/>
-            <a:r>
-              <a:rPr>
-                <a:solidFill>
-                  <a:srgbClr val="003B4F"/>
-                </a:solidFill>
-                <a:latin typeface="Courier"/>
-              </a:rPr>
-              <a:t>    </a:t>
-            </a:r>
-            <a:r>
-              <a:rPr>
-                <a:solidFill>
-                  <a:srgbClr val="657422"/>
-                </a:solidFill>
-                <a:latin typeface="Courier"/>
-              </a:rPr>
-              <a:t>values =</a:t>
-            </a:r>
-            <a:r>
-              <a:rPr>
-                <a:solidFill>
-                  <a:srgbClr val="003B4F"/>
-                </a:solidFill>
-                <a:latin typeface="Courier"/>
-              </a:rPr>
-              <a:t> </a:t>
-            </a:r>
-            <a:r>
-              <a:rPr>
-                <a:solidFill>
-                  <a:srgbClr val="4758AB"/>
-                </a:solidFill>
-                <a:latin typeface="Courier"/>
-              </a:rPr>
-              <a:t>c</a:t>
-            </a:r>
-            <a:r>
-              <a:rPr>
-                <a:solidFill>
-                  <a:srgbClr val="003B4F"/>
-                </a:solidFill>
-                <a:latin typeface="Courier"/>
-              </a:rPr>
-              <a:t>(</a:t>
-            </a:r>
-            <a:r>
-              <a:rPr>
-                <a:solidFill>
-                  <a:srgbClr val="657422"/>
-                </a:solidFill>
-                <a:latin typeface="Courier"/>
-              </a:rPr>
-              <a:t>n =</a:t>
-            </a:r>
-            <a:r>
-              <a:rPr>
-                <a:solidFill>
-                  <a:srgbClr val="003B4F"/>
-                </a:solidFill>
-                <a:latin typeface="Courier"/>
-              </a:rPr>
-              <a:t> </a:t>
-            </a:r>
-            <a:r>
-              <a:rPr>
-                <a:solidFill>
-                  <a:srgbClr val="20794D"/>
-                </a:solidFill>
-                <a:latin typeface="Courier"/>
-              </a:rPr>
-              <a:t>"#2c7fb8"</a:t>
-            </a:r>
-            <a:r>
-              <a:rPr>
-                <a:solidFill>
-                  <a:srgbClr val="003B4F"/>
-                </a:solidFill>
-                <a:latin typeface="Courier"/>
-              </a:rPr>
-              <a:t>, </a:t>
-            </a:r>
-            <a:r>
-              <a:rPr>
-                <a:solidFill>
-                  <a:srgbClr val="657422"/>
-                </a:solidFill>
-                <a:latin typeface="Courier"/>
-              </a:rPr>
-              <a:t>s =</a:t>
+              <a:t>sunny =</a:t>
             </a:r>
             <a:r>
               <a:rPr>
@@ -13467,7 +14656,7 @@
       </p:sp>
       <p:pic>
         <p:nvPicPr>
-          <p:cNvPr descr="graphing_effectively_lecture_files/figure-pptx/unnamed-chunk-17-1.png" id="0" name="Picture 1"/>
+          <p:cNvPr descr="graphing_effectively_lecture_files/figure-pptx/graphing-effectively-18-1.png" id="0" name="Picture 1"/>
           <p:cNvPicPr>
             <a:picLocks noGrp="1" noChangeAspect="1"/>
           </p:cNvPicPr>
@@ -13760,7 +14949,7 @@
               <a:rPr sz="2000">
                 <a:latin typeface="Courier"/>
               </a:rPr>
-              <a:t>n</a:t>
+              <a:t>shady</a:t>
             </a:r>
             <a:r>
               <a:rPr sz="2000"/>
@@ -13770,7 +14959,7 @@
               <a:rPr sz="2000">
                 <a:latin typeface="Courier"/>
               </a:rPr>
-              <a:t>s</a:t>
+              <a:t>sunny</a:t>
             </a:r>
             <a:r>
               <a:rPr sz="2000"/>
@@ -13787,1331 +14976,6 @@
               <a:t> looks up each raw value and substitutes the label/color you gave it.</a:t>
             </a:r>
           </a:p>
-        </p:txBody>
-      </p:sp>
-    </p:spTree>
-  </p:cSld>
-</p:sld>
-</file>
-
-<file path=ppt/slides/slide31.xml><?xml version="1.0" encoding="utf-8"?>
-<p:sld xmlns:a="http://schemas.openxmlformats.org/drawingml/2006/main" xmlns:r="http://schemas.openxmlformats.org/officeDocument/2006/relationships" xmlns:p="http://schemas.openxmlformats.org/presentationml/2006/main">
-  <p:cSld>
-    <p:spTree>
-      <p:nvGrpSpPr>
-        <p:cNvPr id="1" name=""/>
-        <p:cNvGrpSpPr/>
-        <p:nvPr/>
-      </p:nvGrpSpPr>
-      <p:grpSpPr>
-        <a:xfrm>
-          <a:off x="0" y="0"/>
-          <a:ext cx="0" cy="0"/>
-          <a:chOff x="0" y="0"/>
-          <a:chExt cx="0" cy="0"/>
-        </a:xfrm>
-      </p:grpSpPr>
-      <p:sp>
-        <p:nvSpPr>
-          <p:cNvPr id="2" name="Title 1"/>
-          <p:cNvSpPr>
-            <a:spLocks noGrp="1"/>
-          </p:cNvSpPr>
-          <p:nvPr>
-            <p:ph type="title"/>
-          </p:nvPr>
-        </p:nvSpPr>
-        <p:spPr>
-          <a:xfrm>
-            <a:off x="0" y="0"/>
-            <a:ext cx="9144000" cy="602780"/>
-          </a:xfrm>
-          <a:solidFill>
-            <a:srgbClr val="70121D"/>
-          </a:solidFill>
-        </p:spPr>
-        <p:txBody>
-          <a:bodyPr/>
-          <a:lstStyle/>
-          <a:p>
-            <a:pPr lvl="0" indent="0" marL="0">
-              <a:buNone/>
-            </a:pPr>
-            <a:r>
-              <a:rPr>
-                <a:latin typeface="Courier"/>
-              </a:rPr>
-              <a:t>scale_color_manual()</a:t>
-            </a:r>
-            <a:r>
-              <a:rPr/>
-              <a:t> — Getting the Names Wrong</a:t>
-            </a:r>
-          </a:p>
-        </p:txBody>
-      </p:sp>
-      <p:sp>
-        <p:nvSpPr>
-          <p:cNvPr id="3" name="Content Placeholder 2"/>
-          <p:cNvSpPr>
-            <a:spLocks noGrp="1"/>
-          </p:cNvSpPr>
-          <p:nvPr>
-            <p:ph idx="1" sz="half"/>
-          </p:nvPr>
-        </p:nvSpPr>
-        <p:spPr/>
-        <p:txBody>
-          <a:bodyPr/>
-          <a:lstStyle/>
-          <a:p>
-            <a:pPr lvl="0" indent="0">
-              <a:buNone/>
-            </a:pPr>
-            <a:r>
-              <a:rPr>
-                <a:solidFill>
-                  <a:srgbClr val="5E5E5E"/>
-                </a:solidFill>
-                <a:latin typeface="Courier"/>
-              </a:rPr>
-              <a:t># Typo: "sun" instead of the real value "s"</a:t>
-            </a:r>
-            <a:br/>
-            <a:r>
-              <a:rPr>
-                <a:solidFill>
-                  <a:srgbClr val="4758AB"/>
-                </a:solidFill>
-                <a:latin typeface="Courier"/>
-              </a:rPr>
-              <a:t>ggplot</a:t>
-            </a:r>
-            <a:r>
-              <a:rPr>
-                <a:solidFill>
-                  <a:srgbClr val="003B4F"/>
-                </a:solidFill>
-                <a:latin typeface="Courier"/>
-              </a:rPr>
-              <a:t>(pine_df, </a:t>
-            </a:r>
-            <a:r>
-              <a:rPr>
-                <a:solidFill>
-                  <a:srgbClr val="4758AB"/>
-                </a:solidFill>
-                <a:latin typeface="Courier"/>
-              </a:rPr>
-              <a:t>aes</a:t>
-            </a:r>
-            <a:r>
-              <a:rPr>
-                <a:solidFill>
-                  <a:srgbClr val="003B4F"/>
-                </a:solidFill>
-                <a:latin typeface="Courier"/>
-              </a:rPr>
-              <a:t>(</a:t>
-            </a:r>
-            <a:r>
-              <a:rPr>
-                <a:solidFill>
-                  <a:srgbClr val="657422"/>
-                </a:solidFill>
-                <a:latin typeface="Courier"/>
-              </a:rPr>
-              <a:t>x =</a:t>
-            </a:r>
-            <a:r>
-              <a:rPr>
-                <a:solidFill>
-                  <a:srgbClr val="003B4F"/>
-                </a:solidFill>
-                <a:latin typeface="Courier"/>
-              </a:rPr>
-              <a:t> n_s, </a:t>
-            </a:r>
-            <a:r>
-              <a:rPr>
-                <a:solidFill>
-                  <a:srgbClr val="657422"/>
-                </a:solidFill>
-                <a:latin typeface="Courier"/>
-              </a:rPr>
-              <a:t>y =</a:t>
-            </a:r>
-            <a:r>
-              <a:rPr>
-                <a:solidFill>
-                  <a:srgbClr val="003B4F"/>
-                </a:solidFill>
-                <a:latin typeface="Courier"/>
-              </a:rPr>
-              <a:t> length_mm, </a:t>
-            </a:r>
-            <a:r>
-              <a:rPr>
-                <a:solidFill>
-                  <a:srgbClr val="657422"/>
-                </a:solidFill>
-                <a:latin typeface="Courier"/>
-              </a:rPr>
-              <a:t>color =</a:t>
-            </a:r>
-            <a:r>
-              <a:rPr>
-                <a:solidFill>
-                  <a:srgbClr val="003B4F"/>
-                </a:solidFill>
-                <a:latin typeface="Courier"/>
-              </a:rPr>
-              <a:t> n_s)) </a:t>
-            </a:r>
-            <a:r>
-              <a:rPr>
-                <a:solidFill>
-                  <a:srgbClr val="5E5E5E"/>
-                </a:solidFill>
-                <a:latin typeface="Courier"/>
-              </a:rPr>
-              <a:t>+</a:t>
-            </a:r>
-            <a:br/>
-            <a:r>
-              <a:rPr>
-                <a:solidFill>
-                  <a:srgbClr val="003B4F"/>
-                </a:solidFill>
-                <a:latin typeface="Courier"/>
-              </a:rPr>
-              <a:t>  </a:t>
-            </a:r>
-            <a:r>
-              <a:rPr>
-                <a:solidFill>
-                  <a:srgbClr val="4758AB"/>
-                </a:solidFill>
-                <a:latin typeface="Courier"/>
-              </a:rPr>
-              <a:t>geom_point</a:t>
-            </a:r>
-            <a:r>
-              <a:rPr>
-                <a:solidFill>
-                  <a:srgbClr val="003B4F"/>
-                </a:solidFill>
-                <a:latin typeface="Courier"/>
-              </a:rPr>
-              <a:t>() </a:t>
-            </a:r>
-            <a:r>
-              <a:rPr>
-                <a:solidFill>
-                  <a:srgbClr val="5E5E5E"/>
-                </a:solidFill>
-                <a:latin typeface="Courier"/>
-              </a:rPr>
-              <a:t>+</a:t>
-            </a:r>
-            <a:br/>
-            <a:r>
-              <a:rPr>
-                <a:solidFill>
-                  <a:srgbClr val="003B4F"/>
-                </a:solidFill>
-                <a:latin typeface="Courier"/>
-              </a:rPr>
-              <a:t>  </a:t>
-            </a:r>
-            <a:r>
-              <a:rPr>
-                <a:solidFill>
-                  <a:srgbClr val="4758AB"/>
-                </a:solidFill>
-                <a:latin typeface="Courier"/>
-              </a:rPr>
-              <a:t>scale_color_manual</a:t>
-            </a:r>
-            <a:r>
-              <a:rPr>
-                <a:solidFill>
-                  <a:srgbClr val="003B4F"/>
-                </a:solidFill>
-                <a:latin typeface="Courier"/>
-              </a:rPr>
-              <a:t>(</a:t>
-            </a:r>
-            <a:br/>
-            <a:r>
-              <a:rPr>
-                <a:solidFill>
-                  <a:srgbClr val="003B4F"/>
-                </a:solidFill>
-                <a:latin typeface="Courier"/>
-              </a:rPr>
-              <a:t>    </a:t>
-            </a:r>
-            <a:r>
-              <a:rPr>
-                <a:solidFill>
-                  <a:srgbClr val="657422"/>
-                </a:solidFill>
-                <a:latin typeface="Courier"/>
-              </a:rPr>
-              <a:t>values =</a:t>
-            </a:r>
-            <a:r>
-              <a:rPr>
-                <a:solidFill>
-                  <a:srgbClr val="003B4F"/>
-                </a:solidFill>
-                <a:latin typeface="Courier"/>
-              </a:rPr>
-              <a:t> </a:t>
-            </a:r>
-            <a:r>
-              <a:rPr>
-                <a:solidFill>
-                  <a:srgbClr val="4758AB"/>
-                </a:solidFill>
-                <a:latin typeface="Courier"/>
-              </a:rPr>
-              <a:t>c</a:t>
-            </a:r>
-            <a:r>
-              <a:rPr>
-                <a:solidFill>
-                  <a:srgbClr val="003B4F"/>
-                </a:solidFill>
-                <a:latin typeface="Courier"/>
-              </a:rPr>
-              <a:t>(</a:t>
-            </a:r>
-            <a:r>
-              <a:rPr>
-                <a:solidFill>
-                  <a:srgbClr val="657422"/>
-                </a:solidFill>
-                <a:latin typeface="Courier"/>
-              </a:rPr>
-              <a:t>n =</a:t>
-            </a:r>
-            <a:r>
-              <a:rPr>
-                <a:solidFill>
-                  <a:srgbClr val="003B4F"/>
-                </a:solidFill>
-                <a:latin typeface="Courier"/>
-              </a:rPr>
-              <a:t> </a:t>
-            </a:r>
-            <a:r>
-              <a:rPr>
-                <a:solidFill>
-                  <a:srgbClr val="20794D"/>
-                </a:solidFill>
-                <a:latin typeface="Courier"/>
-              </a:rPr>
-              <a:t>"#2c7fb8"</a:t>
-            </a:r>
-            <a:r>
-              <a:rPr>
-                <a:solidFill>
-                  <a:srgbClr val="003B4F"/>
-                </a:solidFill>
-                <a:latin typeface="Courier"/>
-              </a:rPr>
-              <a:t>, </a:t>
-            </a:r>
-            <a:r>
-              <a:rPr>
-                <a:solidFill>
-                  <a:srgbClr val="657422"/>
-                </a:solidFill>
-                <a:latin typeface="Courier"/>
-              </a:rPr>
-              <a:t>sun =</a:t>
-            </a:r>
-            <a:r>
-              <a:rPr>
-                <a:solidFill>
-                  <a:srgbClr val="003B4F"/>
-                </a:solidFill>
-                <a:latin typeface="Courier"/>
-              </a:rPr>
-              <a:t> </a:t>
-            </a:r>
-            <a:r>
-              <a:rPr>
-                <a:solidFill>
-                  <a:srgbClr val="20794D"/>
-                </a:solidFill>
-                <a:latin typeface="Courier"/>
-              </a:rPr>
-              <a:t>"#d95f0e"</a:t>
-            </a:r>
-            <a:r>
-              <a:rPr>
-                <a:solidFill>
-                  <a:srgbClr val="003B4F"/>
-                </a:solidFill>
-                <a:latin typeface="Courier"/>
-              </a:rPr>
-              <a:t>)</a:t>
-            </a:r>
-            <a:br/>
-            <a:r>
-              <a:rPr>
-                <a:solidFill>
-                  <a:srgbClr val="003B4F"/>
-                </a:solidFill>
-                <a:latin typeface="Courier"/>
-              </a:rPr>
-              <a:t>  )</a:t>
-            </a:r>
-          </a:p>
-        </p:txBody>
-      </p:sp>
-      <p:sp>
-        <p:nvSpPr>
-          <p:cNvPr id="4" name="Content Placeholder 3"/>
-          <p:cNvSpPr>
-            <a:spLocks noGrp="1"/>
-          </p:cNvSpPr>
-          <p:nvPr>
-            <p:ph idx="2" sz="half"/>
-          </p:nvPr>
-        </p:nvSpPr>
-        <p:spPr/>
-        <p:txBody>
-          <a:bodyPr/>
-          <a:lstStyle/>
-          <a:p>
-            <a:pPr lvl="0" indent="0" marL="1270000">
-              <a:buNone/>
-            </a:pPr>
-            <a:r>
-              <a:rPr sz="2000" b="1"/>
-              <a:t>Warning</a:t>
-            </a:r>
-          </a:p>
-          <a:p>
-            <a:pPr lvl="0" indent="0" marL="1270000">
-              <a:buNone/>
-            </a:pPr>
-            <a:r>
-              <a:rPr sz="2000" b="1"/>
-              <a:t>⚠️ Watch out!</a:t>
-            </a:r>
-          </a:p>
-          <a:p>
-            <a:pPr lvl="0"/>
-            <a:r>
-              <a:rPr sz="2000"/>
-              <a:t>Every level that appears in your data </a:t>
-            </a:r>
-            <a:r>
-              <a:rPr sz="2000" b="1"/>
-              <a:t>must</a:t>
-            </a:r>
-            <a:r>
-              <a:rPr sz="2000"/>
-              <a:t> get an entry in </a:t>
-            </a:r>
-            <a:r>
-              <a:rPr sz="2000">
-                <a:latin typeface="Courier"/>
-              </a:rPr>
-              <a:t>values</a:t>
-            </a:r>
-          </a:p>
-          <a:p>
-            <a:pPr lvl="0"/>
-            <a:r>
-              <a:rPr sz="2000"/>
-              <a:t>(and in </a:t>
-            </a:r>
-            <a:r>
-              <a:rPr sz="2000">
-                <a:latin typeface="Courier"/>
-              </a:rPr>
-              <a:t>labels</a:t>
-            </a:r>
-            <a:r>
-              <a:rPr sz="2000"/>
-              <a:t>, if you supply it), spelled exactly as it appears in the column</a:t>
-            </a:r>
-          </a:p>
-          <a:p>
-            <a:pPr lvl="0"/>
-            <a:r>
-              <a:rPr sz="2000"/>
-              <a:t>check with </a:t>
-            </a:r>
-            <a:r>
-              <a:rPr sz="2000">
-                <a:latin typeface="Courier"/>
-              </a:rPr>
-              <a:t>unique(pine_df$n_s)</a:t>
-            </a:r>
-            <a:r>
-              <a:rPr sz="2000"/>
-              <a:t> first if you’re not sure</a:t>
-            </a:r>
-          </a:p>
-          <a:p>
-            <a:pPr lvl="0"/>
-            <a:r>
-              <a:rPr sz="2000"/>
-              <a:t>A missing or misspelled level draws as grey with a warning.</a:t>
-            </a:r>
-          </a:p>
-        </p:txBody>
-      </p:sp>
-    </p:spTree>
-  </p:cSld>
-</p:sld>
-</file>
-
-<file path=ppt/slides/slide32.xml><?xml version="1.0" encoding="utf-8"?>
-<p:sld xmlns:a="http://schemas.openxmlformats.org/drawingml/2006/main" xmlns:r="http://schemas.openxmlformats.org/officeDocument/2006/relationships" xmlns:p="http://schemas.openxmlformats.org/presentationml/2006/main">
-  <p:cSld>
-    <p:spTree>
-      <p:nvGrpSpPr>
-        <p:cNvPr id="1" name=""/>
-        <p:cNvGrpSpPr/>
-        <p:nvPr/>
-      </p:nvGrpSpPr>
-      <p:grpSpPr>
-        <a:xfrm>
-          <a:off x="0" y="0"/>
-          <a:ext cx="0" cy="0"/>
-          <a:chOff x="0" y="0"/>
-          <a:chExt cx="0" cy="0"/>
-        </a:xfrm>
-      </p:grpSpPr>
-      <p:sp>
-        <p:nvSpPr>
-          <p:cNvPr id="2" name="Title 1"/>
-          <p:cNvSpPr>
-            <a:spLocks noGrp="1"/>
-          </p:cNvSpPr>
-          <p:nvPr>
-            <p:ph type="title"/>
-          </p:nvPr>
-        </p:nvSpPr>
-        <p:spPr>
-          <a:xfrm>
-            <a:off x="139485" y="78119"/>
-            <a:ext cx="8229600" cy="607682"/>
-          </a:xfrm>
-        </p:spPr>
-        <p:txBody>
-          <a:bodyPr/>
-          <a:lstStyle/>
-          <a:p>
-            <a:pPr lvl="0" indent="0" marL="0">
-              <a:buNone/>
-            </a:pPr>
-            <a:r>
-              <a:rPr>
-                <a:latin typeface="Courier"/>
-              </a:rPr>
-              <a:t>scale_fill_manual()</a:t>
-            </a:r>
-            <a:r>
-              <a:rPr/>
-              <a:t> — the </a:t>
-            </a:r>
-            <a:r>
-              <a:rPr>
-                <a:latin typeface="Courier"/>
-              </a:rPr>
-              <a:t>fill</a:t>
-            </a:r>
-            <a:r>
-              <a:rPr/>
-              <a:t> Twin</a:t>
-            </a:r>
-          </a:p>
-        </p:txBody>
-      </p:sp>
-      <p:sp>
-        <p:nvSpPr>
-          <p:cNvPr id="3" name="Text Placeholder 2"/>
-          <p:cNvSpPr>
-            <a:spLocks noGrp="1"/>
-          </p:cNvSpPr>
-          <p:nvPr>
-            <p:ph idx="1" type="body"/>
-          </p:nvPr>
-        </p:nvSpPr>
-        <p:spPr/>
-        <p:txBody>
-          <a:bodyPr/>
-          <a:lstStyle/>
-          <a:p>
-            <a:pPr lvl="0" indent="0">
-              <a:buNone/>
-            </a:pPr>
-            <a:r>
-              <a:rPr>
-                <a:solidFill>
-                  <a:srgbClr val="4758AB"/>
-                </a:solidFill>
-                <a:latin typeface="Courier"/>
-              </a:rPr>
-              <a:t>ggplot</a:t>
-            </a:r>
-            <a:r>
-              <a:rPr>
-                <a:solidFill>
-                  <a:srgbClr val="003B4F"/>
-                </a:solidFill>
-                <a:latin typeface="Courier"/>
-              </a:rPr>
-              <a:t>(pine_df, </a:t>
-            </a:r>
-            <a:r>
-              <a:rPr>
-                <a:solidFill>
-                  <a:srgbClr val="4758AB"/>
-                </a:solidFill>
-                <a:latin typeface="Courier"/>
-              </a:rPr>
-              <a:t>aes</a:t>
-            </a:r>
-            <a:r>
-              <a:rPr>
-                <a:solidFill>
-                  <a:srgbClr val="003B4F"/>
-                </a:solidFill>
-                <a:latin typeface="Courier"/>
-              </a:rPr>
-              <a:t>(</a:t>
-            </a:r>
-            <a:r>
-              <a:rPr>
-                <a:solidFill>
-                  <a:srgbClr val="657422"/>
-                </a:solidFill>
-                <a:latin typeface="Courier"/>
-              </a:rPr>
-              <a:t>x =</a:t>
-            </a:r>
-            <a:r>
-              <a:rPr>
-                <a:solidFill>
-                  <a:srgbClr val="003B4F"/>
-                </a:solidFill>
-                <a:latin typeface="Courier"/>
-              </a:rPr>
-              <a:t> n_s, </a:t>
-            </a:r>
-            <a:r>
-              <a:rPr>
-                <a:solidFill>
-                  <a:srgbClr val="657422"/>
-                </a:solidFill>
-                <a:latin typeface="Courier"/>
-              </a:rPr>
-              <a:t>y =</a:t>
-            </a:r>
-            <a:r>
-              <a:rPr>
-                <a:solidFill>
-                  <a:srgbClr val="003B4F"/>
-                </a:solidFill>
-                <a:latin typeface="Courier"/>
-              </a:rPr>
-              <a:t> length_mm, </a:t>
-            </a:r>
-            <a:r>
-              <a:rPr>
-                <a:solidFill>
-                  <a:srgbClr val="657422"/>
-                </a:solidFill>
-                <a:latin typeface="Courier"/>
-              </a:rPr>
-              <a:t>fill =</a:t>
-            </a:r>
-            <a:r>
-              <a:rPr>
-                <a:solidFill>
-                  <a:srgbClr val="003B4F"/>
-                </a:solidFill>
-                <a:latin typeface="Courier"/>
-              </a:rPr>
-              <a:t> n_s)) </a:t>
-            </a:r>
-            <a:r>
-              <a:rPr>
-                <a:solidFill>
-                  <a:srgbClr val="5E5E5E"/>
-                </a:solidFill>
-                <a:latin typeface="Courier"/>
-              </a:rPr>
-              <a:t>+</a:t>
-            </a:r>
-            <a:br/>
-            <a:r>
-              <a:rPr>
-                <a:solidFill>
-                  <a:srgbClr val="003B4F"/>
-                </a:solidFill>
-                <a:latin typeface="Courier"/>
-              </a:rPr>
-              <a:t>  </a:t>
-            </a:r>
-            <a:r>
-              <a:rPr>
-                <a:solidFill>
-                  <a:srgbClr val="4758AB"/>
-                </a:solidFill>
-                <a:latin typeface="Courier"/>
-              </a:rPr>
-              <a:t>geom_boxplot</a:t>
-            </a:r>
-            <a:r>
-              <a:rPr>
-                <a:solidFill>
-                  <a:srgbClr val="003B4F"/>
-                </a:solidFill>
-                <a:latin typeface="Courier"/>
-              </a:rPr>
-              <a:t>(</a:t>
-            </a:r>
-            <a:r>
-              <a:rPr>
-                <a:solidFill>
-                  <a:srgbClr val="657422"/>
-                </a:solidFill>
-                <a:latin typeface="Courier"/>
-              </a:rPr>
-              <a:t>alpha =</a:t>
-            </a:r>
-            <a:r>
-              <a:rPr>
-                <a:solidFill>
-                  <a:srgbClr val="003B4F"/>
-                </a:solidFill>
-                <a:latin typeface="Courier"/>
-              </a:rPr>
-              <a:t> </a:t>
-            </a:r>
-            <a:r>
-              <a:rPr>
-                <a:solidFill>
-                  <a:srgbClr val="AD0000"/>
-                </a:solidFill>
-                <a:latin typeface="Courier"/>
-              </a:rPr>
-              <a:t>0.7</a:t>
-            </a:r>
-            <a:r>
-              <a:rPr>
-                <a:solidFill>
-                  <a:srgbClr val="003B4F"/>
-                </a:solidFill>
-                <a:latin typeface="Courier"/>
-              </a:rPr>
-              <a:t>, </a:t>
-            </a:r>
-            <a:r>
-              <a:rPr>
-                <a:solidFill>
-                  <a:srgbClr val="657422"/>
-                </a:solidFill>
-                <a:latin typeface="Courier"/>
-              </a:rPr>
-              <a:t>outlier.shape =</a:t>
-            </a:r>
-            <a:r>
-              <a:rPr>
-                <a:solidFill>
-                  <a:srgbClr val="003B4F"/>
-                </a:solidFill>
-                <a:latin typeface="Courier"/>
-              </a:rPr>
-              <a:t> </a:t>
-            </a:r>
-            <a:r>
-              <a:rPr>
-                <a:solidFill>
-                  <a:srgbClr val="8F5902"/>
-                </a:solidFill>
-                <a:latin typeface="Courier"/>
-              </a:rPr>
-              <a:t>NA</a:t>
-            </a:r>
-            <a:r>
-              <a:rPr>
-                <a:solidFill>
-                  <a:srgbClr val="003B4F"/>
-                </a:solidFill>
-                <a:latin typeface="Courier"/>
-              </a:rPr>
-              <a:t>) </a:t>
-            </a:r>
-            <a:r>
-              <a:rPr>
-                <a:solidFill>
-                  <a:srgbClr val="5E5E5E"/>
-                </a:solidFill>
-                <a:latin typeface="Courier"/>
-              </a:rPr>
-              <a:t>+</a:t>
-            </a:r>
-            <a:br/>
-            <a:r>
-              <a:rPr>
-                <a:solidFill>
-                  <a:srgbClr val="003B4F"/>
-                </a:solidFill>
-                <a:latin typeface="Courier"/>
-              </a:rPr>
-              <a:t>  </a:t>
-            </a:r>
-            <a:r>
-              <a:rPr>
-                <a:solidFill>
-                  <a:srgbClr val="4758AB"/>
-                </a:solidFill>
-                <a:latin typeface="Courier"/>
-              </a:rPr>
-              <a:t>scale_fill_manual</a:t>
-            </a:r>
-            <a:r>
-              <a:rPr>
-                <a:solidFill>
-                  <a:srgbClr val="003B4F"/>
-                </a:solidFill>
-                <a:latin typeface="Courier"/>
-              </a:rPr>
-              <a:t>(</a:t>
-            </a:r>
-            <a:br/>
-            <a:r>
-              <a:rPr>
-                <a:solidFill>
-                  <a:srgbClr val="003B4F"/>
-                </a:solidFill>
-                <a:latin typeface="Courier"/>
-              </a:rPr>
-              <a:t>    </a:t>
-            </a:r>
-            <a:r>
-              <a:rPr>
-                <a:solidFill>
-                  <a:srgbClr val="657422"/>
-                </a:solidFill>
-                <a:latin typeface="Courier"/>
-              </a:rPr>
-              <a:t>name =</a:t>
-            </a:r>
-            <a:r>
-              <a:rPr>
-                <a:solidFill>
-                  <a:srgbClr val="003B4F"/>
-                </a:solidFill>
-                <a:latin typeface="Courier"/>
-              </a:rPr>
-              <a:t> </a:t>
-            </a:r>
-            <a:r>
-              <a:rPr>
-                <a:solidFill>
-                  <a:srgbClr val="20794D"/>
-                </a:solidFill>
-                <a:latin typeface="Courier"/>
-              </a:rPr>
-              <a:t>"Side of tree"</a:t>
-            </a:r>
-            <a:r>
-              <a:rPr>
-                <a:solidFill>
-                  <a:srgbClr val="003B4F"/>
-                </a:solidFill>
-                <a:latin typeface="Courier"/>
-              </a:rPr>
-              <a:t>,</a:t>
-            </a:r>
-            <a:br/>
-            <a:r>
-              <a:rPr>
-                <a:solidFill>
-                  <a:srgbClr val="003B4F"/>
-                </a:solidFill>
-                <a:latin typeface="Courier"/>
-              </a:rPr>
-              <a:t>    </a:t>
-            </a:r>
-            <a:r>
-              <a:rPr>
-                <a:solidFill>
-                  <a:srgbClr val="657422"/>
-                </a:solidFill>
-                <a:latin typeface="Courier"/>
-              </a:rPr>
-              <a:t>labels =</a:t>
-            </a:r>
-            <a:r>
-              <a:rPr>
-                <a:solidFill>
-                  <a:srgbClr val="003B4F"/>
-                </a:solidFill>
-                <a:latin typeface="Courier"/>
-              </a:rPr>
-              <a:t> </a:t>
-            </a:r>
-            <a:r>
-              <a:rPr>
-                <a:solidFill>
-                  <a:srgbClr val="4758AB"/>
-                </a:solidFill>
-                <a:latin typeface="Courier"/>
-              </a:rPr>
-              <a:t>c</a:t>
-            </a:r>
-            <a:r>
-              <a:rPr>
-                <a:solidFill>
-                  <a:srgbClr val="003B4F"/>
-                </a:solidFill>
-                <a:latin typeface="Courier"/>
-              </a:rPr>
-              <a:t>(</a:t>
-            </a:r>
-            <a:r>
-              <a:rPr>
-                <a:solidFill>
-                  <a:srgbClr val="657422"/>
-                </a:solidFill>
-                <a:latin typeface="Courier"/>
-              </a:rPr>
-              <a:t>n =</a:t>
-            </a:r>
-            <a:r>
-              <a:rPr>
-                <a:solidFill>
-                  <a:srgbClr val="003B4F"/>
-                </a:solidFill>
-                <a:latin typeface="Courier"/>
-              </a:rPr>
-              <a:t> </a:t>
-            </a:r>
-            <a:r>
-              <a:rPr>
-                <a:solidFill>
-                  <a:srgbClr val="20794D"/>
-                </a:solidFill>
-                <a:latin typeface="Courier"/>
-              </a:rPr>
-              <a:t>"Shady (sheltered)"</a:t>
-            </a:r>
-            <a:r>
-              <a:rPr>
-                <a:solidFill>
-                  <a:srgbClr val="003B4F"/>
-                </a:solidFill>
-                <a:latin typeface="Courier"/>
-              </a:rPr>
-              <a:t>, </a:t>
-            </a:r>
-            <a:r>
-              <a:rPr>
-                <a:solidFill>
-                  <a:srgbClr val="657422"/>
-                </a:solidFill>
-                <a:latin typeface="Courier"/>
-              </a:rPr>
-              <a:t>s =</a:t>
-            </a:r>
-            <a:r>
-              <a:rPr>
-                <a:solidFill>
-                  <a:srgbClr val="003B4F"/>
-                </a:solidFill>
-                <a:latin typeface="Courier"/>
-              </a:rPr>
-              <a:t> </a:t>
-            </a:r>
-            <a:r>
-              <a:rPr>
-                <a:solidFill>
-                  <a:srgbClr val="20794D"/>
-                </a:solidFill>
-                <a:latin typeface="Courier"/>
-              </a:rPr>
-              <a:t>"Sunny"</a:t>
-            </a:r>
-            <a:r>
-              <a:rPr>
-                <a:solidFill>
-                  <a:srgbClr val="003B4F"/>
-                </a:solidFill>
-                <a:latin typeface="Courier"/>
-              </a:rPr>
-              <a:t>),</a:t>
-            </a:r>
-            <a:br/>
-            <a:r>
-              <a:rPr>
-                <a:solidFill>
-                  <a:srgbClr val="003B4F"/>
-                </a:solidFill>
-                <a:latin typeface="Courier"/>
-              </a:rPr>
-              <a:t>    </a:t>
-            </a:r>
-            <a:r>
-              <a:rPr>
-                <a:solidFill>
-                  <a:srgbClr val="657422"/>
-                </a:solidFill>
-                <a:latin typeface="Courier"/>
-              </a:rPr>
-              <a:t>values =</a:t>
-            </a:r>
-            <a:r>
-              <a:rPr>
-                <a:solidFill>
-                  <a:srgbClr val="003B4F"/>
-                </a:solidFill>
-                <a:latin typeface="Courier"/>
-              </a:rPr>
-              <a:t> </a:t>
-            </a:r>
-            <a:r>
-              <a:rPr>
-                <a:solidFill>
-                  <a:srgbClr val="4758AB"/>
-                </a:solidFill>
-                <a:latin typeface="Courier"/>
-              </a:rPr>
-              <a:t>c</a:t>
-            </a:r>
-            <a:r>
-              <a:rPr>
-                <a:solidFill>
-                  <a:srgbClr val="003B4F"/>
-                </a:solidFill>
-                <a:latin typeface="Courier"/>
-              </a:rPr>
-              <a:t>(</a:t>
-            </a:r>
-            <a:r>
-              <a:rPr>
-                <a:solidFill>
-                  <a:srgbClr val="657422"/>
-                </a:solidFill>
-                <a:latin typeface="Courier"/>
-              </a:rPr>
-              <a:t>n =</a:t>
-            </a:r>
-            <a:r>
-              <a:rPr>
-                <a:solidFill>
-                  <a:srgbClr val="003B4F"/>
-                </a:solidFill>
-                <a:latin typeface="Courier"/>
-              </a:rPr>
-              <a:t> </a:t>
-            </a:r>
-            <a:r>
-              <a:rPr>
-                <a:solidFill>
-                  <a:srgbClr val="20794D"/>
-                </a:solidFill>
-                <a:latin typeface="Courier"/>
-              </a:rPr>
-              <a:t>"#2c7fb8"</a:t>
-            </a:r>
-            <a:r>
-              <a:rPr>
-                <a:solidFill>
-                  <a:srgbClr val="003B4F"/>
-                </a:solidFill>
-                <a:latin typeface="Courier"/>
-              </a:rPr>
-              <a:t>, </a:t>
-            </a:r>
-            <a:r>
-              <a:rPr>
-                <a:solidFill>
-                  <a:srgbClr val="657422"/>
-                </a:solidFill>
-                <a:latin typeface="Courier"/>
-              </a:rPr>
-              <a:t>s =</a:t>
-            </a:r>
-            <a:r>
-              <a:rPr>
-                <a:solidFill>
-                  <a:srgbClr val="003B4F"/>
-                </a:solidFill>
-                <a:latin typeface="Courier"/>
-              </a:rPr>
-              <a:t> </a:t>
-            </a:r>
-            <a:r>
-              <a:rPr>
-                <a:solidFill>
-                  <a:srgbClr val="20794D"/>
-                </a:solidFill>
-                <a:latin typeface="Courier"/>
-              </a:rPr>
-              <a:t>"#d95f0e"</a:t>
-            </a:r>
-            <a:r>
-              <a:rPr>
-                <a:solidFill>
-                  <a:srgbClr val="003B4F"/>
-                </a:solidFill>
-                <a:latin typeface="Courier"/>
-              </a:rPr>
-              <a:t>)</a:t>
-            </a:r>
-            <a:br/>
-            <a:r>
-              <a:rPr>
-                <a:solidFill>
-                  <a:srgbClr val="003B4F"/>
-                </a:solidFill>
-                <a:latin typeface="Courier"/>
-              </a:rPr>
-              <a:t>  ) </a:t>
-            </a:r>
-            <a:r>
-              <a:rPr>
-                <a:solidFill>
-                  <a:srgbClr val="5E5E5E"/>
-                </a:solidFill>
-                <a:latin typeface="Courier"/>
-              </a:rPr>
-              <a:t>+</a:t>
-            </a:r>
-            <a:br/>
-            <a:r>
-              <a:rPr>
-                <a:solidFill>
-                  <a:srgbClr val="003B4F"/>
-                </a:solidFill>
-                <a:latin typeface="Courier"/>
-              </a:rPr>
-              <a:t>  </a:t>
-            </a:r>
-            <a:r>
-              <a:rPr>
-                <a:solidFill>
-                  <a:srgbClr val="4758AB"/>
-                </a:solidFill>
-                <a:latin typeface="Courier"/>
-              </a:rPr>
-              <a:t>labs</a:t>
-            </a:r>
-            <a:r>
-              <a:rPr>
-                <a:solidFill>
-                  <a:srgbClr val="003B4F"/>
-                </a:solidFill>
-                <a:latin typeface="Courier"/>
-              </a:rPr>
-              <a:t>(</a:t>
-            </a:r>
-            <a:r>
-              <a:rPr>
-                <a:solidFill>
-                  <a:srgbClr val="657422"/>
-                </a:solidFill>
-                <a:latin typeface="Courier"/>
-              </a:rPr>
-              <a:t>x =</a:t>
-            </a:r>
-            <a:r>
-              <a:rPr>
-                <a:solidFill>
-                  <a:srgbClr val="003B4F"/>
-                </a:solidFill>
-                <a:latin typeface="Courier"/>
-              </a:rPr>
-              <a:t> </a:t>
-            </a:r>
-            <a:r>
-              <a:rPr>
-                <a:solidFill>
-                  <a:srgbClr val="20794D"/>
-                </a:solidFill>
-                <a:latin typeface="Courier"/>
-              </a:rPr>
-              <a:t>"Side of tree"</a:t>
-            </a:r>
-            <a:r>
-              <a:rPr>
-                <a:solidFill>
-                  <a:srgbClr val="003B4F"/>
-                </a:solidFill>
-                <a:latin typeface="Courier"/>
-              </a:rPr>
-              <a:t>, </a:t>
-            </a:r>
-            <a:r>
-              <a:rPr>
-                <a:solidFill>
-                  <a:srgbClr val="657422"/>
-                </a:solidFill>
-                <a:latin typeface="Courier"/>
-              </a:rPr>
-              <a:t>y =</a:t>
-            </a:r>
-            <a:r>
-              <a:rPr>
-                <a:solidFill>
-                  <a:srgbClr val="003B4F"/>
-                </a:solidFill>
-                <a:latin typeface="Courier"/>
-              </a:rPr>
-              <a:t> </a:t>
-            </a:r>
-            <a:r>
-              <a:rPr>
-                <a:solidFill>
-                  <a:srgbClr val="20794D"/>
-                </a:solidFill>
-                <a:latin typeface="Courier"/>
-              </a:rPr>
-              <a:t>"Needle length (mm)"</a:t>
-            </a:r>
-            <a:r>
-              <a:rPr>
-                <a:solidFill>
-                  <a:srgbClr val="003B4F"/>
-                </a:solidFill>
-                <a:latin typeface="Courier"/>
-              </a:rPr>
-              <a:t>) </a:t>
-            </a:r>
-            <a:r>
-              <a:rPr>
-                <a:solidFill>
-                  <a:srgbClr val="5E5E5E"/>
-                </a:solidFill>
-                <a:latin typeface="Courier"/>
-              </a:rPr>
-              <a:t>+</a:t>
-            </a:r>
-            <a:br/>
-            <a:r>
-              <a:rPr>
-                <a:solidFill>
-                  <a:srgbClr val="003B4F"/>
-                </a:solidFill>
-                <a:latin typeface="Courier"/>
-              </a:rPr>
-              <a:t>  </a:t>
-            </a:r>
-            <a:r>
-              <a:rPr>
-                <a:solidFill>
-                  <a:srgbClr val="4758AB"/>
-                </a:solidFill>
-                <a:latin typeface="Courier"/>
-              </a:rPr>
-              <a:t>theme_minimal</a:t>
-            </a:r>
-            <a:r>
-              <a:rPr>
-                <a:solidFill>
-                  <a:srgbClr val="003B4F"/>
-                </a:solidFill>
-                <a:latin typeface="Courier"/>
-              </a:rPr>
-              <a:t>(</a:t>
-            </a:r>
-            <a:r>
-              <a:rPr>
-                <a:solidFill>
-                  <a:srgbClr val="657422"/>
-                </a:solidFill>
-                <a:latin typeface="Courier"/>
-              </a:rPr>
-              <a:t>base_size =</a:t>
-            </a:r>
-            <a:r>
-              <a:rPr>
-                <a:solidFill>
-                  <a:srgbClr val="003B4F"/>
-                </a:solidFill>
-                <a:latin typeface="Courier"/>
-              </a:rPr>
-              <a:t> </a:t>
-            </a:r>
-            <a:r>
-              <a:rPr>
-                <a:solidFill>
-                  <a:srgbClr val="AD0000"/>
-                </a:solidFill>
-                <a:latin typeface="Courier"/>
-              </a:rPr>
-              <a:t>9</a:t>
-            </a:r>
-            <a:r>
-              <a:rPr>
-                <a:solidFill>
-                  <a:srgbClr val="003B4F"/>
-                </a:solidFill>
-                <a:latin typeface="Courier"/>
-              </a:rPr>
-              <a:t>)</a:t>
-            </a:r>
-          </a:p>
-        </p:txBody>
-      </p:sp>
-      <p:pic>
-        <p:nvPicPr>
-          <p:cNvPr descr="graphing_effectively_lecture_files/figure-pptx/unnamed-chunk-19-1.png" id="0" name="Picture 1"/>
-          <p:cNvPicPr>
-            <a:picLocks noGrp="1" noChangeAspect="1"/>
-          </p:cNvPicPr>
-          <p:nvPr/>
-        </p:nvPicPr>
-        <p:blipFill>
-          <a:blip r:embed="rId2"/>
-          <a:stretch>
-            <a:fillRect/>
-          </a:stretch>
-        </p:blipFill>
-        <p:spPr bwMode="auto">
-          <a:xfrm>
-            <a:off x="431800" y="1270000"/>
-            <a:ext cx="3810000" cy="3302000"/>
-          </a:xfrm>
-          <a:prstGeom prst="rect">
-            <a:avLst/>
-          </a:prstGeom>
-          <a:noFill/>
-          <a:ln w="9525">
-            <a:noFill/>
-            <a:headEnd/>
-            <a:tailEnd/>
-          </a:ln>
-        </p:spPr>
-      </p:pic>
-      <p:sp>
-        <p:nvSpPr>
-          <p:cNvPr id="5" name="Text Placeholder 4"/>
-          <p:cNvSpPr>
-            <a:spLocks noGrp="1"/>
-          </p:cNvSpPr>
-          <p:nvPr>
-            <p:ph idx="3" sz="quarter" type="body"/>
-          </p:nvPr>
-        </p:nvSpPr>
-        <p:spPr/>
-        <p:txBody>
-          <a:bodyPr/>
-          <a:lstStyle/>
           <a:p>
             <a:pPr lvl="0" indent="0" marL="1270000">
               <a:buNone/>
@@ -15127,7 +14991,7 @@
             </a:pPr>
             <a:r>
               <a:rPr sz="2000" b="1"/>
-              <a:t>🖐 Notice</a:t>
+              <a:t>📖 Why these two colors?</a:t>
             </a:r>
           </a:p>
           <a:p>
@@ -15135,78 +14999,81 @@
               <a:buNone/>
             </a:pPr>
             <a:r>
+              <a:rPr sz="2000">
+                <a:latin typeface="Courier"/>
+              </a:rPr>
+              <a:t>#2c7fb8</a:t>
+            </a:r>
+            <a:r>
               <a:rPr sz="2000"/>
-              <a:t>Same three arguments, same pattern — </a:t>
+              <a:t> (blue) and </a:t>
             </a:r>
             <a:r>
               <a:rPr sz="2000">
                 <a:latin typeface="Courier"/>
               </a:rPr>
-              <a:t>scale_fill_manual()</a:t>
+              <a:t>#d95f0e</a:t>
             </a:r>
             <a:r>
               <a:rPr sz="2000"/>
-              <a:t> is </a:t>
+              <a:t> (orange) are a </a:t>
+            </a:r>
+            <a:r>
+              <a:rPr sz="2000" b="1"/>
+              <a:t>blue–orange</a:t>
+            </a:r>
+            <a:r>
+              <a:rPr sz="2000"/>
+              <a:t> pair, the safest two-colour choice for colour-vision deficiency: red–green confusion, which affects roughly 8% of men, leaves the blue–orange axis intact.</a:t>
+            </a:r>
+          </a:p>
+          <a:p>
+            <a:pPr lvl="0" indent="0" marL="1270000">
+              <a:buNone/>
+            </a:pPr>
+            <a:r>
+              <a:rPr sz="2000"/>
+              <a:t>Don’t take that on faith — check any pair you invent with a simulator (the </a:t>
             </a:r>
             <a:r>
               <a:rPr sz="2000">
                 <a:latin typeface="Courier"/>
               </a:rPr>
-              <a:t>scale_color_manual()</a:t>
+              <a:t>colorblindr</a:t>
             </a:r>
             <a:r>
               <a:rPr sz="2000"/>
-              <a:t> for the </a:t>
+              <a:t> or </a:t>
             </a:r>
             <a:r>
               <a:rPr sz="2000">
                 <a:latin typeface="Courier"/>
               </a:rPr>
-              <a:t>fill</a:t>
+              <a:t>dichromat</a:t>
             </a:r>
             <a:r>
               <a:rPr sz="2000"/>
-              <a:t> aesthetic instead of </a:t>
+              <a:t> packages), or start from a palette that was built for it: </a:t>
             </a:r>
             <a:r>
               <a:rPr sz="2000">
                 <a:latin typeface="Courier"/>
               </a:rPr>
-              <a:t>color</a:t>
+              <a:t>scale_color_viridis_d()</a:t>
             </a:r>
             <a:r>
               <a:rPr sz="2000"/>
-              <a:t>. A boxplot’s box is </a:t>
+              <a:t> or </a:t>
             </a:r>
             <a:r>
               <a:rPr sz="2000">
                 <a:latin typeface="Courier"/>
               </a:rPr>
-              <a:t>fill</a:t>
+              <a:t>RColorBrewer::brewer.pal(n, "Dark2")</a:t>
             </a:r>
             <a:r>
               <a:rPr sz="2000"/>
-              <a:t>; its jittered points (if you added </a:t>
-            </a:r>
-            <a:r>
-              <a:rPr sz="2000">
-                <a:latin typeface="Courier"/>
-              </a:rPr>
-              <a:t>geom_point(color = ...)</a:t>
-            </a:r>
-            <a:r>
-              <a:rPr sz="2000"/>
-              <a:t>) would be </a:t>
-            </a:r>
-            <a:r>
-              <a:rPr sz="2000">
-                <a:latin typeface="Courier"/>
-              </a:rPr>
-              <a:t>color</a:t>
-            </a:r>
-            <a:r>
-              <a:rPr sz="2000"/>
-              <a:t>. A plot can need both at once.</a:t>
+              <a:t>.</a:t>
             </a:r>
           </a:p>
         </p:txBody>
@@ -15260,8 +15127,14 @@
               <a:buNone/>
             </a:pPr>
             <a:r>
+              <a:rPr>
+                <a:latin typeface="Courier"/>
+              </a:rPr>
+              <a:t>scale_color_manual()</a:t>
+            </a:r>
+            <a:r>
               <a:rPr/>
-              <a:t>Wrap-up</a:t>
+              <a:t> — Getting the Names Wrong</a:t>
             </a:r>
           </a:p>
         </p:txBody>
@@ -15281,197 +15154,310 @@
           <a:bodyPr/>
           <a:lstStyle/>
           <a:p>
-            <a:pPr lvl="0" indent="0" marL="0">
+            <a:pPr lvl="0" indent="0">
               <a:buNone/>
             </a:pPr>
             <a:r>
-              <a:rPr/>
-              <a:t>Today you:</a:t>
-            </a:r>
-          </a:p>
-          <a:p>
-            <a:pPr lvl="0"/>
-            <a:r>
-              <a:rPr/>
-              <a:t>Built boxplots with raw points overlaid, not hidden</a:t>
-            </a:r>
-          </a:p>
-          <a:p>
-            <a:pPr lvl="0"/>
-            <a:r>
-              <a:rPr/>
-              <a:t>Wrote real axis labels, titles, and legend titles with </a:t>
-            </a:r>
-            <a:r>
-              <a:rPr>
-                <a:latin typeface="Courier"/>
-              </a:rPr>
-              <a:t>labs()</a:t>
-            </a:r>
-            <a:r>
-              <a:rPr/>
-              <a:t> — never shipped a default column name</a:t>
-            </a:r>
-          </a:p>
-          <a:p>
-            <a:pPr lvl="0"/>
-            <a:r>
-              <a:rPr/>
-              <a:t>Mapped a third variable with </a:t>
-            </a:r>
-            <a:r>
-              <a:rPr>
+              <a:rPr>
+                <a:solidFill>
+                  <a:srgbClr val="5E5E5E"/>
+                </a:solidFill>
+                <a:latin typeface="Courier"/>
+              </a:rPr>
+              <a:t># Typo: "sun" instead of the real value "sunny"</a:t>
+            </a:r>
+            <a:br/>
+            <a:r>
+              <a:rPr>
+                <a:solidFill>
+                  <a:srgbClr val="4758AB"/>
+                </a:solidFill>
+                <a:latin typeface="Courier"/>
+              </a:rPr>
+              <a:t>ggplot</a:t>
+            </a:r>
+            <a:r>
+              <a:rPr>
+                <a:solidFill>
+                  <a:srgbClr val="003B4F"/>
+                </a:solidFill>
+                <a:latin typeface="Courier"/>
+              </a:rPr>
+              <a:t>(pine_df, </a:t>
+            </a:r>
+            <a:r>
+              <a:rPr>
+                <a:solidFill>
+                  <a:srgbClr val="4758AB"/>
+                </a:solidFill>
+                <a:latin typeface="Courier"/>
+              </a:rPr>
+              <a:t>aes</a:t>
+            </a:r>
+            <a:r>
+              <a:rPr>
+                <a:solidFill>
+                  <a:srgbClr val="003B4F"/>
+                </a:solidFill>
+                <a:latin typeface="Courier"/>
+              </a:rPr>
+              <a:t>(</a:t>
+            </a:r>
+            <a:r>
+              <a:rPr>
+                <a:solidFill>
+                  <a:srgbClr val="657422"/>
+                </a:solidFill>
+                <a:latin typeface="Courier"/>
+              </a:rPr>
+              <a:t>x =</a:t>
+            </a:r>
+            <a:r>
+              <a:rPr>
+                <a:solidFill>
+                  <a:srgbClr val="003B4F"/>
+                </a:solidFill>
+                <a:latin typeface="Courier"/>
+              </a:rPr>
+              <a:t> side, </a:t>
+            </a:r>
+            <a:r>
+              <a:rPr>
+                <a:solidFill>
+                  <a:srgbClr val="657422"/>
+                </a:solidFill>
+                <a:latin typeface="Courier"/>
+              </a:rPr>
+              <a:t>y =</a:t>
+            </a:r>
+            <a:r>
+              <a:rPr>
+                <a:solidFill>
+                  <a:srgbClr val="003B4F"/>
+                </a:solidFill>
+                <a:latin typeface="Courier"/>
+              </a:rPr>
+              <a:t> needle_length_mm, </a:t>
+            </a:r>
+            <a:r>
+              <a:rPr>
+                <a:solidFill>
+                  <a:srgbClr val="657422"/>
+                </a:solidFill>
                 <a:latin typeface="Courier"/>
               </a:rPr>
               <a:t>color =</a:t>
             </a:r>
             <a:r>
-              <a:rPr/>
-              <a:t> / </a:t>
-            </a:r>
-            <a:r>
-              <a:rPr>
-                <a:latin typeface="Courier"/>
-              </a:rPr>
-              <a:t>fill =</a:t>
-            </a:r>
-            <a:r>
-              <a:rPr/>
-              <a:t> inside </a:t>
-            </a:r>
-            <a:r>
-              <a:rPr>
-                <a:latin typeface="Courier"/>
-              </a:rPr>
-              <a:t>aes()</a:t>
-            </a:r>
-          </a:p>
-          <a:p>
-            <a:pPr lvl="0"/>
-            <a:r>
-              <a:rPr/>
-              <a:t>Built histograms and density curves to see a whole distribution’s shape</a:t>
-            </a:r>
-          </a:p>
-          <a:p>
-            <a:pPr lvl="0"/>
-            <a:r>
-              <a:rPr/>
-              <a:t>Plotted mean ± SE directly with </a:t>
-            </a:r>
-            <a:r>
-              <a:rPr>
-                <a:latin typeface="Courier"/>
-              </a:rPr>
-              <a:t>stat_summary()</a:t>
-            </a:r>
-            <a:r>
-              <a:rPr/>
-              <a:t> — no separate summary table needed</a:t>
-            </a:r>
-          </a:p>
-          <a:p>
-            <a:pPr lvl="0"/>
-            <a:r>
-              <a:rPr/>
-              <a:t>Faceted a plot with </a:t>
-            </a:r>
-            <a:r>
-              <a:rPr>
-                <a:latin typeface="Courier"/>
-              </a:rPr>
-              <a:t>facet_wrap()</a:t>
-            </a:r>
-            <a:r>
-              <a:rPr/>
-              <a:t> to check every group at once</a:t>
-            </a:r>
-          </a:p>
-          <a:p>
-            <a:pPr lvl="0"/>
-            <a:r>
-              <a:rPr/>
-              <a:t>Compared themes, and saved a real, correctly-sized figure with </a:t>
-            </a:r>
-            <a:r>
-              <a:rPr>
-                <a:latin typeface="Courier"/>
-              </a:rPr>
-              <a:t>ggsave()</a:t>
-            </a:r>
-          </a:p>
-          <a:p>
-            <a:pPr lvl="0"/>
-            <a:r>
-              <a:rPr i="1"/>
-              <a:t>(Advanced)</a:t>
-            </a:r>
-            <a:r>
-              <a:rPr/>
-              <a:t> Set exact colors and legend text by hand with </a:t>
-            </a:r>
-            <a:r>
-              <a:rPr>
-                <a:latin typeface="Courier"/>
-              </a:rPr>
-              <a:t>scale_color_manual()</a:t>
-            </a:r>
-            <a:r>
-              <a:rPr/>
-              <a:t> / </a:t>
-            </a:r>
-            <a:r>
-              <a:rPr>
-                <a:latin typeface="Courier"/>
-              </a:rPr>
-              <a:t>scale_fill_manual()</a:t>
-            </a:r>
-          </a:p>
-          <a:p>
-            <a:pPr lvl="0" indent="0" marL="1270000">
-              <a:buNone/>
-            </a:pPr>
-            <a:r>
-              <a:rPr sz="2000" b="1"/>
-              <a:t>Tip</a:t>
-            </a:r>
-          </a:p>
-          <a:p>
-            <a:pPr lvl="0" indent="0" marL="1270000">
-              <a:buNone/>
-            </a:pPr>
-            <a:r>
-              <a:rPr sz="2000" b="1"/>
-              <a:t>🖐 Before next class</a:t>
-            </a:r>
-          </a:p>
-          <a:p>
-            <a:pPr lvl="0" indent="0" marL="1270000">
-              <a:buNone/>
-            </a:pPr>
-            <a:r>
-              <a:rPr sz="2000"/>
-              <a:t>Finish the worksheet: build a mean ± SE plot faceted by </a:t>
-            </a:r>
-            <a:r>
-              <a:rPr sz="2000">
-                <a:latin typeface="Courier"/>
-              </a:rPr>
-              <a:t>group</a:t>
-            </a:r>
-            <a:r>
-              <a:rPr sz="2000"/>
-              <a:t>, pick a theme, and save it to </a:t>
-            </a:r>
-            <a:r>
-              <a:rPr sz="2000">
-                <a:latin typeface="Courier"/>
-              </a:rPr>
-              <a:t>figures/</a:t>
-            </a:r>
-            <a:r>
-              <a:rPr sz="2000"/>
-              <a:t> at 3×3in, 300 dpi.</a:t>
+              <a:rPr>
+                <a:solidFill>
+                  <a:srgbClr val="003B4F"/>
+                </a:solidFill>
+                <a:latin typeface="Courier"/>
+              </a:rPr>
+              <a:t> side)) </a:t>
+            </a:r>
+            <a:r>
+              <a:rPr>
+                <a:solidFill>
+                  <a:srgbClr val="5E5E5E"/>
+                </a:solidFill>
+                <a:latin typeface="Courier"/>
+              </a:rPr>
+              <a:t>+</a:t>
+            </a:r>
+            <a:br/>
+            <a:r>
+              <a:rPr>
+                <a:solidFill>
+                  <a:srgbClr val="003B4F"/>
+                </a:solidFill>
+                <a:latin typeface="Courier"/>
+              </a:rPr>
+              <a:t>  </a:t>
+            </a:r>
+            <a:r>
+              <a:rPr>
+                <a:solidFill>
+                  <a:srgbClr val="4758AB"/>
+                </a:solidFill>
+                <a:latin typeface="Courier"/>
+              </a:rPr>
+              <a:t>geom_point</a:t>
+            </a:r>
+            <a:r>
+              <a:rPr>
+                <a:solidFill>
+                  <a:srgbClr val="003B4F"/>
+                </a:solidFill>
+                <a:latin typeface="Courier"/>
+              </a:rPr>
+              <a:t>() </a:t>
+            </a:r>
+            <a:r>
+              <a:rPr>
+                <a:solidFill>
+                  <a:srgbClr val="5E5E5E"/>
+                </a:solidFill>
+                <a:latin typeface="Courier"/>
+              </a:rPr>
+              <a:t>+</a:t>
+            </a:r>
+            <a:br/>
+            <a:r>
+              <a:rPr>
+                <a:solidFill>
+                  <a:srgbClr val="003B4F"/>
+                </a:solidFill>
+                <a:latin typeface="Courier"/>
+              </a:rPr>
+              <a:t>  </a:t>
+            </a:r>
+            <a:r>
+              <a:rPr>
+                <a:solidFill>
+                  <a:srgbClr val="4758AB"/>
+                </a:solidFill>
+                <a:latin typeface="Courier"/>
+              </a:rPr>
+              <a:t>scale_color_manual</a:t>
+            </a:r>
+            <a:r>
+              <a:rPr>
+                <a:solidFill>
+                  <a:srgbClr val="003B4F"/>
+                </a:solidFill>
+                <a:latin typeface="Courier"/>
+              </a:rPr>
+              <a:t>(</a:t>
+            </a:r>
+            <a:br/>
+            <a:r>
+              <a:rPr>
+                <a:solidFill>
+                  <a:srgbClr val="003B4F"/>
+                </a:solidFill>
+                <a:latin typeface="Courier"/>
+              </a:rPr>
+              <a:t>    </a:t>
+            </a:r>
+            <a:r>
+              <a:rPr>
+                <a:solidFill>
+                  <a:srgbClr val="657422"/>
+                </a:solidFill>
+                <a:latin typeface="Courier"/>
+              </a:rPr>
+              <a:t>values =</a:t>
+            </a:r>
+            <a:r>
+              <a:rPr>
+                <a:solidFill>
+                  <a:srgbClr val="003B4F"/>
+                </a:solidFill>
+                <a:latin typeface="Courier"/>
+              </a:rPr>
+              <a:t> </a:t>
+            </a:r>
+            <a:r>
+              <a:rPr>
+                <a:solidFill>
+                  <a:srgbClr val="4758AB"/>
+                </a:solidFill>
+                <a:latin typeface="Courier"/>
+              </a:rPr>
+              <a:t>c</a:t>
+            </a:r>
+            <a:r>
+              <a:rPr>
+                <a:solidFill>
+                  <a:srgbClr val="003B4F"/>
+                </a:solidFill>
+                <a:latin typeface="Courier"/>
+              </a:rPr>
+              <a:t>(</a:t>
+            </a:r>
+            <a:r>
+              <a:rPr>
+                <a:solidFill>
+                  <a:srgbClr val="657422"/>
+                </a:solidFill>
+                <a:latin typeface="Courier"/>
+              </a:rPr>
+              <a:t>shady =</a:t>
+            </a:r>
+            <a:r>
+              <a:rPr>
+                <a:solidFill>
+                  <a:srgbClr val="003B4F"/>
+                </a:solidFill>
+                <a:latin typeface="Courier"/>
+              </a:rPr>
+              <a:t> </a:t>
+            </a:r>
+            <a:r>
+              <a:rPr>
+                <a:solidFill>
+                  <a:srgbClr val="20794D"/>
+                </a:solidFill>
+                <a:latin typeface="Courier"/>
+              </a:rPr>
+              <a:t>"#2c7fb8"</a:t>
+            </a:r>
+            <a:r>
+              <a:rPr>
+                <a:solidFill>
+                  <a:srgbClr val="003B4F"/>
+                </a:solidFill>
+                <a:latin typeface="Courier"/>
+              </a:rPr>
+              <a:t>, </a:t>
+            </a:r>
+            <a:r>
+              <a:rPr>
+                <a:solidFill>
+                  <a:srgbClr val="657422"/>
+                </a:solidFill>
+                <a:latin typeface="Courier"/>
+              </a:rPr>
+              <a:t>sun =</a:t>
+            </a:r>
+            <a:r>
+              <a:rPr>
+                <a:solidFill>
+                  <a:srgbClr val="003B4F"/>
+                </a:solidFill>
+                <a:latin typeface="Courier"/>
+              </a:rPr>
+              <a:t> </a:t>
+            </a:r>
+            <a:r>
+              <a:rPr>
+                <a:solidFill>
+                  <a:srgbClr val="20794D"/>
+                </a:solidFill>
+                <a:latin typeface="Courier"/>
+              </a:rPr>
+              <a:t>"#d95f0e"</a:t>
+            </a:r>
+            <a:r>
+              <a:rPr>
+                <a:solidFill>
+                  <a:srgbClr val="003B4F"/>
+                </a:solidFill>
+                <a:latin typeface="Courier"/>
+              </a:rPr>
+              <a:t>)</a:t>
+            </a:r>
+            <a:br/>
+            <a:r>
+              <a:rPr>
+                <a:solidFill>
+                  <a:srgbClr val="003B4F"/>
+                </a:solidFill>
+                <a:latin typeface="Courier"/>
+              </a:rPr>
+              <a:t>  )</a:t>
             </a:r>
           </a:p>
         </p:txBody>
@@ -15496,7 +15482,7 @@
             </a:pPr>
             <a:r>
               <a:rPr sz="2000" b="1"/>
-              <a:t>Note</a:t>
+              <a:t>Warning</a:t>
             </a:r>
           </a:p>
           <a:p>
@@ -15505,16 +15491,69 @@
             </a:pPr>
             <a:r>
               <a:rPr sz="2000" b="1"/>
-              <a:t>Where this leads</a:t>
-            </a:r>
-          </a:p>
-          <a:p>
-            <a:pPr lvl="0" indent="0" marL="1270000">
-              <a:buNone/>
-            </a:pPr>
+              <a:t>⚠️ Watch out!</a:t>
+            </a:r>
+          </a:p>
+          <a:p>
+            <a:pPr lvl="0"/>
             <a:r>
               <a:rPr sz="2000"/>
-              <a:t>You can now import, wrangle, describe, and visualize a dataset end to end. That full pipeline — raw data → clean → summarize → visualize — is the foundation every later statistical test builds on.</a:t>
+              <a:t>Every level that appears in your data </a:t>
+            </a:r>
+            <a:r>
+              <a:rPr sz="2000" b="1"/>
+              <a:t>must</a:t>
+            </a:r>
+            <a:r>
+              <a:rPr sz="2000"/>
+              <a:t> get an entry in </a:t>
+            </a:r>
+            <a:r>
+              <a:rPr sz="2000">
+                <a:latin typeface="Courier"/>
+              </a:rPr>
+              <a:t>values</a:t>
+            </a:r>
+          </a:p>
+          <a:p>
+            <a:pPr lvl="1"/>
+            <a:r>
+              <a:rPr sz="2000"/>
+              <a:t>(and in </a:t>
+            </a:r>
+            <a:r>
+              <a:rPr sz="2000">
+                <a:latin typeface="Courier"/>
+              </a:rPr>
+              <a:t>labels</a:t>
+            </a:r>
+            <a:r>
+              <a:rPr sz="2000"/>
+              <a:t>, if you supply it), spelled exactly as it appears in the column</a:t>
+            </a:r>
+          </a:p>
+          <a:p>
+            <a:pPr lvl="1"/>
+            <a:r>
+              <a:rPr sz="2000"/>
+              <a:t>check with </a:t>
+            </a:r>
+            <a:r>
+              <a:rPr sz="2000">
+                <a:latin typeface="Courier"/>
+              </a:rPr>
+              <a:t>unique(pine_df$side)</a:t>
+            </a:r>
+            <a:r>
+              <a:rPr sz="2000"/>
+              <a:t> first if you are not sure</a:t>
+            </a:r>
+          </a:p>
+          <a:p>
+            <a:pPr lvl="1"/>
+            <a:r>
+              <a:rPr sz="2000"/>
+              <a:t>A missing or misspelled level draws as grey with a warning.</a:t>
             </a:r>
           </a:p>
         </p:txBody>
@@ -15525,6 +15564,1256 @@
 </file>
 
 <file path=ppt/slides/slide34.xml><?xml version="1.0" encoding="utf-8"?>
+<p:sld xmlns:a="http://schemas.openxmlformats.org/drawingml/2006/main" xmlns:r="http://schemas.openxmlformats.org/officeDocument/2006/relationships" xmlns:p="http://schemas.openxmlformats.org/presentationml/2006/main">
+  <p:cSld>
+    <p:spTree>
+      <p:nvGrpSpPr>
+        <p:cNvPr id="1" name=""/>
+        <p:cNvGrpSpPr/>
+        <p:nvPr/>
+      </p:nvGrpSpPr>
+      <p:grpSpPr>
+        <a:xfrm>
+          <a:off x="0" y="0"/>
+          <a:ext cx="0" cy="0"/>
+          <a:chOff x="0" y="0"/>
+          <a:chExt cx="0" cy="0"/>
+        </a:xfrm>
+      </p:grpSpPr>
+      <p:sp>
+        <p:nvSpPr>
+          <p:cNvPr id="2" name="Title 1"/>
+          <p:cNvSpPr>
+            <a:spLocks noGrp="1"/>
+          </p:cNvSpPr>
+          <p:nvPr>
+            <p:ph type="title"/>
+          </p:nvPr>
+        </p:nvSpPr>
+        <p:spPr>
+          <a:xfrm>
+            <a:off x="139485" y="78119"/>
+            <a:ext cx="8229600" cy="607682"/>
+          </a:xfrm>
+        </p:spPr>
+        <p:txBody>
+          <a:bodyPr/>
+          <a:lstStyle/>
+          <a:p>
+            <a:pPr lvl="0" indent="0" marL="0">
+              <a:buNone/>
+            </a:pPr>
+            <a:r>
+              <a:rPr>
+                <a:latin typeface="Courier"/>
+              </a:rPr>
+              <a:t>scale_fill_manual()</a:t>
+            </a:r>
+            <a:r>
+              <a:rPr/>
+              <a:t> — the </a:t>
+            </a:r>
+            <a:r>
+              <a:rPr>
+                <a:latin typeface="Courier"/>
+              </a:rPr>
+              <a:t>fill</a:t>
+            </a:r>
+            <a:r>
+              <a:rPr/>
+              <a:t> Twin</a:t>
+            </a:r>
+          </a:p>
+        </p:txBody>
+      </p:sp>
+      <p:sp>
+        <p:nvSpPr>
+          <p:cNvPr id="3" name="Text Placeholder 2"/>
+          <p:cNvSpPr>
+            <a:spLocks noGrp="1"/>
+          </p:cNvSpPr>
+          <p:nvPr>
+            <p:ph idx="1" type="body"/>
+          </p:nvPr>
+        </p:nvSpPr>
+        <p:spPr/>
+        <p:txBody>
+          <a:bodyPr/>
+          <a:lstStyle/>
+          <a:p>
+            <a:pPr lvl="0" indent="0">
+              <a:buNone/>
+            </a:pPr>
+            <a:r>
+              <a:rPr>
+                <a:solidFill>
+                  <a:srgbClr val="4758AB"/>
+                </a:solidFill>
+                <a:latin typeface="Courier"/>
+              </a:rPr>
+              <a:t>ggplot</a:t>
+            </a:r>
+            <a:r>
+              <a:rPr>
+                <a:solidFill>
+                  <a:srgbClr val="003B4F"/>
+                </a:solidFill>
+                <a:latin typeface="Courier"/>
+              </a:rPr>
+              <a:t>(pine_df, </a:t>
+            </a:r>
+            <a:r>
+              <a:rPr>
+                <a:solidFill>
+                  <a:srgbClr val="4758AB"/>
+                </a:solidFill>
+                <a:latin typeface="Courier"/>
+              </a:rPr>
+              <a:t>aes</a:t>
+            </a:r>
+            <a:r>
+              <a:rPr>
+                <a:solidFill>
+                  <a:srgbClr val="003B4F"/>
+                </a:solidFill>
+                <a:latin typeface="Courier"/>
+              </a:rPr>
+              <a:t>(</a:t>
+            </a:r>
+            <a:r>
+              <a:rPr>
+                <a:solidFill>
+                  <a:srgbClr val="657422"/>
+                </a:solidFill>
+                <a:latin typeface="Courier"/>
+              </a:rPr>
+              <a:t>x =</a:t>
+            </a:r>
+            <a:r>
+              <a:rPr>
+                <a:solidFill>
+                  <a:srgbClr val="003B4F"/>
+                </a:solidFill>
+                <a:latin typeface="Courier"/>
+              </a:rPr>
+              <a:t> side, </a:t>
+            </a:r>
+            <a:r>
+              <a:rPr>
+                <a:solidFill>
+                  <a:srgbClr val="657422"/>
+                </a:solidFill>
+                <a:latin typeface="Courier"/>
+              </a:rPr>
+              <a:t>y =</a:t>
+            </a:r>
+            <a:r>
+              <a:rPr>
+                <a:solidFill>
+                  <a:srgbClr val="003B4F"/>
+                </a:solidFill>
+                <a:latin typeface="Courier"/>
+              </a:rPr>
+              <a:t> needle_length_mm, </a:t>
+            </a:r>
+            <a:r>
+              <a:rPr>
+                <a:solidFill>
+                  <a:srgbClr val="657422"/>
+                </a:solidFill>
+                <a:latin typeface="Courier"/>
+              </a:rPr>
+              <a:t>fill =</a:t>
+            </a:r>
+            <a:r>
+              <a:rPr>
+                <a:solidFill>
+                  <a:srgbClr val="003B4F"/>
+                </a:solidFill>
+                <a:latin typeface="Courier"/>
+              </a:rPr>
+              <a:t> side)) </a:t>
+            </a:r>
+            <a:r>
+              <a:rPr>
+                <a:solidFill>
+                  <a:srgbClr val="5E5E5E"/>
+                </a:solidFill>
+                <a:latin typeface="Courier"/>
+              </a:rPr>
+              <a:t>+</a:t>
+            </a:r>
+            <a:br/>
+            <a:r>
+              <a:rPr>
+                <a:solidFill>
+                  <a:srgbClr val="003B4F"/>
+                </a:solidFill>
+                <a:latin typeface="Courier"/>
+              </a:rPr>
+              <a:t>  </a:t>
+            </a:r>
+            <a:r>
+              <a:rPr>
+                <a:solidFill>
+                  <a:srgbClr val="4758AB"/>
+                </a:solidFill>
+                <a:latin typeface="Courier"/>
+              </a:rPr>
+              <a:t>geom_boxplot</a:t>
+            </a:r>
+            <a:r>
+              <a:rPr>
+                <a:solidFill>
+                  <a:srgbClr val="003B4F"/>
+                </a:solidFill>
+                <a:latin typeface="Courier"/>
+              </a:rPr>
+              <a:t>(</a:t>
+            </a:r>
+            <a:r>
+              <a:rPr>
+                <a:solidFill>
+                  <a:srgbClr val="657422"/>
+                </a:solidFill>
+                <a:latin typeface="Courier"/>
+              </a:rPr>
+              <a:t>alpha =</a:t>
+            </a:r>
+            <a:r>
+              <a:rPr>
+                <a:solidFill>
+                  <a:srgbClr val="003B4F"/>
+                </a:solidFill>
+                <a:latin typeface="Courier"/>
+              </a:rPr>
+              <a:t> </a:t>
+            </a:r>
+            <a:r>
+              <a:rPr>
+                <a:solidFill>
+                  <a:srgbClr val="AD0000"/>
+                </a:solidFill>
+                <a:latin typeface="Courier"/>
+              </a:rPr>
+              <a:t>0.7</a:t>
+            </a:r>
+            <a:r>
+              <a:rPr>
+                <a:solidFill>
+                  <a:srgbClr val="003B4F"/>
+                </a:solidFill>
+                <a:latin typeface="Courier"/>
+              </a:rPr>
+              <a:t>, </a:t>
+            </a:r>
+            <a:r>
+              <a:rPr>
+                <a:solidFill>
+                  <a:srgbClr val="657422"/>
+                </a:solidFill>
+                <a:latin typeface="Courier"/>
+              </a:rPr>
+              <a:t>outlier.shape =</a:t>
+            </a:r>
+            <a:r>
+              <a:rPr>
+                <a:solidFill>
+                  <a:srgbClr val="003B4F"/>
+                </a:solidFill>
+                <a:latin typeface="Courier"/>
+              </a:rPr>
+              <a:t> </a:t>
+            </a:r>
+            <a:r>
+              <a:rPr>
+                <a:solidFill>
+                  <a:srgbClr val="8F5902"/>
+                </a:solidFill>
+                <a:latin typeface="Courier"/>
+              </a:rPr>
+              <a:t>NA</a:t>
+            </a:r>
+            <a:r>
+              <a:rPr>
+                <a:solidFill>
+                  <a:srgbClr val="003B4F"/>
+                </a:solidFill>
+                <a:latin typeface="Courier"/>
+              </a:rPr>
+              <a:t>) </a:t>
+            </a:r>
+            <a:r>
+              <a:rPr>
+                <a:solidFill>
+                  <a:srgbClr val="5E5E5E"/>
+                </a:solidFill>
+                <a:latin typeface="Courier"/>
+              </a:rPr>
+              <a:t>+</a:t>
+            </a:r>
+            <a:br/>
+            <a:r>
+              <a:rPr>
+                <a:solidFill>
+                  <a:srgbClr val="003B4F"/>
+                </a:solidFill>
+                <a:latin typeface="Courier"/>
+              </a:rPr>
+              <a:t>  </a:t>
+            </a:r>
+            <a:r>
+              <a:rPr>
+                <a:solidFill>
+                  <a:srgbClr val="4758AB"/>
+                </a:solidFill>
+                <a:latin typeface="Courier"/>
+              </a:rPr>
+              <a:t>scale_fill_manual</a:t>
+            </a:r>
+            <a:r>
+              <a:rPr>
+                <a:solidFill>
+                  <a:srgbClr val="003B4F"/>
+                </a:solidFill>
+                <a:latin typeface="Courier"/>
+              </a:rPr>
+              <a:t>(</a:t>
+            </a:r>
+            <a:br/>
+            <a:r>
+              <a:rPr>
+                <a:solidFill>
+                  <a:srgbClr val="003B4F"/>
+                </a:solidFill>
+                <a:latin typeface="Courier"/>
+              </a:rPr>
+              <a:t>    </a:t>
+            </a:r>
+            <a:r>
+              <a:rPr>
+                <a:solidFill>
+                  <a:srgbClr val="657422"/>
+                </a:solidFill>
+                <a:latin typeface="Courier"/>
+              </a:rPr>
+              <a:t>name =</a:t>
+            </a:r>
+            <a:r>
+              <a:rPr>
+                <a:solidFill>
+                  <a:srgbClr val="003B4F"/>
+                </a:solidFill>
+                <a:latin typeface="Courier"/>
+              </a:rPr>
+              <a:t> </a:t>
+            </a:r>
+            <a:r>
+              <a:rPr>
+                <a:solidFill>
+                  <a:srgbClr val="20794D"/>
+                </a:solidFill>
+                <a:latin typeface="Courier"/>
+              </a:rPr>
+              <a:t>"Side of tree"</a:t>
+            </a:r>
+            <a:r>
+              <a:rPr>
+                <a:solidFill>
+                  <a:srgbClr val="003B4F"/>
+                </a:solidFill>
+                <a:latin typeface="Courier"/>
+              </a:rPr>
+              <a:t>,</a:t>
+            </a:r>
+            <a:br/>
+            <a:r>
+              <a:rPr>
+                <a:solidFill>
+                  <a:srgbClr val="003B4F"/>
+                </a:solidFill>
+                <a:latin typeface="Courier"/>
+              </a:rPr>
+              <a:t>    </a:t>
+            </a:r>
+            <a:r>
+              <a:rPr>
+                <a:solidFill>
+                  <a:srgbClr val="657422"/>
+                </a:solidFill>
+                <a:latin typeface="Courier"/>
+              </a:rPr>
+              <a:t>labels =</a:t>
+            </a:r>
+            <a:r>
+              <a:rPr>
+                <a:solidFill>
+                  <a:srgbClr val="003B4F"/>
+                </a:solidFill>
+                <a:latin typeface="Courier"/>
+              </a:rPr>
+              <a:t> </a:t>
+            </a:r>
+            <a:r>
+              <a:rPr>
+                <a:solidFill>
+                  <a:srgbClr val="4758AB"/>
+                </a:solidFill>
+                <a:latin typeface="Courier"/>
+              </a:rPr>
+              <a:t>c</a:t>
+            </a:r>
+            <a:r>
+              <a:rPr>
+                <a:solidFill>
+                  <a:srgbClr val="003B4F"/>
+                </a:solidFill>
+                <a:latin typeface="Courier"/>
+              </a:rPr>
+              <a:t>(</a:t>
+            </a:r>
+            <a:r>
+              <a:rPr>
+                <a:solidFill>
+                  <a:srgbClr val="657422"/>
+                </a:solidFill>
+                <a:latin typeface="Courier"/>
+              </a:rPr>
+              <a:t>shady =</a:t>
+            </a:r>
+            <a:r>
+              <a:rPr>
+                <a:solidFill>
+                  <a:srgbClr val="003B4F"/>
+                </a:solidFill>
+                <a:latin typeface="Courier"/>
+              </a:rPr>
+              <a:t> </a:t>
+            </a:r>
+            <a:r>
+              <a:rPr>
+                <a:solidFill>
+                  <a:srgbClr val="20794D"/>
+                </a:solidFill>
+                <a:latin typeface="Courier"/>
+              </a:rPr>
+              <a:t>"Shady side"</a:t>
+            </a:r>
+            <a:r>
+              <a:rPr>
+                <a:solidFill>
+                  <a:srgbClr val="003B4F"/>
+                </a:solidFill>
+                <a:latin typeface="Courier"/>
+              </a:rPr>
+              <a:t>, </a:t>
+            </a:r>
+            <a:r>
+              <a:rPr>
+                <a:solidFill>
+                  <a:srgbClr val="657422"/>
+                </a:solidFill>
+                <a:latin typeface="Courier"/>
+              </a:rPr>
+              <a:t>sunny =</a:t>
+            </a:r>
+            <a:r>
+              <a:rPr>
+                <a:solidFill>
+                  <a:srgbClr val="003B4F"/>
+                </a:solidFill>
+                <a:latin typeface="Courier"/>
+              </a:rPr>
+              <a:t> </a:t>
+            </a:r>
+            <a:r>
+              <a:rPr>
+                <a:solidFill>
+                  <a:srgbClr val="20794D"/>
+                </a:solidFill>
+                <a:latin typeface="Courier"/>
+              </a:rPr>
+              <a:t>"Sunny side"</a:t>
+            </a:r>
+            <a:r>
+              <a:rPr>
+                <a:solidFill>
+                  <a:srgbClr val="003B4F"/>
+                </a:solidFill>
+                <a:latin typeface="Courier"/>
+              </a:rPr>
+              <a:t>),</a:t>
+            </a:r>
+            <a:br/>
+            <a:r>
+              <a:rPr>
+                <a:solidFill>
+                  <a:srgbClr val="003B4F"/>
+                </a:solidFill>
+                <a:latin typeface="Courier"/>
+              </a:rPr>
+              <a:t>    </a:t>
+            </a:r>
+            <a:r>
+              <a:rPr>
+                <a:solidFill>
+                  <a:srgbClr val="657422"/>
+                </a:solidFill>
+                <a:latin typeface="Courier"/>
+              </a:rPr>
+              <a:t>values =</a:t>
+            </a:r>
+            <a:r>
+              <a:rPr>
+                <a:solidFill>
+                  <a:srgbClr val="003B4F"/>
+                </a:solidFill>
+                <a:latin typeface="Courier"/>
+              </a:rPr>
+              <a:t> </a:t>
+            </a:r>
+            <a:r>
+              <a:rPr>
+                <a:solidFill>
+                  <a:srgbClr val="4758AB"/>
+                </a:solidFill>
+                <a:latin typeface="Courier"/>
+              </a:rPr>
+              <a:t>c</a:t>
+            </a:r>
+            <a:r>
+              <a:rPr>
+                <a:solidFill>
+                  <a:srgbClr val="003B4F"/>
+                </a:solidFill>
+                <a:latin typeface="Courier"/>
+              </a:rPr>
+              <a:t>(</a:t>
+            </a:r>
+            <a:r>
+              <a:rPr>
+                <a:solidFill>
+                  <a:srgbClr val="657422"/>
+                </a:solidFill>
+                <a:latin typeface="Courier"/>
+              </a:rPr>
+              <a:t>shady =</a:t>
+            </a:r>
+            <a:r>
+              <a:rPr>
+                <a:solidFill>
+                  <a:srgbClr val="003B4F"/>
+                </a:solidFill>
+                <a:latin typeface="Courier"/>
+              </a:rPr>
+              <a:t> </a:t>
+            </a:r>
+            <a:r>
+              <a:rPr>
+                <a:solidFill>
+                  <a:srgbClr val="20794D"/>
+                </a:solidFill>
+                <a:latin typeface="Courier"/>
+              </a:rPr>
+              <a:t>"#2c7fb8"</a:t>
+            </a:r>
+            <a:r>
+              <a:rPr>
+                <a:solidFill>
+                  <a:srgbClr val="003B4F"/>
+                </a:solidFill>
+                <a:latin typeface="Courier"/>
+              </a:rPr>
+              <a:t>, </a:t>
+            </a:r>
+            <a:r>
+              <a:rPr>
+                <a:solidFill>
+                  <a:srgbClr val="657422"/>
+                </a:solidFill>
+                <a:latin typeface="Courier"/>
+              </a:rPr>
+              <a:t>sunny =</a:t>
+            </a:r>
+            <a:r>
+              <a:rPr>
+                <a:solidFill>
+                  <a:srgbClr val="003B4F"/>
+                </a:solidFill>
+                <a:latin typeface="Courier"/>
+              </a:rPr>
+              <a:t> </a:t>
+            </a:r>
+            <a:r>
+              <a:rPr>
+                <a:solidFill>
+                  <a:srgbClr val="20794D"/>
+                </a:solidFill>
+                <a:latin typeface="Courier"/>
+              </a:rPr>
+              <a:t>"#d95f0e"</a:t>
+            </a:r>
+            <a:r>
+              <a:rPr>
+                <a:solidFill>
+                  <a:srgbClr val="003B4F"/>
+                </a:solidFill>
+                <a:latin typeface="Courier"/>
+              </a:rPr>
+              <a:t>)</a:t>
+            </a:r>
+            <a:br/>
+            <a:r>
+              <a:rPr>
+                <a:solidFill>
+                  <a:srgbClr val="003B4F"/>
+                </a:solidFill>
+                <a:latin typeface="Courier"/>
+              </a:rPr>
+              <a:t>  ) </a:t>
+            </a:r>
+            <a:r>
+              <a:rPr>
+                <a:solidFill>
+                  <a:srgbClr val="5E5E5E"/>
+                </a:solidFill>
+                <a:latin typeface="Courier"/>
+              </a:rPr>
+              <a:t>+</a:t>
+            </a:r>
+            <a:br/>
+            <a:r>
+              <a:rPr>
+                <a:solidFill>
+                  <a:srgbClr val="003B4F"/>
+                </a:solidFill>
+                <a:latin typeface="Courier"/>
+              </a:rPr>
+              <a:t>  </a:t>
+            </a:r>
+            <a:r>
+              <a:rPr>
+                <a:solidFill>
+                  <a:srgbClr val="4758AB"/>
+                </a:solidFill>
+                <a:latin typeface="Courier"/>
+              </a:rPr>
+              <a:t>labs</a:t>
+            </a:r>
+            <a:r>
+              <a:rPr>
+                <a:solidFill>
+                  <a:srgbClr val="003B4F"/>
+                </a:solidFill>
+                <a:latin typeface="Courier"/>
+              </a:rPr>
+              <a:t>(</a:t>
+            </a:r>
+            <a:r>
+              <a:rPr>
+                <a:solidFill>
+                  <a:srgbClr val="657422"/>
+                </a:solidFill>
+                <a:latin typeface="Courier"/>
+              </a:rPr>
+              <a:t>x =</a:t>
+            </a:r>
+            <a:r>
+              <a:rPr>
+                <a:solidFill>
+                  <a:srgbClr val="003B4F"/>
+                </a:solidFill>
+                <a:latin typeface="Courier"/>
+              </a:rPr>
+              <a:t> </a:t>
+            </a:r>
+            <a:r>
+              <a:rPr>
+                <a:solidFill>
+                  <a:srgbClr val="20794D"/>
+                </a:solidFill>
+                <a:latin typeface="Courier"/>
+              </a:rPr>
+              <a:t>"Side of tree"</a:t>
+            </a:r>
+            <a:r>
+              <a:rPr>
+                <a:solidFill>
+                  <a:srgbClr val="003B4F"/>
+                </a:solidFill>
+                <a:latin typeface="Courier"/>
+              </a:rPr>
+              <a:t>, </a:t>
+            </a:r>
+            <a:r>
+              <a:rPr>
+                <a:solidFill>
+                  <a:srgbClr val="657422"/>
+                </a:solidFill>
+                <a:latin typeface="Courier"/>
+              </a:rPr>
+              <a:t>y =</a:t>
+            </a:r>
+            <a:r>
+              <a:rPr>
+                <a:solidFill>
+                  <a:srgbClr val="003B4F"/>
+                </a:solidFill>
+                <a:latin typeface="Courier"/>
+              </a:rPr>
+              <a:t> </a:t>
+            </a:r>
+            <a:r>
+              <a:rPr>
+                <a:solidFill>
+                  <a:srgbClr val="20794D"/>
+                </a:solidFill>
+                <a:latin typeface="Courier"/>
+              </a:rPr>
+              <a:t>"Needle length (mm)"</a:t>
+            </a:r>
+            <a:r>
+              <a:rPr>
+                <a:solidFill>
+                  <a:srgbClr val="003B4F"/>
+                </a:solidFill>
+                <a:latin typeface="Courier"/>
+              </a:rPr>
+              <a:t>) </a:t>
+            </a:r>
+            <a:r>
+              <a:rPr>
+                <a:solidFill>
+                  <a:srgbClr val="5E5E5E"/>
+                </a:solidFill>
+                <a:latin typeface="Courier"/>
+              </a:rPr>
+              <a:t>+</a:t>
+            </a:r>
+            <a:br/>
+            <a:r>
+              <a:rPr>
+                <a:solidFill>
+                  <a:srgbClr val="003B4F"/>
+                </a:solidFill>
+                <a:latin typeface="Courier"/>
+              </a:rPr>
+              <a:t>  </a:t>
+            </a:r>
+            <a:r>
+              <a:rPr>
+                <a:solidFill>
+                  <a:srgbClr val="4758AB"/>
+                </a:solidFill>
+                <a:latin typeface="Courier"/>
+              </a:rPr>
+              <a:t>theme_minimal</a:t>
+            </a:r>
+            <a:r>
+              <a:rPr>
+                <a:solidFill>
+                  <a:srgbClr val="003B4F"/>
+                </a:solidFill>
+                <a:latin typeface="Courier"/>
+              </a:rPr>
+              <a:t>(</a:t>
+            </a:r>
+            <a:r>
+              <a:rPr>
+                <a:solidFill>
+                  <a:srgbClr val="657422"/>
+                </a:solidFill>
+                <a:latin typeface="Courier"/>
+              </a:rPr>
+              <a:t>base_size =</a:t>
+            </a:r>
+            <a:r>
+              <a:rPr>
+                <a:solidFill>
+                  <a:srgbClr val="003B4F"/>
+                </a:solidFill>
+                <a:latin typeface="Courier"/>
+              </a:rPr>
+              <a:t> </a:t>
+            </a:r>
+            <a:r>
+              <a:rPr>
+                <a:solidFill>
+                  <a:srgbClr val="AD0000"/>
+                </a:solidFill>
+                <a:latin typeface="Courier"/>
+              </a:rPr>
+              <a:t>9</a:t>
+            </a:r>
+            <a:r>
+              <a:rPr>
+                <a:solidFill>
+                  <a:srgbClr val="003B4F"/>
+                </a:solidFill>
+                <a:latin typeface="Courier"/>
+              </a:rPr>
+              <a:t>)</a:t>
+            </a:r>
+          </a:p>
+        </p:txBody>
+      </p:sp>
+      <p:pic>
+        <p:nvPicPr>
+          <p:cNvPr descr="graphing_effectively_lecture_files/figure-pptx/graphing-effectively-20-1.png" id="0" name="Picture 1"/>
+          <p:cNvPicPr>
+            <a:picLocks noGrp="1" noChangeAspect="1"/>
+          </p:cNvPicPr>
+          <p:nvPr/>
+        </p:nvPicPr>
+        <p:blipFill>
+          <a:blip r:embed="rId2"/>
+          <a:stretch>
+            <a:fillRect/>
+          </a:stretch>
+        </p:blipFill>
+        <p:spPr bwMode="auto">
+          <a:xfrm>
+            <a:off x="431800" y="1270000"/>
+            <a:ext cx="3810000" cy="3302000"/>
+          </a:xfrm>
+          <a:prstGeom prst="rect">
+            <a:avLst/>
+          </a:prstGeom>
+          <a:noFill/>
+          <a:ln w="9525">
+            <a:noFill/>
+            <a:headEnd/>
+            <a:tailEnd/>
+          </a:ln>
+        </p:spPr>
+      </p:pic>
+      <p:sp>
+        <p:nvSpPr>
+          <p:cNvPr id="5" name="Text Placeholder 4"/>
+          <p:cNvSpPr>
+            <a:spLocks noGrp="1"/>
+          </p:cNvSpPr>
+          <p:nvPr>
+            <p:ph idx="3" sz="quarter" type="body"/>
+          </p:nvPr>
+        </p:nvSpPr>
+        <p:spPr/>
+        <p:txBody>
+          <a:bodyPr/>
+          <a:lstStyle/>
+          <a:p>
+            <a:pPr lvl="0" indent="0" marL="1270000">
+              <a:buNone/>
+            </a:pPr>
+            <a:r>
+              <a:rPr sz="2000" b="1"/>
+              <a:t>Tip</a:t>
+            </a:r>
+          </a:p>
+          <a:p>
+            <a:pPr lvl="0" indent="0" marL="1270000">
+              <a:buNone/>
+            </a:pPr>
+            <a:r>
+              <a:rPr sz="2000" b="1"/>
+              <a:t>🖐 Notice</a:t>
+            </a:r>
+          </a:p>
+          <a:p>
+            <a:pPr lvl="0" indent="0" marL="1270000">
+              <a:buNone/>
+            </a:pPr>
+            <a:r>
+              <a:rPr sz="2000"/>
+              <a:t>Same three arguments, same pattern — </a:t>
+            </a:r>
+            <a:r>
+              <a:rPr sz="2000">
+                <a:latin typeface="Courier"/>
+              </a:rPr>
+              <a:t>scale_fill_manual()</a:t>
+            </a:r>
+            <a:r>
+              <a:rPr sz="2000"/>
+              <a:t> is </a:t>
+            </a:r>
+            <a:r>
+              <a:rPr sz="2000">
+                <a:latin typeface="Courier"/>
+              </a:rPr>
+              <a:t>scale_color_manual()</a:t>
+            </a:r>
+            <a:r>
+              <a:rPr sz="2000"/>
+              <a:t> for the </a:t>
+            </a:r>
+            <a:r>
+              <a:rPr sz="2000">
+                <a:latin typeface="Courier"/>
+              </a:rPr>
+              <a:t>fill</a:t>
+            </a:r>
+            <a:r>
+              <a:rPr sz="2000"/>
+              <a:t> aesthetic instead of </a:t>
+            </a:r>
+            <a:r>
+              <a:rPr sz="2000">
+                <a:latin typeface="Courier"/>
+              </a:rPr>
+              <a:t>color</a:t>
+            </a:r>
+            <a:r>
+              <a:rPr sz="2000"/>
+              <a:t>. A boxplot’s box is </a:t>
+            </a:r>
+            <a:r>
+              <a:rPr sz="2000">
+                <a:latin typeface="Courier"/>
+              </a:rPr>
+              <a:t>fill</a:t>
+            </a:r>
+            <a:r>
+              <a:rPr sz="2000"/>
+              <a:t>; its jittered points (if you added </a:t>
+            </a:r>
+            <a:r>
+              <a:rPr sz="2000">
+                <a:latin typeface="Courier"/>
+              </a:rPr>
+              <a:t>geom_point(color = ...)</a:t>
+            </a:r>
+            <a:r>
+              <a:rPr sz="2000"/>
+              <a:t>) would be </a:t>
+            </a:r>
+            <a:r>
+              <a:rPr sz="2000">
+                <a:latin typeface="Courier"/>
+              </a:rPr>
+              <a:t>color</a:t>
+            </a:r>
+            <a:r>
+              <a:rPr sz="2000"/>
+              <a:t>. A plot can need both at once.</a:t>
+            </a:r>
+          </a:p>
+        </p:txBody>
+      </p:sp>
+    </p:spTree>
+  </p:cSld>
+</p:sld>
+</file>
+
+<file path=ppt/slides/slide35.xml><?xml version="1.0" encoding="utf-8"?>
+<p:sld xmlns:a="http://schemas.openxmlformats.org/drawingml/2006/main" xmlns:r="http://schemas.openxmlformats.org/officeDocument/2006/relationships" xmlns:p="http://schemas.openxmlformats.org/presentationml/2006/main">
+  <p:cSld>
+    <p:spTree>
+      <p:nvGrpSpPr>
+        <p:cNvPr id="1" name=""/>
+        <p:cNvGrpSpPr/>
+        <p:nvPr/>
+      </p:nvGrpSpPr>
+      <p:grpSpPr>
+        <a:xfrm>
+          <a:off x="0" y="0"/>
+          <a:ext cx="0" cy="0"/>
+          <a:chOff x="0" y="0"/>
+          <a:chExt cx="0" cy="0"/>
+        </a:xfrm>
+      </p:grpSpPr>
+      <p:sp>
+        <p:nvSpPr>
+          <p:cNvPr id="2" name="Title 1"/>
+          <p:cNvSpPr>
+            <a:spLocks noGrp="1"/>
+          </p:cNvSpPr>
+          <p:nvPr>
+            <p:ph type="title"/>
+          </p:nvPr>
+        </p:nvSpPr>
+        <p:spPr>
+          <a:xfrm>
+            <a:off x="0" y="0"/>
+            <a:ext cx="9144000" cy="602780"/>
+          </a:xfrm>
+          <a:solidFill>
+            <a:srgbClr val="70121D"/>
+          </a:solidFill>
+        </p:spPr>
+        <p:txBody>
+          <a:bodyPr/>
+          <a:lstStyle/>
+          <a:p>
+            <a:pPr lvl="0" indent="0" marL="0">
+              <a:buNone/>
+            </a:pPr>
+            <a:r>
+              <a:rPr/>
+              <a:t>Wrap-up</a:t>
+            </a:r>
+          </a:p>
+        </p:txBody>
+      </p:sp>
+      <p:sp>
+        <p:nvSpPr>
+          <p:cNvPr id="3" name="Content Placeholder 2"/>
+          <p:cNvSpPr>
+            <a:spLocks noGrp="1"/>
+          </p:cNvSpPr>
+          <p:nvPr>
+            <p:ph idx="1" sz="half"/>
+          </p:nvPr>
+        </p:nvSpPr>
+        <p:spPr/>
+        <p:txBody>
+          <a:bodyPr/>
+          <a:lstStyle/>
+          <a:p>
+            <a:pPr lvl="0" indent="0" marL="0">
+              <a:buNone/>
+            </a:pPr>
+            <a:r>
+              <a:rPr/>
+              <a:t>Today you:</a:t>
+            </a:r>
+          </a:p>
+          <a:p>
+            <a:pPr lvl="0"/>
+            <a:r>
+              <a:rPr/>
+              <a:t>Built boxplots with raw points overlaid, not hidden</a:t>
+            </a:r>
+          </a:p>
+          <a:p>
+            <a:pPr lvl="0"/>
+            <a:r>
+              <a:rPr/>
+              <a:t>Wrote real axis labels, titles, and legend titles with </a:t>
+            </a:r>
+            <a:r>
+              <a:rPr>
+                <a:latin typeface="Courier"/>
+              </a:rPr>
+              <a:t>labs()</a:t>
+            </a:r>
+            <a:r>
+              <a:rPr/>
+              <a:t> — never shipped a default column name</a:t>
+            </a:r>
+          </a:p>
+          <a:p>
+            <a:pPr lvl="0"/>
+            <a:r>
+              <a:rPr/>
+              <a:t>Mapped a third variable with </a:t>
+            </a:r>
+            <a:r>
+              <a:rPr>
+                <a:latin typeface="Courier"/>
+              </a:rPr>
+              <a:t>color =</a:t>
+            </a:r>
+            <a:r>
+              <a:rPr/>
+              <a:t> / </a:t>
+            </a:r>
+            <a:r>
+              <a:rPr>
+                <a:latin typeface="Courier"/>
+              </a:rPr>
+              <a:t>fill =</a:t>
+            </a:r>
+            <a:r>
+              <a:rPr/>
+              <a:t> inside </a:t>
+            </a:r>
+            <a:r>
+              <a:rPr>
+                <a:latin typeface="Courier"/>
+              </a:rPr>
+              <a:t>aes()</a:t>
+            </a:r>
+          </a:p>
+          <a:p>
+            <a:pPr lvl="0"/>
+            <a:r>
+              <a:rPr/>
+              <a:t>Built histograms and density curves to see a whole distribution’s shape</a:t>
+            </a:r>
+          </a:p>
+          <a:p>
+            <a:pPr lvl="0"/>
+            <a:r>
+              <a:rPr/>
+              <a:t>Plotted mean ± SE directly with </a:t>
+            </a:r>
+            <a:r>
+              <a:rPr>
+                <a:latin typeface="Courier"/>
+              </a:rPr>
+              <a:t>stat_summary()</a:t>
+            </a:r>
+            <a:r>
+              <a:rPr/>
+              <a:t> — and saw that an error bar is only as honest as the rows you feed it</a:t>
+            </a:r>
+          </a:p>
+          <a:p>
+            <a:pPr lvl="0"/>
+            <a:r>
+              <a:rPr/>
+              <a:t>Faceted a plot with </a:t>
+            </a:r>
+            <a:r>
+              <a:rPr>
+                <a:latin typeface="Courier"/>
+              </a:rPr>
+              <a:t>facet_wrap()</a:t>
+            </a:r>
+            <a:r>
+              <a:rPr/>
+              <a:t> to check every group at once</a:t>
+            </a:r>
+          </a:p>
+          <a:p>
+            <a:pPr lvl="0"/>
+            <a:r>
+              <a:rPr/>
+              <a:t>Compared themes, and saved a real, correctly-sized figure with </a:t>
+            </a:r>
+            <a:r>
+              <a:rPr>
+                <a:latin typeface="Courier"/>
+              </a:rPr>
+              <a:t>ggsave()</a:t>
+            </a:r>
+          </a:p>
+          <a:p>
+            <a:pPr lvl="0"/>
+            <a:r>
+              <a:rPr i="1"/>
+              <a:t>(Advanced)</a:t>
+            </a:r>
+            <a:r>
+              <a:rPr/>
+              <a:t> Set exact colors and legend text by hand with </a:t>
+            </a:r>
+            <a:r>
+              <a:rPr>
+                <a:latin typeface="Courier"/>
+              </a:rPr>
+              <a:t>scale_color_manual()</a:t>
+            </a:r>
+            <a:r>
+              <a:rPr/>
+              <a:t> / </a:t>
+            </a:r>
+            <a:r>
+              <a:rPr>
+                <a:latin typeface="Courier"/>
+              </a:rPr>
+              <a:t>scale_fill_manual()</a:t>
+            </a:r>
+          </a:p>
+          <a:p>
+            <a:pPr lvl="0" indent="0" marL="1270000">
+              <a:buNone/>
+            </a:pPr>
+            <a:r>
+              <a:rPr sz="2000" b="1"/>
+              <a:t>Tip</a:t>
+            </a:r>
+          </a:p>
+          <a:p>
+            <a:pPr lvl="0" indent="0" marL="1270000">
+              <a:buNone/>
+            </a:pPr>
+            <a:r>
+              <a:rPr sz="2000" b="1"/>
+              <a:t>🖐 Before next class</a:t>
+            </a:r>
+          </a:p>
+          <a:p>
+            <a:pPr lvl="0" indent="0" marL="1270000">
+              <a:buNone/>
+            </a:pPr>
+            <a:r>
+              <a:rPr sz="2000"/>
+              <a:t>Finish the worksheet: build a mean ± SE plot faceted by </a:t>
+            </a:r>
+            <a:r>
+              <a:rPr sz="2000">
+                <a:latin typeface="Courier"/>
+              </a:rPr>
+              <a:t>team</a:t>
+            </a:r>
+            <a:r>
+              <a:rPr sz="2000"/>
+              <a:t>, pick a theme, and save it to </a:t>
+            </a:r>
+            <a:r>
+              <a:rPr sz="2000">
+                <a:latin typeface="Courier"/>
+              </a:rPr>
+              <a:t>figures/</a:t>
+            </a:r>
+            <a:r>
+              <a:rPr sz="2000"/>
+              <a:t> at 3×3in, 300 dpi.</a:t>
+            </a:r>
+          </a:p>
+        </p:txBody>
+      </p:sp>
+      <p:sp>
+        <p:nvSpPr>
+          <p:cNvPr id="4" name="Content Placeholder 3"/>
+          <p:cNvSpPr>
+            <a:spLocks noGrp="1"/>
+          </p:cNvSpPr>
+          <p:nvPr>
+            <p:ph idx="2" sz="half"/>
+          </p:nvPr>
+        </p:nvSpPr>
+        <p:spPr/>
+        <p:txBody>
+          <a:bodyPr/>
+          <a:lstStyle/>
+          <a:p>
+            <a:pPr lvl="0" indent="0" marL="1270000">
+              <a:buNone/>
+            </a:pPr>
+            <a:r>
+              <a:rPr sz="2000" b="1"/>
+              <a:t>Note</a:t>
+            </a:r>
+          </a:p>
+          <a:p>
+            <a:pPr lvl="0" indent="0" marL="1270000">
+              <a:buNone/>
+            </a:pPr>
+            <a:r>
+              <a:rPr sz="2000" b="1"/>
+              <a:t>Where this leads</a:t>
+            </a:r>
+          </a:p>
+          <a:p>
+            <a:pPr lvl="0" indent="0" marL="1270000">
+              <a:buNone/>
+            </a:pPr>
+            <a:r>
+              <a:rPr sz="2000"/>
+              <a:t>You can now import, wrangle, describe, and visualize a dataset end to end. That full pipeline — raw data → clean → summarize → visualize — is the foundation every later statistical test builds on.</a:t>
+            </a:r>
+          </a:p>
+        </p:txBody>
+      </p:sp>
+    </p:spTree>
+  </p:cSld>
+</p:sld>
+</file>
+
+<file path=ppt/slides/slide36.xml><?xml version="1.0" encoding="utf-8"?>
 <p:sld xmlns:a="http://schemas.openxmlformats.org/drawingml/2006/main" xmlns:r="http://schemas.openxmlformats.org/officeDocument/2006/relationships" xmlns:p="http://schemas.openxmlformats.org/presentationml/2006/main">
   <p:cSld>
     <p:spTree>
@@ -15945,7 +17234,7 @@
                 </a:solidFill>
                 <a:latin typeface="Courier"/>
               </a:rPr>
-              <a:t>"data/pine_needles.csv"</a:t>
+              <a:t>"data/pine_data.csv"</a:t>
             </a:r>
             <a:r>
               <a:rPr>
@@ -15955,6 +17244,17 @@
                 <a:latin typeface="Courier"/>
               </a:rPr>
               <a:t>)</a:t>
+            </a:r>
+          </a:p>
+          <a:p>
+            <a:pPr lvl="0" indent="0" marL="0">
+              <a:buNone/>
+            </a:pPr>
+            <a:r>
+              <a:rPr>
+                <a:hlinkClick r:id="rId2"/>
+              </a:rPr>
+              <a:t>📥 Download the data</a:t>
             </a:r>
           </a:p>
           <a:p>
@@ -16082,7 +17382,7 @@
                 </a:solidFill>
                 <a:latin typeface="Courier"/>
               </a:rPr>
-              <a:t> n_s, </a:t>
+              <a:t> side, </a:t>
             </a:r>
             <a:r>
               <a:rPr>
@@ -16100,7 +17400,7 @@
                 </a:solidFill>
                 <a:latin typeface="Courier"/>
               </a:rPr>
-              <a:t> length_mm)) </a:t>
+              <a:t> needle_length_mm)) </a:t>
             </a:r>
             <a:r>
               <a:rPr>
@@ -16330,7 +17630,7 @@
                 </a:solidFill>
                 <a:latin typeface="Courier"/>
               </a:rPr>
-              <a:t> n_s, </a:t>
+              <a:t> side, </a:t>
             </a:r>
             <a:r>
               <a:rPr>
@@ -16348,7 +17648,7 @@
                 </a:solidFill>
                 <a:latin typeface="Courier"/>
               </a:rPr>
-              <a:t> length_mm, </a:t>
+              <a:t> needle_length_mm, </a:t>
             </a:r>
             <a:r>
               <a:rPr>
@@ -16366,7 +17666,7 @@
                 </a:solidFill>
                 <a:latin typeface="Courier"/>
               </a:rPr>
-              <a:t> n_s)) </a:t>
+              <a:t> side)) </a:t>
             </a:r>
             <a:r>
               <a:rPr>
@@ -16595,7 +17895,7 @@
                 </a:solidFill>
                 <a:latin typeface="Courier"/>
               </a:rPr>
-              <a:t>"Side (n = shady, s = sunny)"</a:t>
+              <a:t>"Side of tree"</a:t>
             </a:r>
             <a:r>
               <a:rPr>
@@ -16861,7 +18161,7 @@
       </p:sp>
       <p:pic>
         <p:nvPicPr>
-          <p:cNvPr descr="graphing_effectively_lecture_files/figure-pptx/unnamed-chunk-3-1.png" id="0" name="Picture 1"/>
+          <p:cNvPr descr="graphing_effectively_lecture_files/figure-pptx/graphing-effectively-03-1.png" id="0" name="Picture 1"/>
           <p:cNvPicPr>
             <a:picLocks noGrp="1" noChangeAspect="1"/>
           </p:cNvPicPr>
@@ -17052,7 +18352,7 @@
             </a:r>
             <a:r>
               <a:rPr sz="2000"/>
-              <a:t> With only 6 needles per side per tree, does a boxplot alone show you everything? What might it hide?</a:t>
+              <a:t> With only 8 needles per side per tree, does a boxplot alone show you everything? What might it hide?</a:t>
             </a:r>
           </a:p>
         </p:txBody>
@@ -17158,7 +18458,7 @@
                 </a:solidFill>
                 <a:latin typeface="Courier"/>
               </a:rPr>
-              <a:t> n_s, </a:t>
+              <a:t> side, </a:t>
             </a:r>
             <a:r>
               <a:rPr>
@@ -17176,7 +18476,7 @@
                 </a:solidFill>
                 <a:latin typeface="Courier"/>
               </a:rPr>
-              <a:t> length_mm, </a:t>
+              <a:t> needle_length_mm, </a:t>
             </a:r>
             <a:r>
               <a:rPr>
@@ -17194,7 +18494,7 @@
                 </a:solidFill>
                 <a:latin typeface="Courier"/>
               </a:rPr>
-              <a:t> n_s)) </a:t>
+              <a:t> side)) </a:t>
             </a:r>
             <a:r>
               <a:rPr>
@@ -17414,42 +18714,6 @@
                 <a:latin typeface="Courier"/>
               </a:rPr>
               <a:t>0.15</a:t>
-            </a:r>
-            <a:r>
-              <a:rPr>
-                <a:solidFill>
-                  <a:srgbClr val="003B4F"/>
-                </a:solidFill>
-                <a:latin typeface="Courier"/>
-              </a:rPr>
-              <a:t>, </a:t>
-            </a:r>
-            <a:r>
-              <a:rPr>
-                <a:solidFill>
-                  <a:srgbClr val="657422"/>
-                </a:solidFill>
-                <a:latin typeface="Courier"/>
-              </a:rPr>
-              <a:t>seed =</a:t>
-            </a:r>
-            <a:r>
-              <a:rPr>
-                <a:solidFill>
-                  <a:srgbClr val="003B4F"/>
-                </a:solidFill>
-                <a:latin typeface="Courier"/>
-              </a:rPr>
-              <a:t> </a:t>
-            </a:r>
-            <a:r>
-              <a:rPr>
-                <a:solidFill>
-                  <a:srgbClr val="AD0000"/>
-                </a:solidFill>
-                <a:latin typeface="Courier"/>
-              </a:rPr>
-              <a:t>42</a:t>
             </a:r>
             <a:r>
               <a:rPr>
@@ -17937,7 +19201,7 @@
       </p:sp>
       <p:pic>
         <p:nvPicPr>
-          <p:cNvPr descr="graphing_effectively_lecture_files/figure-pptx/unnamed-chunk-4-1.png" id="0" name="Picture 1"/>
+          <p:cNvPr descr="graphing_effectively_lecture_files/figure-pptx/graphing-effectively-04-1.png" id="0" name="Picture 1"/>
           <p:cNvPicPr>
             <a:picLocks noGrp="1" noChangeAspect="1"/>
           </p:cNvPicPr>
@@ -17990,19 +19254,6 @@
             <a:r>
               <a:rPr/>
               <a:t> spreads points sideways so they don’t overlap</a:t>
-            </a:r>
-          </a:p>
-          <a:p>
-            <a:pPr lvl="0"/>
-            <a:r>
-              <a:rPr>
-                <a:latin typeface="Courier"/>
-              </a:rPr>
-              <a:t>seed = 42</a:t>
-            </a:r>
-            <a:r>
-              <a:rPr/>
-              <a:t> — same jitter layout every time you render</a:t>
             </a:r>
           </a:p>
           <a:p>

--- a/docs/content/graphing_effectively/graphing_effectively_lecture.pptx
+++ b/docs/content/graphing_effectively/graphing_effectively_lecture.pptx
@@ -41,6 +41,7 @@
     <p:sldId id="289" r:id="rId35"/>
     <p:sldId id="290" r:id="rId36"/>
     <p:sldId id="291" r:id="rId37"/>
+    <p:sldId id="292" r:id="rId38"/>
   </p:sldIdLst>
   <p:sldSz cx="9144000" cy="5143500" type="screen16x9"/>
   <p:notesSz cx="6858000" cy="9144000"/>
@@ -5046,6 +5047,35 @@
               <a:t> never touches the data or the statistics — only what a reader sees written on the plot. Change it freely.</a:t>
             </a:r>
           </a:p>
+          <a:p>
+            <a:pPr lvl="0" indent="0" marL="1270000">
+              <a:buNone/>
+            </a:pPr>
+            <a:r>
+              <a:rPr sz="2000" b="1"/>
+              <a:t>Note</a:t>
+            </a:r>
+          </a:p>
+          <a:p>
+            <a:pPr lvl="0" indent="0" marL="1270000">
+              <a:buNone/>
+            </a:pPr>
+            <a:r>
+              <a:rPr sz="2000" b="1"/>
+              <a:t>📖 Reference</a:t>
+            </a:r>
+          </a:p>
+          <a:p>
+            <a:pPr lvl="0" indent="0" marL="1270000">
+              <a:buNone/>
+            </a:pPr>
+            <a:r>
+              <a:rPr sz="2000">
+                <a:hlinkClick r:id="rId3"/>
+              </a:rPr>
+              <a:t>📖 R4DS §11.1 — Labels</a:t>
+            </a:r>
+          </a:p>
         </p:txBody>
       </p:sp>
     </p:spTree>
@@ -6475,6 +6505,35 @@
               <a:t> mistakes.</a:t>
             </a:r>
           </a:p>
+          <a:p>
+            <a:pPr lvl="0" indent="0" marL="1270000">
+              <a:buNone/>
+            </a:pPr>
+            <a:r>
+              <a:rPr sz="2000" b="1"/>
+              <a:t>Note</a:t>
+            </a:r>
+          </a:p>
+          <a:p>
+            <a:pPr lvl="0" indent="0" marL="1270000">
+              <a:buNone/>
+            </a:pPr>
+            <a:r>
+              <a:rPr sz="2000" b="1"/>
+              <a:t>📖 Reference</a:t>
+            </a:r>
+          </a:p>
+          <a:p>
+            <a:pPr lvl="0" indent="0" marL="1270000">
+              <a:buNone/>
+            </a:pPr>
+            <a:r>
+              <a:rPr sz="2000">
+                <a:hlinkClick r:id="rId3"/>
+              </a:rPr>
+              <a:t>📖 R4DS §9.1 — Aesthetic mappings</a:t>
+            </a:r>
+          </a:p>
         </p:txBody>
       </p:sp>
     </p:spTree>
@@ -7249,6 +7308,44 @@
               <a:t>. Which tells the real story?</a:t>
             </a:r>
           </a:p>
+          <a:p>
+            <a:pPr lvl="0" indent="0" marL="1270000">
+              <a:buNone/>
+            </a:pPr>
+            <a:r>
+              <a:rPr sz="2000" b="1"/>
+              <a:t>Note</a:t>
+            </a:r>
+          </a:p>
+          <a:p>
+            <a:pPr lvl="0" indent="0" marL="1270000">
+              <a:buNone/>
+            </a:pPr>
+            <a:r>
+              <a:rPr sz="2000" b="1"/>
+              <a:t>📖 Reference</a:t>
+            </a:r>
+          </a:p>
+          <a:p>
+            <a:pPr lvl="0" indent="0" marL="1270000">
+              <a:buNone/>
+            </a:pPr>
+            <a:r>
+              <a:rPr sz="2000"/>
+              <a:t>Whitlock &amp; Schluter, Ch. 2 — Displaying Data, on frequency distributions and choosing bin width.</a:t>
+            </a:r>
+          </a:p>
+          <a:p>
+            <a:pPr lvl="0" indent="0" marL="1270000">
+              <a:buNone/>
+            </a:pPr>
+            <a:r>
+              <a:rPr sz="2000">
+                <a:hlinkClick r:id="rId3"/>
+              </a:rPr>
+              <a:t>📖 R4DS §10.3 — Variation</a:t>
+            </a:r>
+          </a:p>
         </p:txBody>
       </p:sp>
     </p:spTree>
@@ -8014,6 +8111,35 @@
               <a:t>Overlapping histograms on one panel are hard to read. Faceting stacks them into separate panels sharing an x-axis — same comparison, much clearer.</a:t>
             </a:r>
           </a:p>
+          <a:p>
+            <a:pPr lvl="0" indent="0" marL="1270000">
+              <a:buNone/>
+            </a:pPr>
+            <a:r>
+              <a:rPr sz="2000" b="1"/>
+              <a:t>Note</a:t>
+            </a:r>
+          </a:p>
+          <a:p>
+            <a:pPr lvl="0" indent="0" marL="1270000">
+              <a:buNone/>
+            </a:pPr>
+            <a:r>
+              <a:rPr sz="2000" b="1"/>
+              <a:t>📖 Reference</a:t>
+            </a:r>
+          </a:p>
+          <a:p>
+            <a:pPr lvl="0" indent="0" marL="1270000">
+              <a:buNone/>
+            </a:pPr>
+            <a:r>
+              <a:rPr sz="2000">
+                <a:hlinkClick r:id="rId3"/>
+              </a:rPr>
+              <a:t>📖 R4DS §9.5 — Facets</a:t>
+            </a:r>
+          </a:p>
         </p:txBody>
       </p:sp>
     </p:spTree>
@@ -8598,6 +8724,41 @@
             <a:r>
               <a:rPr sz="2000"/>
               <a:t>A density curve is a smoothed histogram, rescaled so the area under each curve sums to 1. It overlays cleanly for group comparisons — no faceting required, at the cost of hiding the raw bin counts.</a:t>
+            </a:r>
+          </a:p>
+          <a:p>
+            <a:pPr lvl="0" indent="0" marL="1270000">
+              <a:buNone/>
+            </a:pPr>
+            <a:r>
+              <a:rPr sz="2000" b="1"/>
+              <a:t>Note</a:t>
+            </a:r>
+          </a:p>
+          <a:p>
+            <a:pPr lvl="0" indent="0" marL="1270000">
+              <a:buNone/>
+            </a:pPr>
+            <a:r>
+              <a:rPr sz="2000" b="1"/>
+              <a:t>📖 Reference</a:t>
+            </a:r>
+          </a:p>
+          <a:p>
+            <a:pPr lvl="0" indent="0" marL="1270000">
+              <a:buNone/>
+            </a:pPr>
+            <a:r>
+              <a:rPr sz="2000"/>
+              <a:t>Gotelli &amp; Ellison, </a:t>
+            </a:r>
+            <a:r>
+              <a:rPr sz="2000" i="1"/>
+              <a:t>A Primer of Ecological Statistics</a:t>
+            </a:r>
+            <a:r>
+              <a:rPr sz="2000"/>
+              <a:t>, Ch. 3 — Summary Statistics, on the shape of a distribution behind any mean and SD you report.</a:t>
             </a:r>
           </a:p>
         </p:txBody>
@@ -10298,6 +10459,38 @@
               <a:t> error bars from Describing Your Data — the ones that treat 8 needles from one tree as 8 independent facts.</a:t>
             </a:r>
           </a:p>
+          <a:p>
+            <a:pPr lvl="0" indent="0" marL="1270000">
+              <a:buNone/>
+            </a:pPr>
+            <a:r>
+              <a:rPr sz="2000" b="1"/>
+              <a:t>Note</a:t>
+            </a:r>
+          </a:p>
+          <a:p>
+            <a:pPr lvl="0" indent="0" marL="1270000">
+              <a:buNone/>
+            </a:pPr>
+            <a:r>
+              <a:rPr sz="2000" b="1"/>
+              <a:t>📖 Reference</a:t>
+            </a:r>
+          </a:p>
+          <a:p>
+            <a:pPr lvl="0" indent="0" marL="1270000">
+              <a:buNone/>
+            </a:pPr>
+            <a:r>
+              <a:rPr sz="2000"/>
+              <a:t>Whitlock &amp; Schluter, Ch. 4 — Estimating with Uncertainty, on what an error bar is an estimate of.</a:t>
+            </a:r>
+            <a:br/>
+            <a:r>
+              <a:rPr sz="2000"/>
+              <a:t>Gotelli &amp; Ellison, Ch. 6 — Designing Successful Field Studies, on why independence decides which rows you may average.</a:t>
+            </a:r>
+          </a:p>
         </p:txBody>
       </p:sp>
     </p:spTree>
@@ -12446,6 +12639,17 @@
               <a:t>?”</a:t>
             </a:r>
           </a:p>
+          <a:p>
+            <a:pPr lvl="0" indent="0" marL="1270000">
+              <a:buNone/>
+            </a:pPr>
+            <a:r>
+              <a:rPr sz="2000">
+                <a:hlinkClick r:id="rId3"/>
+              </a:rPr>
+              <a:t>📖 R4DS §9.5 — Facets</a:t>
+            </a:r>
+          </a:p>
         </p:txBody>
       </p:sp>
     </p:spTree>
@@ -12904,6 +13108,35 @@
               <a:t> only — never the data or the statistics underneath. Pick one and use it consistently across a report.</a:t>
             </a:r>
           </a:p>
+          <a:p>
+            <a:pPr lvl="0" indent="0" marL="1270000">
+              <a:buNone/>
+            </a:pPr>
+            <a:r>
+              <a:rPr sz="2000" b="1"/>
+              <a:t>Note</a:t>
+            </a:r>
+          </a:p>
+          <a:p>
+            <a:pPr lvl="0" indent="0" marL="1270000">
+              <a:buNone/>
+            </a:pPr>
+            <a:r>
+              <a:rPr sz="2000" b="1"/>
+              <a:t>📖 Reference</a:t>
+            </a:r>
+          </a:p>
+          <a:p>
+            <a:pPr lvl="0" indent="0" marL="1270000">
+              <a:buNone/>
+            </a:pPr>
+            <a:r>
+              <a:rPr sz="2000">
+                <a:hlinkClick r:id="rId4"/>
+              </a:rPr>
+              <a:t>📖 R4DS §11.5 — Themes</a:t>
+            </a:r>
+          </a:p>
         </p:txBody>
       </p:sp>
     </p:spTree>
@@ -13451,6 +13684,44 @@
             <a:r>
               <a:rPr sz="2000"/>
               <a:t> guess gives you a plot sized for your screen, not for a report or a poster.</a:t>
+            </a:r>
+          </a:p>
+          <a:p>
+            <a:pPr lvl="0" indent="0" marL="1270000">
+              <a:buNone/>
+            </a:pPr>
+            <a:r>
+              <a:rPr sz="2000" b="1"/>
+              <a:t>Note</a:t>
+            </a:r>
+          </a:p>
+          <a:p>
+            <a:pPr lvl="0" indent="0" marL="1270000">
+              <a:buNone/>
+            </a:pPr>
+            <a:r>
+              <a:rPr sz="2000" b="1"/>
+              <a:t>📖 Reference</a:t>
+            </a:r>
+          </a:p>
+          <a:p>
+            <a:pPr lvl="0" indent="0" marL="1270000">
+              <a:buNone/>
+            </a:pPr>
+            <a:r>
+              <a:rPr sz="2000"/>
+              <a:t>Whitlock &amp; Schluter, Ch. 2 — Displaying Data, on what a figure has to carry to stand on its own in a report.</a:t>
+            </a:r>
+          </a:p>
+          <a:p>
+            <a:pPr lvl="0" indent="0" marL="1270000">
+              <a:buNone/>
+            </a:pPr>
+            <a:r>
+              <a:rPr sz="2000">
+                <a:hlinkClick r:id="rId2"/>
+              </a:rPr>
+              <a:t>📖 R4DS §11 — Communication</a:t>
             </a:r>
           </a:p>
         </p:txBody>
@@ -15076,6 +15347,21 @@
               <a:t>.</a:t>
             </a:r>
           </a:p>
+          <a:p>
+            <a:pPr lvl="0" indent="0" marL="1270000">
+              <a:buNone/>
+            </a:pPr>
+            <a:r>
+              <a:rPr sz="2000">
+                <a:hlinkClick r:id="rId3"/>
+              </a:rPr>
+              <a:t>📖 R4DS §11.4 — Scales</a:t>
+            </a:r>
+            <a:r>
+              <a:rPr sz="2000"/>
+              <a:t>, including the ColorBrewer palettes.</a:t>
+            </a:r>
+          </a:p>
         </p:txBody>
       </p:sp>
     </p:spTree>
@@ -16843,6 +17129,312 @@
         <p:spPr>
           <a:xfrm>
             <a:off x="0" y="0"/>
+            <a:ext cx="9144000" cy="602780"/>
+          </a:xfrm>
+          <a:solidFill>
+            <a:srgbClr val="70121D"/>
+          </a:solidFill>
+        </p:spPr>
+        <p:txBody>
+          <a:bodyPr/>
+          <a:lstStyle/>
+          <a:p>
+            <a:pPr lvl="0" indent="0" marL="0">
+              <a:buNone/>
+            </a:pPr>
+            <a:r>
+              <a:rPr/>
+              <a:t>Readings</a:t>
+            </a:r>
+          </a:p>
+        </p:txBody>
+      </p:sp>
+      <p:sp>
+        <p:nvSpPr>
+          <p:cNvPr id="3" name="Content Placeholder 2"/>
+          <p:cNvSpPr>
+            <a:spLocks noGrp="1"/>
+          </p:cNvSpPr>
+          <p:nvPr>
+            <p:ph idx="1" sz="half"/>
+          </p:nvPr>
+        </p:nvSpPr>
+        <p:spPr/>
+        <p:txBody>
+          <a:bodyPr/>
+          <a:lstStyle/>
+          <a:p>
+            <a:pPr lvl="0" indent="0" marL="0">
+              <a:buNone/>
+            </a:pPr>
+            <a:r>
+              <a:rPr b="1"/>
+              <a:t>Before next class</a:t>
+            </a:r>
+            <a:r>
+              <a:rPr/>
+              <a:t> — chapter PDFs are posted on </a:t>
+            </a:r>
+            <a:r>
+              <a:rPr b="1"/>
+              <a:t>Canvas</a:t>
+            </a:r>
+            <a:r>
+              <a:rPr/>
+              <a:t>:</a:t>
+            </a:r>
+          </a:p>
+          <a:p>
+            <a:pPr lvl="0"/>
+            <a:r>
+              <a:rPr b="1"/>
+              <a:t>Whitlock &amp; Schluter</a:t>
+            </a:r>
+            <a:r>
+              <a:rPr/>
+              <a:t>, </a:t>
+            </a:r>
+            <a:r>
+              <a:rPr i="1"/>
+              <a:t>The Analysis of Biological Data</a:t>
+            </a:r>
+            <a:r>
+              <a:rPr/>
+              <a:t> — </a:t>
+            </a:r>
+            <a:r>
+              <a:rPr b="1"/>
+              <a:t>Ch. 2</a:t>
+            </a:r>
+            <a:r>
+              <a:rPr/>
+              <a:t>, Displaying Data. Read “How to draw a good graph” closely: it is the standard every figure you hand in this term is held to</a:t>
+            </a:r>
+          </a:p>
+          <a:p>
+            <a:pPr lvl="0"/>
+            <a:r>
+              <a:rPr b="1"/>
+              <a:t>Gotelli &amp; Ellison</a:t>
+            </a:r>
+            <a:r>
+              <a:rPr/>
+              <a:t>, </a:t>
+            </a:r>
+            <a:r>
+              <a:rPr i="1"/>
+              <a:t>A Primer of Ecological Statistics</a:t>
+            </a:r>
+            <a:r>
+              <a:rPr/>
+              <a:t> — </a:t>
+            </a:r>
+            <a:r>
+              <a:rPr b="1"/>
+              <a:t>Ch. 3</a:t>
+            </a:r>
+            <a:r>
+              <a:rPr/>
+              <a:t>, Summary Statistics, for the distributions behind the boxplots and histograms</a:t>
+            </a:r>
+          </a:p>
+          <a:p>
+            <a:pPr lvl="0" indent="0" marL="0">
+              <a:buNone/>
+            </a:pPr>
+            <a:r>
+              <a:rPr b="1"/>
+              <a:t>If you want more:</a:t>
+            </a:r>
+          </a:p>
+          <a:p>
+            <a:pPr lvl="0"/>
+            <a:r>
+              <a:rPr/>
+              <a:t>Whitlock &amp; Schluter, Ch. 4 — Estimating with Uncertainty, on what an error bar actually claims</a:t>
+            </a:r>
+          </a:p>
+          <a:p>
+            <a:pPr lvl="0" indent="0" marL="1270000">
+              <a:buNone/>
+            </a:pPr>
+            <a:r>
+              <a:rPr sz="2000" b="1"/>
+              <a:t>Note</a:t>
+            </a:r>
+          </a:p>
+          <a:p>
+            <a:pPr lvl="0" indent="0" marL="1270000">
+              <a:buNone/>
+            </a:pPr>
+            <a:r>
+              <a:rPr sz="2000" b="1"/>
+              <a:t>✅ Key idea</a:t>
+            </a:r>
+          </a:p>
+          <a:p>
+            <a:pPr lvl="0" indent="0" marL="1270000">
+              <a:buNone/>
+            </a:pPr>
+            <a:r>
+              <a:rPr sz="2000"/>
+              <a:t>W&amp;S tells you </a:t>
+            </a:r>
+            <a:r>
+              <a:rPr sz="2000" i="1"/>
+              <a:t>which</a:t>
+            </a:r>
+            <a:r>
+              <a:rPr sz="2000"/>
+              <a:t> graph is honest. R4DS tells you </a:t>
+            </a:r>
+            <a:r>
+              <a:rPr sz="2000" i="1"/>
+              <a:t>how</a:t>
+            </a:r>
+            <a:r>
+              <a:rPr sz="2000"/>
+              <a:t> to draw it. You need both.</a:t>
+            </a:r>
+          </a:p>
+        </p:txBody>
+      </p:sp>
+      <p:sp>
+        <p:nvSpPr>
+          <p:cNvPr id="4" name="Content Placeholder 3"/>
+          <p:cNvSpPr>
+            <a:spLocks noGrp="1"/>
+          </p:cNvSpPr>
+          <p:nvPr>
+            <p:ph idx="2" sz="half"/>
+          </p:nvPr>
+        </p:nvSpPr>
+        <p:spPr/>
+        <p:txBody>
+          <a:bodyPr/>
+          <a:lstStyle/>
+          <a:p>
+            <a:pPr lvl="0" indent="0" marL="1270000">
+              <a:buNone/>
+            </a:pPr>
+            <a:r>
+              <a:rPr sz="2000" b="1"/>
+              <a:t>Note</a:t>
+            </a:r>
+          </a:p>
+          <a:p>
+            <a:pPr lvl="0" indent="0" marL="1270000">
+              <a:buNone/>
+            </a:pPr>
+            <a:r>
+              <a:rPr sz="2000" b="1"/>
+              <a:t>📖 R for Data Science (2e)</a:t>
+            </a:r>
+          </a:p>
+          <a:p>
+            <a:pPr lvl="0" indent="0" marL="1270000">
+              <a:buNone/>
+            </a:pPr>
+            <a:r>
+              <a:rPr sz="2000"/>
+              <a:t>Free online at </a:t>
+            </a:r>
+            <a:r>
+              <a:rPr sz="2000">
+                <a:hlinkClick r:id="rId2"/>
+              </a:rPr>
+              <a:t>r4ds.hadley.nz</a:t>
+            </a:r>
+            <a:r>
+              <a:rPr sz="2000"/>
+              <a:t>:</a:t>
+            </a:r>
+          </a:p>
+          <a:p>
+            <a:pPr lvl="0"/>
+            <a:r>
+              <a:rPr sz="2000">
+                <a:hlinkClick r:id="rId3"/>
+              </a:rPr>
+              <a:t>§1 — Data visualization</a:t>
+            </a:r>
+          </a:p>
+          <a:p>
+            <a:pPr lvl="0"/>
+            <a:r>
+              <a:rPr sz="2000">
+                <a:hlinkClick r:id="rId4"/>
+              </a:rPr>
+              <a:t>§9 — Layers</a:t>
+            </a:r>
+            <a:r>
+              <a:rPr sz="2000"/>
+              <a:t> — geoms, aesthetics, positions, facets</a:t>
+            </a:r>
+          </a:p>
+          <a:p>
+            <a:pPr lvl="0"/>
+            <a:r>
+              <a:rPr sz="2000">
+                <a:hlinkClick r:id="rId5"/>
+              </a:rPr>
+              <a:t>§10 — Exploratory data analysis</a:t>
+            </a:r>
+            <a:r>
+              <a:rPr sz="2000"/>
+              <a:t> — histograms and distribution shape</a:t>
+            </a:r>
+          </a:p>
+          <a:p>
+            <a:pPr lvl="0"/>
+            <a:r>
+              <a:rPr sz="2000">
+                <a:hlinkClick r:id="rId6"/>
+              </a:rPr>
+              <a:t>§11 — Communication</a:t>
+            </a:r>
+            <a:r>
+              <a:rPr sz="2000"/>
+              <a:t> — labels, scales, themes, saving</a:t>
+            </a:r>
+          </a:p>
+        </p:txBody>
+      </p:sp>
+    </p:spTree>
+  </p:cSld>
+</p:sld>
+</file>
+
+<file path=ppt/slides/slide37.xml><?xml version="1.0" encoding="utf-8"?>
+<p:sld xmlns:a="http://schemas.openxmlformats.org/drawingml/2006/main" xmlns:r="http://schemas.openxmlformats.org/officeDocument/2006/relationships" xmlns:p="http://schemas.openxmlformats.org/presentationml/2006/main">
+  <p:cSld>
+    <p:spTree>
+      <p:nvGrpSpPr>
+        <p:cNvPr id="1" name=""/>
+        <p:cNvGrpSpPr/>
+        <p:nvPr/>
+      </p:nvGrpSpPr>
+      <p:grpSpPr>
+        <a:xfrm>
+          <a:off x="0" y="0"/>
+          <a:ext cx="0" cy="0"/>
+          <a:chOff x="0" y="0"/>
+          <a:chExt cx="0" cy="0"/>
+        </a:xfrm>
+      </p:grpSpPr>
+      <p:sp>
+        <p:nvSpPr>
+          <p:cNvPr id="2" name="Title 1"/>
+          <p:cNvSpPr>
+            <a:spLocks noGrp="1"/>
+          </p:cNvSpPr>
+          <p:nvPr>
+            <p:ph type="title"/>
+          </p:nvPr>
+        </p:nvSpPr>
+        <p:spPr>
+          <a:xfrm>
+            <a:off x="0" y="0"/>
             <a:ext cx="9144000" cy="582780"/>
           </a:xfrm>
         </p:spPr>
@@ -16979,6 +17571,17 @@
             <a:r>
               <a:rPr/>
               <a:t> (copy-paste it) to class or office hours</a:t>
+            </a:r>
+          </a:p>
+          <a:p>
+            <a:pPr lvl="0" indent="0" marL="0">
+              <a:buNone/>
+            </a:pPr>
+            <a:r>
+              <a:rPr>
+                <a:hlinkClick r:id="rId2"/>
+              </a:rPr>
+              <a:t>📖 R4DS §8 — Workflow: getting help</a:t>
             </a:r>
           </a:p>
           <a:p>
@@ -17292,6 +17895,62 @@
               <a:t> — we’re just adding more layers and more polish on top of them.</a:t>
             </a:r>
           </a:p>
+          <a:p>
+            <a:pPr lvl="0" indent="0" marL="1270000">
+              <a:buNone/>
+            </a:pPr>
+            <a:r>
+              <a:rPr sz="2000" b="1"/>
+              <a:t>Note</a:t>
+            </a:r>
+          </a:p>
+          <a:p>
+            <a:pPr lvl="0" indent="0" marL="1270000">
+              <a:buNone/>
+            </a:pPr>
+            <a:r>
+              <a:rPr sz="2000" b="1"/>
+              <a:t>📖 Reference</a:t>
+            </a:r>
+          </a:p>
+          <a:p>
+            <a:pPr lvl="0" indent="0" marL="1270000">
+              <a:buNone/>
+            </a:pPr>
+            <a:r>
+              <a:rPr sz="2000"/>
+              <a:t>Whitlock &amp; Schluter, </a:t>
+            </a:r>
+            <a:r>
+              <a:rPr sz="2000" i="1"/>
+              <a:t>The Analysis of Biological Data</a:t>
+            </a:r>
+            <a:r>
+              <a:rPr sz="2000"/>
+              <a:t>, Ch. 2 — Displaying Data, is the core reference for this whole lecture.</a:t>
+            </a:r>
+          </a:p>
+          <a:p>
+            <a:pPr lvl="0" indent="0" marL="1270000">
+              <a:buNone/>
+            </a:pPr>
+            <a:r>
+              <a:rPr sz="2000">
+                <a:hlinkClick r:id="rId3"/>
+              </a:rPr>
+              <a:t>📖 R4DS §1 — Data visualization</a:t>
+            </a:r>
+            <a:r>
+              <a:rPr sz="2000"/>
+              <a:t> and </a:t>
+            </a:r>
+            <a:r>
+              <a:rPr sz="2000">
+                <a:hlinkClick r:id="rId4"/>
+              </a:rPr>
+              <a:t>§9 — Layers</a:t>
+            </a:r>
+          </a:p>
         </p:txBody>
       </p:sp>
       <p:sp>
@@ -18262,6 +18921,17 @@
             </a:pPr>
             <a:r>
               <a:rPr/>
+              <a:t>Whitlock &amp; Schluter, Ch. 2 — Displaying Data, on the boxplot and the five-number summary it draws.</a:t>
+            </a:r>
+          </a:p>
+          <a:p>
+            <a:pPr lvl="0" indent="0" marL="0">
+              <a:buNone/>
+            </a:pPr>
+            <a:r>
+              <a:rPr>
+                <a:hlinkClick r:id="rId3"/>
+              </a:rPr>
               <a:t>📖 R4DS §9 — Layers</a:t>
             </a:r>
           </a:p>
@@ -19293,6 +19963,33 @@
             <a:r>
               <a:rPr sz="2000"/>
               <a:t> is small — every point matters, and a box alone can hide a bimodal or lopsided pattern.</a:t>
+            </a:r>
+          </a:p>
+          <a:p>
+            <a:pPr lvl="0" indent="0" marL="1270000">
+              <a:buNone/>
+            </a:pPr>
+            <a:r>
+              <a:rPr sz="2000" b="1"/>
+              <a:t>Note</a:t>
+            </a:r>
+          </a:p>
+          <a:p>
+            <a:pPr lvl="0" indent="0" marL="1270000">
+              <a:buNone/>
+            </a:pPr>
+            <a:r>
+              <a:rPr sz="2000" b="1"/>
+              <a:t>📖 Reference</a:t>
+            </a:r>
+          </a:p>
+          <a:p>
+            <a:pPr lvl="0" indent="0" marL="1270000">
+              <a:buNone/>
+            </a:pPr>
+            <a:r>
+              <a:rPr sz="2000"/>
+              <a:t>Whitlock &amp; Schluter, Ch. 2 — Displaying Data, “How to draw a good graph,” makes exactly this argument: show the data, not only the summary.</a:t>
             </a:r>
           </a:p>
         </p:txBody>

--- a/docs/content/graphing_effectively/graphing_effectively_lecture.pptx
+++ b/docs/content/graphing_effectively/graphing_effectively_lecture.pptx
@@ -62,7 +62,6 @@
     <p:sldId id="310" r:id="rId56"/>
     <p:sldId id="311" r:id="rId57"/>
     <p:sldId id="312" r:id="rId58"/>
-    <p:sldId id="313" r:id="rId59"/>
   </p:sldIdLst>
   <p:sldSz cx="9144000" cy="5143500" type="screen16x9"/>
   <p:notesSz cx="6858000" cy="9144000"/>
@@ -26048,219 +26047,6 @@
             <a:r>
               <a:rPr sz="2000"/>
               <a:t> — labels, scales, themes, saving</a:t>
-            </a:r>
-          </a:p>
-        </p:txBody>
-      </p:sp>
-    </p:spTree>
-  </p:cSld>
-</p:sld>
-</file>
-
-<file path=ppt/slides/slide58.xml><?xml version="1.0" encoding="utf-8"?>
-<p:sld xmlns:a="http://schemas.openxmlformats.org/drawingml/2006/main" xmlns:r="http://schemas.openxmlformats.org/officeDocument/2006/relationships" xmlns:p="http://schemas.openxmlformats.org/presentationml/2006/main">
-  <p:cSld>
-    <p:spTree>
-      <p:nvGrpSpPr>
-        <p:cNvPr id="1" name=""/>
-        <p:cNvGrpSpPr/>
-        <p:nvPr/>
-      </p:nvGrpSpPr>
-      <p:grpSpPr>
-        <a:xfrm>
-          <a:off x="0" y="0"/>
-          <a:ext cx="0" cy="0"/>
-          <a:chOff x="0" y="0"/>
-          <a:chExt cx="0" cy="0"/>
-        </a:xfrm>
-      </p:grpSpPr>
-      <p:sp>
-        <p:nvSpPr>
-          <p:cNvPr id="2" name="Title 1"/>
-          <p:cNvSpPr>
-            <a:spLocks noGrp="1"/>
-          </p:cNvSpPr>
-          <p:nvPr>
-            <p:ph type="title"/>
-          </p:nvPr>
-        </p:nvSpPr>
-        <p:spPr>
-          <a:xfrm>
-            <a:off x="0" y="0"/>
-            <a:ext cx="9144000" cy="582780"/>
-          </a:xfrm>
-        </p:spPr>
-        <p:txBody>
-          <a:bodyPr/>
-          <a:lstStyle/>
-          <a:p>
-            <a:pPr lvl="0" indent="0" marL="0">
-              <a:buNone/>
-            </a:pPr>
-            <a:r>
-              <a:rPr/>
-              <a:t>Getting unstuck</a:t>
-            </a:r>
-          </a:p>
-        </p:txBody>
-      </p:sp>
-      <p:sp>
-        <p:nvSpPr>
-          <p:cNvPr id="3" name="Content Placeholder 2"/>
-          <p:cNvSpPr>
-            <a:spLocks noGrp="1"/>
-          </p:cNvSpPr>
-          <p:nvPr>
-            <p:ph idx="1"/>
-          </p:nvPr>
-        </p:nvSpPr>
-        <p:spPr/>
-        <p:txBody>
-          <a:bodyPr/>
-          <a:lstStyle/>
-          <a:p>
-            <a:pPr lvl="0" indent="0" marL="0">
-              <a:buNone/>
-            </a:pPr>
-            <a:r>
-              <a:rPr/>
-              <a:t>When code breaks — and it will, that is normal:</a:t>
-            </a:r>
-          </a:p>
-          <a:p>
-            <a:pPr lvl="0" indent="-342900" marL="342900">
-              <a:buAutoNum type="arabicPeriod"/>
-            </a:pPr>
-            <a:r>
-              <a:rPr/>
-              <a:t>Read the </a:t>
-            </a:r>
-            <a:r>
-              <a:rPr b="1"/>
-              <a:t>error message</a:t>
-            </a:r>
-            <a:r>
-              <a:rPr/>
-              <a:t> out loud; it usually names the line</a:t>
-            </a:r>
-          </a:p>
-          <a:p>
-            <a:pPr lvl="0" indent="-342900" marL="342900">
-              <a:buAutoNum type="arabicPeriod"/>
-            </a:pPr>
-            <a:r>
-              <a:rPr/>
-              <a:t>Check the usual suspects: </a:t>
-            </a:r>
-            <a:r>
-              <a:rPr>
-                <a:latin typeface="Courier"/>
-              </a:rPr>
-              <a:t>library(tidyverse)</a:t>
-            </a:r>
-            <a:r>
-              <a:rPr/>
-              <a:t> loaded? Is </a:t>
-            </a:r>
-            <a:r>
-              <a:rPr>
-                <a:latin typeface="Courier"/>
-              </a:rPr>
-              <a:t>color</a:t>
-            </a:r>
-            <a:r>
-              <a:rPr/>
-              <a:t>/</a:t>
-            </a:r>
-            <a:r>
-              <a:rPr>
-                <a:latin typeface="Courier"/>
-              </a:rPr>
-              <a:t>fill</a:t>
-            </a:r>
-            <a:r>
-              <a:rPr/>
-              <a:t> inside </a:t>
-            </a:r>
-            <a:r>
-              <a:rPr>
-                <a:latin typeface="Courier"/>
-              </a:rPr>
-              <a:t>aes()</a:t>
-            </a:r>
-            <a:r>
-              <a:rPr/>
-              <a:t> when it should be?</a:t>
-            </a:r>
-          </a:p>
-          <a:p>
-            <a:pPr lvl="0" indent="-342900" marL="342900">
-              <a:buAutoNum type="arabicPeriod"/>
-            </a:pPr>
-            <a:r>
-              <a:rPr>
-                <a:latin typeface="Courier"/>
-              </a:rPr>
-              <a:t>?function_name</a:t>
-            </a:r>
-            <a:r>
-              <a:rPr/>
-              <a:t> opens the help page</a:t>
-            </a:r>
-          </a:p>
-          <a:p>
-            <a:pPr lvl="0" indent="-342900" marL="342900">
-              <a:buAutoNum type="arabicPeriod"/>
-            </a:pPr>
-            <a:r>
-              <a:rPr/>
-              <a:t>Bring the </a:t>
-            </a:r>
-            <a:r>
-              <a:rPr b="1"/>
-              <a:t>exact error</a:t>
-            </a:r>
-            <a:r>
-              <a:rPr/>
-              <a:t> (copy-paste it) to class or office hours</a:t>
-            </a:r>
-          </a:p>
-          <a:p>
-            <a:pPr lvl="0" indent="0" marL="0">
-              <a:buNone/>
-            </a:pPr>
-            <a:r>
-              <a:rPr>
-                <a:hlinkClick r:id="rId2"/>
-              </a:rPr>
-              <a:t>📖 R4DS §8 — Workflow: getting help</a:t>
-            </a:r>
-          </a:p>
-          <a:p>
-            <a:pPr lvl="0" indent="0" marL="1270000">
-              <a:buNone/>
-            </a:pPr>
-            <a:r>
-              <a:rPr sz="2000" b="1"/>
-              <a:t>Note</a:t>
-            </a:r>
-          </a:p>
-          <a:p>
-            <a:pPr lvl="0" indent="0" marL="1270000">
-              <a:buNone/>
-            </a:pPr>
-            <a:r>
-              <a:rPr sz="2000" b="1"/>
-              <a:t>✅ Key idea</a:t>
-            </a:r>
-          </a:p>
-          <a:p>
-            <a:pPr lvl="0" indent="0" marL="1270000">
-              <a:buNone/>
-            </a:pPr>
-            <a:r>
-              <a:rPr sz="2000"/>
-              <a:t>Every working scientist googles error messages daily. Getting stuck is not failing — it is the job.</a:t>
             </a:r>
           </a:p>
         </p:txBody>
